--- a/lectures/lecture08.pptx
+++ b/lectures/lecture08.pptx
@@ -4,6 +4,9 @@
   <p:sldMasterIdLst>
     <p:sldMasterId id="2147483648" r:id="rId1"/>
   </p:sldMasterIdLst>
+  <p:notesMasterIdLst>
+    <p:notesMasterId r:id="rId31"/>
+  </p:notesMasterIdLst>
   <p:sldIdLst>
     <p:sldId id="256" r:id="rId2"/>
     <p:sldId id="257" r:id="rId3"/>
@@ -13,7 +16,7 @@
     <p:sldId id="261" r:id="rId7"/>
     <p:sldId id="262" r:id="rId8"/>
     <p:sldId id="263" r:id="rId9"/>
-    <p:sldId id="264" r:id="rId10"/>
+    <p:sldId id="285" r:id="rId10"/>
     <p:sldId id="265" r:id="rId11"/>
     <p:sldId id="266" r:id="rId12"/>
     <p:sldId id="267" r:id="rId13"/>
@@ -35,10 +38,7 @@
     <p:sldId id="283" r:id="rId29"/>
     <p:sldId id="284" r:id="rId30"/>
   </p:sldIdLst>
-  <p:notesMasterIdLst>
-    <p:notesMasterId r:id="rId31"/>
-  </p:notesMasterIdLst>
-  <p:sldSz cx="9144000" cy="5143500"/>
+  <p:sldSz cx="9144000" cy="5143500" type="screen16x9"/>
   <p:notesSz cx="5143500" cy="9144000"/>
   <p:defaultTextStyle>
     <a:lvl1pPr marL="0" algn="l" defTabSz="914400" rtl="0" eaLnBrk="1" latinLnBrk="0" hangingPunct="1">
@@ -132,6 +132,11 @@
       </a:defRPr>
     </a:lvl9pPr>
   </p:defaultTextStyle>
+  <p:extLst>
+    <p:ext uri="{EFAFB233-063F-42B5-8137-9DF3F51BA10A}">
+      <p15:sldGuideLst xmlns:p15="http://schemas.microsoft.com/office/powerpoint/2012/main"/>
+    </p:ext>
+  </p:extLst>
 </p:presentation>
 </file>
 
@@ -157,234 +162,10 @@
           <a:chExt cx="0" cy="0"/>
         </a:xfrm>
       </p:grpSpPr>
-      <p:sp>
-        <p:nvSpPr>
-          <p:cNvPr id="2" name="Header Placeholder 1"/>
-          <p:cNvSpPr>
-            <a:spLocks noGrp="1"/>
-          </p:cNvSpPr>
-          <p:nvPr>
-            <p:ph type="hdr" sz="quarter"/>
-          </p:nvPr>
-        </p:nvSpPr>
-        <p:spPr>
-          <a:xfrm>
-            <a:off x="0" y="0"/>
-            <a:ext cx="2971800" cy="458788"/>
-          </a:xfrm>
-          <a:prstGeom prst="rect">
-            <a:avLst/>
-          </a:prstGeom>
-        </p:spPr>
-        <p:txBody>
-          <a:bodyPr vert="horz" lIns="91440" tIns="45720" rIns="91440" bIns="45720" rtlCol="0"/>
-          <a:lstStyle>
-            <a:lvl1pPr algn="l">
-              <a:defRPr sz="1200"/>
-            </a:lvl1pPr>
-          </a:lstStyle>
-          <a:p>
-            <a:endParaRPr lang="en-US"/>
-          </a:p>
-        </p:txBody>
-      </p:sp>
-      <p:sp>
-        <p:nvSpPr>
-          <p:cNvPr id="3" name="Date Placeholder 2"/>
-          <p:cNvSpPr>
-            <a:spLocks noGrp="1"/>
-          </p:cNvSpPr>
-          <p:nvPr>
-            <p:ph type="dt" idx="1"/>
-          </p:nvPr>
-        </p:nvSpPr>
-        <p:spPr>
-          <a:xfrm>
-            <a:off x="3884613" y="0"/>
-            <a:ext cx="2971800" cy="458788"/>
-          </a:xfrm>
-          <a:prstGeom prst="rect">
-            <a:avLst/>
-          </a:prstGeom>
-        </p:spPr>
-        <p:txBody>
-          <a:bodyPr vert="horz" lIns="91440" tIns="45720" rIns="91440" bIns="45720" rtlCol="0"/>
-          <a:lstStyle>
-            <a:lvl1pPr algn="r">
-              <a:defRPr sz="1200"/>
-            </a:lvl1pPr>
-          </a:lstStyle>
-          <a:p>
-            <a:fld id="{5282F153-3F37-0F45-9E97-73ACFA13230C}" type="datetimeFigureOut">
-              <a:rPr lang="en-US"/>
-              <a:t>7/23/19</a:t>
-            </a:fld>
-            <a:endParaRPr lang="en-US"/>
-          </a:p>
-        </p:txBody>
-      </p:sp>
-      <p:sp>
-        <p:nvSpPr>
-          <p:cNvPr id="4" name="Slide Image Placeholder 3"/>
-          <p:cNvSpPr>
-            <a:spLocks noGrp="1" noRot="1" noChangeAspect="1"/>
-          </p:cNvSpPr>
-          <p:nvPr>
-            <p:ph type="sldImg" idx="2"/>
-          </p:nvPr>
-        </p:nvSpPr>
-        <p:spPr>
-          <a:xfrm>
-            <a:off x="685800" y="1143000"/>
-            <a:ext cx="5486400" cy="3086100"/>
-          </a:xfrm>
-          <a:prstGeom prst="rect">
-            <a:avLst/>
-          </a:prstGeom>
-          <a:noFill/>
-          <a:ln w="12700">
-            <a:solidFill>
-              <a:prstClr val="black"/>
-            </a:solidFill>
-          </a:ln>
-        </p:spPr>
-        <p:txBody>
-          <a:bodyPr vert="horz" lIns="91440" tIns="45720" rIns="91440" bIns="45720" rtlCol="0" anchor="ctr"/>
-          <a:lstStyle/>
-          <a:p>
-            <a:endParaRPr lang="en-US"/>
-          </a:p>
-        </p:txBody>
-      </p:sp>
-      <p:sp>
-        <p:nvSpPr>
-          <p:cNvPr id="5" name="Notes Placeholder 4"/>
-          <p:cNvSpPr>
-            <a:spLocks noGrp="1"/>
-          </p:cNvSpPr>
-          <p:nvPr>
-            <p:ph type="body" sz="quarter" idx="3"/>
-          </p:nvPr>
-        </p:nvSpPr>
-        <p:spPr>
-          <a:xfrm>
-            <a:off x="685800" y="4400550"/>
-            <a:ext cx="5486400" cy="3600450"/>
-          </a:xfrm>
-          <a:prstGeom prst="rect">
-            <a:avLst/>
-          </a:prstGeom>
-        </p:spPr>
-        <p:txBody>
-          <a:bodyPr vert="horz" lIns="91440" tIns="45720" rIns="91440" bIns="45720" rtlCol="0"/>
-          <a:lstStyle/>
-          <a:p>
-            <a:pPr lvl="0"/>
-            <a:r>
-              <a:rPr lang="en-US"/>
-              <a:t>Click to edit Master text styles</a:t>
-            </a:r>
-          </a:p>
-          <a:p>
-            <a:pPr lvl="1"/>
-            <a:r>
-              <a:rPr lang="en-US"/>
-              <a:t>Second level</a:t>
-            </a:r>
-          </a:p>
-          <a:p>
-            <a:pPr lvl="2"/>
-            <a:r>
-              <a:rPr lang="en-US"/>
-              <a:t>Third level</a:t>
-            </a:r>
-          </a:p>
-          <a:p>
-            <a:pPr lvl="3"/>
-            <a:r>
-              <a:rPr lang="en-US"/>
-              <a:t>Fourth level</a:t>
-            </a:r>
-          </a:p>
-          <a:p>
-            <a:pPr lvl="4"/>
-            <a:r>
-              <a:rPr lang="en-US"/>
-              <a:t>Fifth level</a:t>
-            </a:r>
-          </a:p>
-        </p:txBody>
-      </p:sp>
-      <p:sp>
-        <p:nvSpPr>
-          <p:cNvPr id="6" name="Footer Placeholder 5"/>
-          <p:cNvSpPr>
-            <a:spLocks noGrp="1"/>
-          </p:cNvSpPr>
-          <p:nvPr>
-            <p:ph type="ftr" sz="quarter" idx="4"/>
-          </p:nvPr>
-        </p:nvSpPr>
-        <p:spPr>
-          <a:xfrm>
-            <a:off x="0" y="8685213"/>
-            <a:ext cx="2971800" cy="458787"/>
-          </a:xfrm>
-          <a:prstGeom prst="rect">
-            <a:avLst/>
-          </a:prstGeom>
-        </p:spPr>
-        <p:txBody>
-          <a:bodyPr vert="horz" lIns="91440" tIns="45720" rIns="91440" bIns="45720" rtlCol="0" anchor="b"/>
-          <a:lstStyle>
-            <a:lvl1pPr algn="l">
-              <a:defRPr sz="1200"/>
-            </a:lvl1pPr>
-          </a:lstStyle>
-          <a:p>
-            <a:endParaRPr lang="en-US"/>
-          </a:p>
-        </p:txBody>
-      </p:sp>
-      <p:sp>
-        <p:nvSpPr>
-          <p:cNvPr id="7" name="Slide Number Placeholder 6"/>
-          <p:cNvSpPr>
-            <a:spLocks noGrp="1"/>
-          </p:cNvSpPr>
-          <p:nvPr>
-            <p:ph type="sldNum" sz="quarter" idx="5"/>
-          </p:nvPr>
-        </p:nvSpPr>
-        <p:spPr>
-          <a:xfrm>
-            <a:off x="3884613" y="8685213"/>
-            <a:ext cx="2971800" cy="458787"/>
-          </a:xfrm>
-          <a:prstGeom prst="rect">
-            <a:avLst/>
-          </a:prstGeom>
-        </p:spPr>
-        <p:txBody>
-          <a:bodyPr vert="horz" lIns="91440" tIns="45720" rIns="91440" bIns="45720" rtlCol="0" anchor="b"/>
-          <a:lstStyle>
-            <a:lvl1pPr algn="r">
-              <a:defRPr sz="1200"/>
-            </a:lvl1pPr>
-          </a:lstStyle>
-          <a:p>
-            <a:fld id="{CE5E9CC1-C706-0F49-92D6-E571CC5EEA8F}" type="slidenum">
-              <a:rPr lang="en-US"/>
-              <a:t>‹#›</a:t>
-            </a:fld>
-            <a:endParaRPr lang="en-US"/>
-          </a:p>
-        </p:txBody>
-      </p:sp>
     </p:spTree>
     <p:extLst>
       <p:ext uri="{BB962C8B-B14F-4D97-AF65-F5344CB8AC3E}">
-        <p14:creationId xmlns:p14="http://schemas.microsoft.com/office/powerpoint/2010/main" val="1024086991"/>
+        <p14:creationId xmlns:p14="http://schemas.microsoft.com/office/powerpoint/2010/main" val="115184017"/>
       </p:ext>
     </p:extLst>
   </p:cSld>
@@ -528,10 +309,6 @@
           <a:bodyPr/>
           <a:lstStyle/>
           <a:p>
-            <a:r>
-              <a:rPr lang="en-US" dirty="0"/>
-              <a:t/>
-            </a:r>
             <a:endParaRPr lang="en-US" dirty="0"/>
           </a:p>
         </p:txBody>
@@ -616,10 +393,6 @@
           <a:bodyPr/>
           <a:lstStyle/>
           <a:p>
-            <a:r>
-              <a:rPr lang="en-US" dirty="0"/>
-              <a:t/>
-            </a:r>
             <a:endParaRPr lang="en-US" dirty="0"/>
           </a:p>
         </p:txBody>
@@ -704,10 +477,6 @@
           <a:bodyPr/>
           <a:lstStyle/>
           <a:p>
-            <a:r>
-              <a:rPr lang="en-US" dirty="0"/>
-              <a:t/>
-            </a:r>
             <a:endParaRPr lang="en-US" dirty="0"/>
           </a:p>
         </p:txBody>
@@ -792,10 +561,6 @@
           <a:bodyPr/>
           <a:lstStyle/>
           <a:p>
-            <a:r>
-              <a:rPr lang="en-US" dirty="0"/>
-              <a:t/>
-            </a:r>
             <a:endParaRPr lang="en-US" dirty="0"/>
           </a:p>
         </p:txBody>
@@ -880,10 +645,6 @@
           <a:bodyPr/>
           <a:lstStyle/>
           <a:p>
-            <a:r>
-              <a:rPr lang="en-US" dirty="0"/>
-              <a:t/>
-            </a:r>
             <a:endParaRPr lang="en-US" dirty="0"/>
           </a:p>
         </p:txBody>
@@ -968,10 +729,6 @@
           <a:bodyPr/>
           <a:lstStyle/>
           <a:p>
-            <a:r>
-              <a:rPr lang="en-US" dirty="0"/>
-              <a:t/>
-            </a:r>
             <a:endParaRPr lang="en-US" dirty="0"/>
           </a:p>
         </p:txBody>
@@ -1056,10 +813,6 @@
           <a:bodyPr/>
           <a:lstStyle/>
           <a:p>
-            <a:r>
-              <a:rPr lang="en-US" dirty="0"/>
-              <a:t/>
-            </a:r>
             <a:endParaRPr lang="en-US" dirty="0"/>
           </a:p>
         </p:txBody>
@@ -1144,10 +897,6 @@
           <a:bodyPr/>
           <a:lstStyle/>
           <a:p>
-            <a:r>
-              <a:rPr lang="en-US" dirty="0"/>
-              <a:t/>
-            </a:r>
             <a:endParaRPr lang="en-US" dirty="0"/>
           </a:p>
         </p:txBody>
@@ -1232,10 +981,6 @@
           <a:bodyPr/>
           <a:lstStyle/>
           <a:p>
-            <a:r>
-              <a:rPr lang="en-US" dirty="0"/>
-              <a:t/>
-            </a:r>
             <a:endParaRPr lang="en-US" dirty="0"/>
           </a:p>
         </p:txBody>
@@ -1320,10 +1065,6 @@
           <a:bodyPr/>
           <a:lstStyle/>
           <a:p>
-            <a:r>
-              <a:rPr lang="en-US" dirty="0"/>
-              <a:t/>
-            </a:r>
             <a:endParaRPr lang="en-US" dirty="0"/>
           </a:p>
         </p:txBody>
@@ -1408,10 +1149,6 @@
           <a:bodyPr/>
           <a:lstStyle/>
           <a:p>
-            <a:r>
-              <a:rPr lang="en-US" dirty="0"/>
-              <a:t/>
-            </a:r>
             <a:endParaRPr lang="en-US" dirty="0"/>
           </a:p>
         </p:txBody>
@@ -1496,10 +1233,6 @@
           <a:bodyPr/>
           <a:lstStyle/>
           <a:p>
-            <a:r>
-              <a:rPr lang="en-US" dirty="0"/>
-              <a:t/>
-            </a:r>
             <a:endParaRPr lang="en-US" dirty="0"/>
           </a:p>
         </p:txBody>
@@ -1584,10 +1317,6 @@
           <a:bodyPr/>
           <a:lstStyle/>
           <a:p>
-            <a:r>
-              <a:rPr lang="en-US" dirty="0"/>
-              <a:t/>
-            </a:r>
             <a:endParaRPr lang="en-US" dirty="0"/>
           </a:p>
         </p:txBody>
@@ -1672,10 +1401,6 @@
           <a:bodyPr/>
           <a:lstStyle/>
           <a:p>
-            <a:r>
-              <a:rPr lang="en-US" dirty="0"/>
-              <a:t/>
-            </a:r>
             <a:endParaRPr lang="en-US" dirty="0"/>
           </a:p>
         </p:txBody>
@@ -1760,10 +1485,6 @@
           <a:bodyPr/>
           <a:lstStyle/>
           <a:p>
-            <a:r>
-              <a:rPr lang="en-US" dirty="0"/>
-              <a:t/>
-            </a:r>
             <a:endParaRPr lang="en-US" dirty="0"/>
           </a:p>
         </p:txBody>
@@ -1848,10 +1569,6 @@
           <a:bodyPr/>
           <a:lstStyle/>
           <a:p>
-            <a:r>
-              <a:rPr lang="en-US" dirty="0"/>
-              <a:t/>
-            </a:r>
             <a:endParaRPr lang="en-US" dirty="0"/>
           </a:p>
         </p:txBody>
@@ -1936,10 +1653,6 @@
           <a:bodyPr/>
           <a:lstStyle/>
           <a:p>
-            <a:r>
-              <a:rPr lang="en-US" dirty="0"/>
-              <a:t/>
-            </a:r>
             <a:endParaRPr lang="en-US" dirty="0"/>
           </a:p>
         </p:txBody>
@@ -2024,10 +1737,6 @@
           <a:bodyPr/>
           <a:lstStyle/>
           <a:p>
-            <a:r>
-              <a:rPr lang="en-US" dirty="0"/>
-              <a:t/>
-            </a:r>
             <a:endParaRPr lang="en-US" dirty="0"/>
           </a:p>
         </p:txBody>
@@ -2112,10 +1821,6 @@
           <a:bodyPr/>
           <a:lstStyle/>
           <a:p>
-            <a:r>
-              <a:rPr lang="en-US" dirty="0"/>
-              <a:t/>
-            </a:r>
             <a:endParaRPr lang="en-US" dirty="0"/>
           </a:p>
         </p:txBody>
@@ -2200,10 +1905,6 @@
           <a:bodyPr/>
           <a:lstStyle/>
           <a:p>
-            <a:r>
-              <a:rPr lang="en-US" dirty="0"/>
-              <a:t/>
-            </a:r>
             <a:endParaRPr lang="en-US" dirty="0"/>
           </a:p>
         </p:txBody>
@@ -2288,10 +1989,6 @@
           <a:bodyPr/>
           <a:lstStyle/>
           <a:p>
-            <a:r>
-              <a:rPr lang="en-US" dirty="0"/>
-              <a:t/>
-            </a:r>
             <a:endParaRPr lang="en-US" dirty="0"/>
           </a:p>
         </p:txBody>
@@ -2376,10 +2073,6 @@
           <a:bodyPr/>
           <a:lstStyle/>
           <a:p>
-            <a:r>
-              <a:rPr lang="en-US" dirty="0"/>
-              <a:t/>
-            </a:r>
             <a:endParaRPr lang="en-US" dirty="0"/>
           </a:p>
         </p:txBody>
@@ -2464,10 +2157,6 @@
           <a:bodyPr/>
           <a:lstStyle/>
           <a:p>
-            <a:r>
-              <a:rPr lang="en-US" dirty="0"/>
-              <a:t/>
-            </a:r>
             <a:endParaRPr lang="en-US" dirty="0"/>
           </a:p>
         </p:txBody>
@@ -2552,10 +2241,6 @@
           <a:bodyPr/>
           <a:lstStyle/>
           <a:p>
-            <a:r>
-              <a:rPr lang="en-US" dirty="0"/>
-              <a:t/>
-            </a:r>
             <a:endParaRPr lang="en-US" dirty="0"/>
           </a:p>
         </p:txBody>
@@ -2640,10 +2325,6 @@
           <a:bodyPr/>
           <a:lstStyle/>
           <a:p>
-            <a:r>
-              <a:rPr lang="en-US" dirty="0"/>
-              <a:t/>
-            </a:r>
             <a:endParaRPr lang="en-US" dirty="0"/>
           </a:p>
         </p:txBody>
@@ -2728,10 +2409,6 @@
           <a:bodyPr/>
           <a:lstStyle/>
           <a:p>
-            <a:r>
-              <a:rPr lang="en-US" dirty="0"/>
-              <a:t/>
-            </a:r>
             <a:endParaRPr lang="en-US" dirty="0"/>
           </a:p>
         </p:txBody>
@@ -2816,10 +2493,6 @@
           <a:bodyPr/>
           <a:lstStyle/>
           <a:p>
-            <a:r>
-              <a:rPr lang="en-US" dirty="0"/>
-              <a:t/>
-            </a:r>
             <a:endParaRPr lang="en-US" dirty="0"/>
           </a:p>
         </p:txBody>
@@ -2904,10 +2577,6 @@
           <a:bodyPr/>
           <a:lstStyle/>
           <a:p>
-            <a:r>
-              <a:rPr lang="en-US" dirty="0"/>
-              <a:t/>
-            </a:r>
             <a:endParaRPr lang="en-US" dirty="0"/>
           </a:p>
         </p:txBody>
@@ -2992,10 +2661,6 @@
           <a:bodyPr/>
           <a:lstStyle/>
           <a:p>
-            <a:r>
-              <a:rPr lang="en-US" dirty="0"/>
-              <a:t/>
-            </a:r>
             <a:endParaRPr lang="en-US" dirty="0"/>
           </a:p>
         </p:txBody>
@@ -3069,6 +2734,11 @@
 <file path=ppt/slideMasters/slideMaster1.xml><?xml version="1.0" encoding="utf-8"?>
 <p:sldMaster xmlns:a="http://schemas.openxmlformats.org/drawingml/2006/main" xmlns:r="http://schemas.openxmlformats.org/officeDocument/2006/relationships" xmlns:p="http://schemas.openxmlformats.org/presentationml/2006/main">
   <p:cSld>
+    <p:bg>
+      <p:bgRef idx="1001">
+        <a:schemeClr val="bg1"/>
+      </p:bgRef>
+    </p:bg>
     <p:spTree>
       <p:nvGrpSpPr>
         <p:cNvPr id="1" name=""/>
@@ -3351,6 +3021,7 @@
         <a:solidFill>
           <a:srgbClr val="FFFFFF"/>
         </a:solidFill>
+        <a:effectLst/>
       </p:bgPr>
     </p:bg>
     <p:spTree>
@@ -3375,7 +3046,7 @@
         </p:nvSpPr>
         <p:spPr>
           <a:xfrm>
-            <a:off x="548640" y="457200"/>
+            <a:off x="-114300" y="365760"/>
             <a:ext cx="4572000" cy="320040"/>
           </a:xfrm>
           <a:prstGeom prst="rect">
@@ -3388,11 +3059,11 @@
           <a:bodyPr wrap="square" lIns="0" tIns="0" rIns="0" bIns="0" rtlCol="0" anchor="ctr"/>
           <a:lstStyle/>
           <a:p>
-            <a:pPr indent="0" marL="0">
-              <a:buNone/>
-            </a:pPr>
-            <a:r>
-              <a:rPr lang="en-US" sz="1400" b="1" spc="600" kern="0" dirty="0">
+            <a:pPr marL="0" indent="0">
+              <a:buNone/>
+            </a:pPr>
+            <a:r>
+              <a:rPr lang="en-US" sz="1400" b="1" kern="0" spc="600" dirty="0">
                 <a:solidFill>
                   <a:srgbClr val="0E7C7B"/>
                 </a:solidFill>
@@ -3427,7 +3098,7 @@
           <a:bodyPr wrap="square" lIns="0" tIns="0" rIns="0" bIns="0" rtlCol="0" anchor="ctr"/>
           <a:lstStyle/>
           <a:p>
-            <a:pPr indent="0" marL="0">
+            <a:pPr marL="0" indent="0">
               <a:buNone/>
             </a:pPr>
             <a:r>
@@ -3466,7 +3137,7 @@
           <a:bodyPr wrap="square" lIns="0" tIns="0" rIns="0" bIns="0" rtlCol="0" anchor="ctr"/>
           <a:lstStyle/>
           <a:p>
-            <a:pPr indent="0" marL="0">
+            <a:pPr marL="0" indent="0">
               <a:buNone/>
             </a:pPr>
             <a:r>
@@ -3503,6 +3174,13 @@
           </a:solidFill>
           <a:ln/>
         </p:spPr>
+        <p:txBody>
+          <a:bodyPr/>
+          <a:lstStyle/>
+          <a:p>
+            <a:endParaRPr lang="en-US"/>
+          </a:p>
+        </p:txBody>
       </p:sp>
       <p:sp>
         <p:nvSpPr>
@@ -3525,7 +3203,7 @@
           <a:bodyPr wrap="square" lIns="0" tIns="0" rIns="0" bIns="0" rtlCol="0" anchor="ctr"/>
           <a:lstStyle/>
           <a:p>
-            <a:pPr indent="0" marL="0">
+            <a:pPr marL="0" indent="0">
               <a:buNone/>
             </a:pPr>
             <a:r>
@@ -3564,7 +3242,7 @@
           <a:bodyPr wrap="square" lIns="0" tIns="0" rIns="0" bIns="0" rtlCol="0" anchor="ctr"/>
           <a:lstStyle/>
           <a:p>
-            <a:pPr indent="0" marL="0">
+            <a:pPr marL="0" indent="0">
               <a:buNone/>
             </a:pPr>
             <a:r>
@@ -3628,7 +3306,7 @@
           <a:bodyPr wrap="square" lIns="0" tIns="0" rIns="0" bIns="0" rtlCol="0" anchor="ctr"/>
           <a:lstStyle/>
           <a:p>
-            <a:pPr indent="0" marL="0">
+            <a:pPr marL="0" indent="0">
               <a:buNone/>
             </a:pPr>
             <a:r>
@@ -3665,6 +3343,13 @@
           </a:solidFill>
           <a:ln/>
         </p:spPr>
+        <p:txBody>
+          <a:bodyPr/>
+          <a:lstStyle/>
+          <a:p>
+            <a:endParaRPr lang="en-US"/>
+          </a:p>
+        </p:txBody>
       </p:sp>
       <p:sp>
         <p:nvSpPr>
@@ -3687,7 +3372,7 @@
           <a:bodyPr wrap="square" lIns="0" tIns="0" rIns="0" bIns="0" rtlCol="0" anchor="ctr"/>
           <a:lstStyle/>
           <a:p>
-            <a:pPr indent="0" marL="0">
+            <a:pPr marL="0" indent="0">
               <a:buNone/>
             </a:pPr>
             <a:r>
@@ -3726,7 +3411,7 @@
           <a:bodyPr wrap="square" lIns="0" tIns="0" rIns="0" bIns="0" rtlCol="0" anchor="ctr"/>
           <a:lstStyle/>
           <a:p>
-            <a:pPr algn="r" indent="0" marL="0">
+            <a:pPr marL="0" indent="0" algn="r">
               <a:buNone/>
             </a:pPr>
             <a:r>
@@ -3765,7 +3450,7 @@
           <a:bodyPr wrap="square" lIns="0" tIns="0" rIns="0" bIns="0" rtlCol="0" anchor="ctr"/>
           <a:lstStyle/>
           <a:p>
-            <a:pPr indent="0" marL="0">
+            <a:pPr marL="0" indent="0">
               <a:buNone/>
             </a:pPr>
             <a:r>
@@ -3807,6 +3492,13 @@
             <a:prstDash val="solid"/>
           </a:ln>
         </p:spPr>
+        <p:txBody>
+          <a:bodyPr/>
+          <a:lstStyle/>
+          <a:p>
+            <a:endParaRPr lang="en-US"/>
+          </a:p>
+        </p:txBody>
       </p:sp>
       <p:sp>
         <p:nvSpPr>
@@ -3827,6 +3519,13 @@
           </a:solidFill>
           <a:ln/>
         </p:spPr>
+        <p:txBody>
+          <a:bodyPr/>
+          <a:lstStyle/>
+          <a:p>
+            <a:endParaRPr lang="en-US"/>
+          </a:p>
+        </p:txBody>
       </p:sp>
       <p:sp>
         <p:nvSpPr>
@@ -3847,6 +3546,13 @@
           </a:solidFill>
           <a:ln/>
         </p:spPr>
+        <p:txBody>
+          <a:bodyPr/>
+          <a:lstStyle/>
+          <a:p>
+            <a:endParaRPr lang="en-US"/>
+          </a:p>
+        </p:txBody>
       </p:sp>
       <p:sp>
         <p:nvSpPr>
@@ -3869,7 +3575,7 @@
           <a:bodyPr wrap="square" lIns="0" tIns="0" rIns="0" bIns="0" rtlCol="0" anchor="ctr"/>
           <a:lstStyle/>
           <a:p>
-            <a:pPr algn="ctr" indent="0" marL="0">
+            <a:pPr marL="0" indent="0" algn="ctr">
               <a:buNone/>
             </a:pPr>
             <a:r>
@@ -3908,7 +3614,7 @@
           <a:bodyPr wrap="square" lIns="0" tIns="0" rIns="0" bIns="0" rtlCol="0" anchor="ctr"/>
           <a:lstStyle/>
           <a:p>
-            <a:pPr indent="0" marL="0">
+            <a:pPr marL="0" indent="0">
               <a:buNone/>
             </a:pPr>
             <a:r>
@@ -3947,7 +3653,7 @@
           <a:bodyPr wrap="square" lIns="0" tIns="0" rIns="0" bIns="0" rtlCol="0" anchor="ctr"/>
           <a:lstStyle/>
           <a:p>
-            <a:pPr indent="0" marL="0">
+            <a:pPr marL="0" indent="0">
               <a:buNone/>
             </a:pPr>
             <a:r>
@@ -3964,7 +3670,7 @@
             <a:endParaRPr lang="en-US" sz="1100" dirty="0"/>
           </a:p>
           <a:p>
-            <a:pPr indent="0" marL="0">
+            <a:pPr marL="0" indent="0">
               <a:buNone/>
             </a:pPr>
             <a:r>
@@ -4006,6 +3712,13 @@
             <a:prstDash val="solid"/>
           </a:ln>
         </p:spPr>
+        <p:txBody>
+          <a:bodyPr/>
+          <a:lstStyle/>
+          <a:p>
+            <a:endParaRPr lang="en-US"/>
+          </a:p>
+        </p:txBody>
       </p:sp>
       <p:sp>
         <p:nvSpPr>
@@ -4026,6 +3739,13 @@
           </a:solidFill>
           <a:ln/>
         </p:spPr>
+        <p:txBody>
+          <a:bodyPr/>
+          <a:lstStyle/>
+          <a:p>
+            <a:endParaRPr lang="en-US"/>
+          </a:p>
+        </p:txBody>
       </p:sp>
       <p:sp>
         <p:nvSpPr>
@@ -4046,6 +3766,13 @@
           </a:solidFill>
           <a:ln/>
         </p:spPr>
+        <p:txBody>
+          <a:bodyPr/>
+          <a:lstStyle/>
+          <a:p>
+            <a:endParaRPr lang="en-US"/>
+          </a:p>
+        </p:txBody>
       </p:sp>
       <p:sp>
         <p:nvSpPr>
@@ -4068,7 +3795,7 @@
           <a:bodyPr wrap="square" lIns="0" tIns="0" rIns="0" bIns="0" rtlCol="0" anchor="ctr"/>
           <a:lstStyle/>
           <a:p>
-            <a:pPr algn="ctr" indent="0" marL="0">
+            <a:pPr marL="0" indent="0" algn="ctr">
               <a:buNone/>
             </a:pPr>
             <a:r>
@@ -4107,7 +3834,7 @@
           <a:bodyPr wrap="square" lIns="0" tIns="0" rIns="0" bIns="0" rtlCol="0" anchor="ctr"/>
           <a:lstStyle/>
           <a:p>
-            <a:pPr indent="0" marL="0">
+            <a:pPr marL="0" indent="0">
               <a:buNone/>
             </a:pPr>
             <a:r>
@@ -4146,7 +3873,7 @@
           <a:bodyPr wrap="square" lIns="0" tIns="0" rIns="0" bIns="0" rtlCol="0" anchor="ctr"/>
           <a:lstStyle/>
           <a:p>
-            <a:pPr indent="0" marL="0">
+            <a:pPr marL="0" indent="0">
               <a:buNone/>
             </a:pPr>
             <a:r>
@@ -4163,7 +3890,7 @@
             <a:endParaRPr lang="en-US" sz="1100" dirty="0"/>
           </a:p>
           <a:p>
-            <a:pPr indent="0" marL="0">
+            <a:pPr marL="0" indent="0">
               <a:buNone/>
             </a:pPr>
             <a:r>
@@ -4205,6 +3932,13 @@
             <a:prstDash val="solid"/>
           </a:ln>
         </p:spPr>
+        <p:txBody>
+          <a:bodyPr/>
+          <a:lstStyle/>
+          <a:p>
+            <a:endParaRPr lang="en-US"/>
+          </a:p>
+        </p:txBody>
       </p:sp>
       <p:sp>
         <p:nvSpPr>
@@ -4225,6 +3959,13 @@
           </a:solidFill>
           <a:ln/>
         </p:spPr>
+        <p:txBody>
+          <a:bodyPr/>
+          <a:lstStyle/>
+          <a:p>
+            <a:endParaRPr lang="en-US"/>
+          </a:p>
+        </p:txBody>
       </p:sp>
       <p:sp>
         <p:nvSpPr>
@@ -4245,6 +3986,13 @@
           </a:solidFill>
           <a:ln/>
         </p:spPr>
+        <p:txBody>
+          <a:bodyPr/>
+          <a:lstStyle/>
+          <a:p>
+            <a:endParaRPr lang="en-US"/>
+          </a:p>
+        </p:txBody>
       </p:sp>
       <p:sp>
         <p:nvSpPr>
@@ -4267,7 +4015,7 @@
           <a:bodyPr wrap="square" lIns="0" tIns="0" rIns="0" bIns="0" rtlCol="0" anchor="ctr"/>
           <a:lstStyle/>
           <a:p>
-            <a:pPr algn="ctr" indent="0" marL="0">
+            <a:pPr marL="0" indent="0" algn="ctr">
               <a:buNone/>
             </a:pPr>
             <a:r>
@@ -4306,7 +4054,7 @@
           <a:bodyPr wrap="square" lIns="0" tIns="0" rIns="0" bIns="0" rtlCol="0" anchor="ctr"/>
           <a:lstStyle/>
           <a:p>
-            <a:pPr indent="0" marL="0">
+            <a:pPr marL="0" indent="0">
               <a:buNone/>
             </a:pPr>
             <a:r>
@@ -4345,7 +4093,7 @@
           <a:bodyPr wrap="square" lIns="0" tIns="0" rIns="0" bIns="0" rtlCol="0" anchor="ctr"/>
           <a:lstStyle/>
           <a:p>
-            <a:pPr indent="0" marL="0">
+            <a:pPr marL="0" indent="0">
               <a:buNone/>
             </a:pPr>
             <a:r>
@@ -4362,7 +4110,7 @@
             <a:endParaRPr lang="en-US" sz="1100" dirty="0"/>
           </a:p>
           <a:p>
-            <a:pPr indent="0" marL="0">
+            <a:pPr marL="0" indent="0">
               <a:buNone/>
             </a:pPr>
             <a:r>
@@ -4404,6 +4152,13 @@
             <a:prstDash val="solid"/>
           </a:ln>
         </p:spPr>
+        <p:txBody>
+          <a:bodyPr/>
+          <a:lstStyle/>
+          <a:p>
+            <a:endParaRPr lang="en-US"/>
+          </a:p>
+        </p:txBody>
       </p:sp>
       <p:sp>
         <p:nvSpPr>
@@ -4424,6 +4179,13 @@
           </a:solidFill>
           <a:ln/>
         </p:spPr>
+        <p:txBody>
+          <a:bodyPr/>
+          <a:lstStyle/>
+          <a:p>
+            <a:endParaRPr lang="en-US"/>
+          </a:p>
+        </p:txBody>
       </p:sp>
       <p:sp>
         <p:nvSpPr>
@@ -4444,6 +4206,13 @@
           </a:solidFill>
           <a:ln/>
         </p:spPr>
+        <p:txBody>
+          <a:bodyPr/>
+          <a:lstStyle/>
+          <a:p>
+            <a:endParaRPr lang="en-US"/>
+          </a:p>
+        </p:txBody>
       </p:sp>
       <p:sp>
         <p:nvSpPr>
@@ -4466,7 +4235,7 @@
           <a:bodyPr wrap="square" lIns="0" tIns="0" rIns="0" bIns="0" rtlCol="0" anchor="ctr"/>
           <a:lstStyle/>
           <a:p>
-            <a:pPr algn="ctr" indent="0" marL="0">
+            <a:pPr marL="0" indent="0" algn="ctr">
               <a:buNone/>
             </a:pPr>
             <a:r>
@@ -4505,7 +4274,7 @@
           <a:bodyPr wrap="square" lIns="0" tIns="0" rIns="0" bIns="0" rtlCol="0" anchor="ctr"/>
           <a:lstStyle/>
           <a:p>
-            <a:pPr indent="0" marL="0">
+            <a:pPr marL="0" indent="0">
               <a:buNone/>
             </a:pPr>
             <a:r>
@@ -4544,7 +4313,7 @@
           <a:bodyPr wrap="square" lIns="0" tIns="0" rIns="0" bIns="0" rtlCol="0" anchor="ctr"/>
           <a:lstStyle/>
           <a:p>
-            <a:pPr indent="0" marL="0">
+            <a:pPr marL="0" indent="0">
               <a:buNone/>
             </a:pPr>
             <a:r>
@@ -4561,7 +4330,7 @@
             <a:endParaRPr lang="en-US" sz="1100" dirty="0"/>
           </a:p>
           <a:p>
-            <a:pPr indent="0" marL="0">
+            <a:pPr marL="0" indent="0">
               <a:buNone/>
             </a:pPr>
             <a:r>
@@ -4598,6 +4367,13 @@
           </a:solidFill>
           <a:ln/>
         </p:spPr>
+        <p:txBody>
+          <a:bodyPr/>
+          <a:lstStyle/>
+          <a:p>
+            <a:endParaRPr lang="en-US"/>
+          </a:p>
+        </p:txBody>
       </p:sp>
       <p:sp>
         <p:nvSpPr>
@@ -4620,7 +4396,7 @@
           <a:bodyPr wrap="square" lIns="0" tIns="0" rIns="0" bIns="0" rtlCol="0" anchor="ctr"/>
           <a:lstStyle/>
           <a:p>
-            <a:pPr indent="0" marL="0">
+            <a:pPr marL="0" indent="0">
               <a:buNone/>
             </a:pPr>
             <a:r>
@@ -4634,9 +4410,6 @@
               </a:rPr>
               <a:t>Fixed-point computation: </a:t>
             </a:r>
-            <a:pPr indent="0" marL="0">
-              <a:buNone/>
-            </a:pPr>
             <a:r>
               <a:rPr lang="en-US" sz="1300" dirty="0">
                 <a:solidFill>
@@ -4698,7 +4471,7 @@
           <a:bodyPr wrap="square" lIns="0" tIns="0" rIns="0" bIns="0" rtlCol="0" anchor="ctr"/>
           <a:lstStyle/>
           <a:p>
-            <a:pPr indent="0" marL="0">
+            <a:pPr marL="0" indent="0">
               <a:buNone/>
             </a:pPr>
             <a:r>
@@ -4735,6 +4508,13 @@
           </a:solidFill>
           <a:ln/>
         </p:spPr>
+        <p:txBody>
+          <a:bodyPr/>
+          <a:lstStyle/>
+          <a:p>
+            <a:endParaRPr lang="en-US"/>
+          </a:p>
+        </p:txBody>
       </p:sp>
       <p:sp>
         <p:nvSpPr>
@@ -4757,7 +4537,7 @@
           <a:bodyPr wrap="square" lIns="0" tIns="0" rIns="0" bIns="0" rtlCol="0" anchor="ctr"/>
           <a:lstStyle/>
           <a:p>
-            <a:pPr indent="0" marL="0">
+            <a:pPr marL="0" indent="0">
               <a:buNone/>
             </a:pPr>
             <a:r>
@@ -4796,7 +4576,7 @@
           <a:bodyPr wrap="square" lIns="0" tIns="0" rIns="0" bIns="0" rtlCol="0" anchor="ctr"/>
           <a:lstStyle/>
           <a:p>
-            <a:pPr algn="r" indent="0" marL="0">
+            <a:pPr marL="0" indent="0" algn="r">
               <a:buNone/>
             </a:pPr>
             <a:r>
@@ -4833,6 +4613,13 @@
           </a:solidFill>
           <a:ln/>
         </p:spPr>
+        <p:txBody>
+          <a:bodyPr/>
+          <a:lstStyle/>
+          <a:p>
+            <a:endParaRPr lang="en-US"/>
+          </a:p>
+        </p:txBody>
       </p:sp>
       <p:sp>
         <p:nvSpPr>
@@ -4855,7 +4642,7 @@
           <a:bodyPr wrap="square" lIns="0" tIns="0" rIns="0" bIns="0" rtlCol="0" anchor="ctr"/>
           <a:lstStyle/>
           <a:p>
-            <a:pPr indent="0" marL="0">
+            <a:pPr marL="0" indent="0">
               <a:buNone/>
             </a:pPr>
             <a:r>
@@ -4897,6 +4684,13 @@
             <a:prstDash val="solid"/>
           </a:ln>
         </p:spPr>
+        <p:txBody>
+          <a:bodyPr/>
+          <a:lstStyle/>
+          <a:p>
+            <a:endParaRPr lang="en-US"/>
+          </a:p>
+        </p:txBody>
       </p:sp>
       <p:sp>
         <p:nvSpPr>
@@ -4917,6 +4711,13 @@
           </a:solidFill>
           <a:ln/>
         </p:spPr>
+        <p:txBody>
+          <a:bodyPr/>
+          <a:lstStyle/>
+          <a:p>
+            <a:endParaRPr lang="en-US"/>
+          </a:p>
+        </p:txBody>
       </p:sp>
       <p:sp>
         <p:nvSpPr>
@@ -4939,7 +4740,7 @@
           <a:bodyPr wrap="square" lIns="0" tIns="0" rIns="0" bIns="0" rtlCol="0" anchor="ctr"/>
           <a:lstStyle/>
           <a:p>
-            <a:pPr indent="0" marL="0">
+            <a:pPr marL="0" indent="0">
               <a:buNone/>
             </a:pPr>
             <a:r>
@@ -4978,7 +4779,7 @@
           <a:bodyPr wrap="square" lIns="0" tIns="0" rIns="0" bIns="0" rtlCol="0" anchor="ctr"/>
           <a:lstStyle/>
           <a:p>
-            <a:pPr indent="0" marL="0">
+            <a:pPr marL="0" indent="0">
               <a:buNone/>
             </a:pPr>
             <a:r>
@@ -5020,6 +4821,13 @@
             <a:prstDash val="solid"/>
           </a:ln>
         </p:spPr>
+        <p:txBody>
+          <a:bodyPr/>
+          <a:lstStyle/>
+          <a:p>
+            <a:endParaRPr lang="en-US"/>
+          </a:p>
+        </p:txBody>
       </p:sp>
       <p:sp>
         <p:nvSpPr>
@@ -5040,6 +4848,13 @@
           </a:solidFill>
           <a:ln/>
         </p:spPr>
+        <p:txBody>
+          <a:bodyPr/>
+          <a:lstStyle/>
+          <a:p>
+            <a:endParaRPr lang="en-US"/>
+          </a:p>
+        </p:txBody>
       </p:sp>
       <p:sp>
         <p:nvSpPr>
@@ -5062,7 +4877,7 @@
           <a:bodyPr wrap="square" lIns="0" tIns="0" rIns="0" bIns="0" rtlCol="0" anchor="ctr"/>
           <a:lstStyle/>
           <a:p>
-            <a:pPr indent="0" marL="0">
+            <a:pPr marL="0" indent="0">
               <a:buNone/>
             </a:pPr>
             <a:r>
@@ -5101,7 +4916,7 @@
           <a:bodyPr wrap="square" lIns="0" tIns="0" rIns="0" bIns="0" rtlCol="0" anchor="ctr"/>
           <a:lstStyle/>
           <a:p>
-            <a:pPr indent="0" marL="0">
+            <a:pPr marL="0" indent="0">
               <a:buNone/>
             </a:pPr>
             <a:r>
@@ -5143,6 +4958,13 @@
             <a:prstDash val="solid"/>
           </a:ln>
         </p:spPr>
+        <p:txBody>
+          <a:bodyPr/>
+          <a:lstStyle/>
+          <a:p>
+            <a:endParaRPr lang="en-US"/>
+          </a:p>
+        </p:txBody>
       </p:sp>
       <p:sp>
         <p:nvSpPr>
@@ -5163,6 +4985,13 @@
           </a:solidFill>
           <a:ln/>
         </p:spPr>
+        <p:txBody>
+          <a:bodyPr/>
+          <a:lstStyle/>
+          <a:p>
+            <a:endParaRPr lang="en-US"/>
+          </a:p>
+        </p:txBody>
       </p:sp>
       <p:sp>
         <p:nvSpPr>
@@ -5185,7 +5014,7 @@
           <a:bodyPr wrap="square" lIns="0" tIns="0" rIns="0" bIns="0" rtlCol="0" anchor="ctr"/>
           <a:lstStyle/>
           <a:p>
-            <a:pPr indent="0" marL="0">
+            <a:pPr marL="0" indent="0">
               <a:buNone/>
             </a:pPr>
             <a:r>
@@ -5224,7 +5053,7 @@
           <a:bodyPr wrap="square" lIns="0" tIns="0" rIns="0" bIns="0" rtlCol="0" anchor="ctr"/>
           <a:lstStyle/>
           <a:p>
-            <a:pPr indent="0" marL="0">
+            <a:pPr marL="0" indent="0">
               <a:buNone/>
             </a:pPr>
             <a:r>
@@ -5266,6 +5095,13 @@
             <a:prstDash val="solid"/>
           </a:ln>
         </p:spPr>
+        <p:txBody>
+          <a:bodyPr/>
+          <a:lstStyle/>
+          <a:p>
+            <a:endParaRPr lang="en-US"/>
+          </a:p>
+        </p:txBody>
       </p:sp>
       <p:sp>
         <p:nvSpPr>
@@ -5286,6 +5122,13 @@
           </a:solidFill>
           <a:ln/>
         </p:spPr>
+        <p:txBody>
+          <a:bodyPr/>
+          <a:lstStyle/>
+          <a:p>
+            <a:endParaRPr lang="en-US"/>
+          </a:p>
+        </p:txBody>
       </p:sp>
       <p:sp>
         <p:nvSpPr>
@@ -5308,7 +5151,7 @@
           <a:bodyPr wrap="square" lIns="0" tIns="0" rIns="0" bIns="0" rtlCol="0" anchor="ctr"/>
           <a:lstStyle/>
           <a:p>
-            <a:pPr indent="0" marL="0">
+            <a:pPr marL="0" indent="0">
               <a:buNone/>
             </a:pPr>
             <a:r>
@@ -5347,7 +5190,7 @@
           <a:bodyPr wrap="square" lIns="0" tIns="0" rIns="0" bIns="0" rtlCol="0" anchor="ctr"/>
           <a:lstStyle/>
           <a:p>
-            <a:pPr indent="0" marL="0">
+            <a:pPr marL="0" indent="0">
               <a:buNone/>
             </a:pPr>
             <a:r>
@@ -5386,7 +5229,7 @@
           <a:bodyPr wrap="square" lIns="0" tIns="0" rIns="0" bIns="0" rtlCol="0" anchor="ctr"/>
           <a:lstStyle/>
           <a:p>
-            <a:pPr indent="0" marL="0">
+            <a:pPr marL="0" indent="0">
               <a:buNone/>
             </a:pPr>
             <a:r>
@@ -5450,7 +5293,7 @@
           <a:bodyPr wrap="square" lIns="0" tIns="0" rIns="0" bIns="0" rtlCol="0" anchor="ctr"/>
           <a:lstStyle/>
           <a:p>
-            <a:pPr indent="0" marL="0">
+            <a:pPr marL="0" indent="0">
               <a:buNone/>
             </a:pPr>
             <a:r>
@@ -5487,6 +5330,13 @@
           </a:solidFill>
           <a:ln/>
         </p:spPr>
+        <p:txBody>
+          <a:bodyPr/>
+          <a:lstStyle/>
+          <a:p>
+            <a:endParaRPr lang="en-US"/>
+          </a:p>
+        </p:txBody>
       </p:sp>
       <p:sp>
         <p:nvSpPr>
@@ -5509,7 +5359,7 @@
           <a:bodyPr wrap="square" lIns="0" tIns="0" rIns="0" bIns="0" rtlCol="0" anchor="ctr"/>
           <a:lstStyle/>
           <a:p>
-            <a:pPr indent="0" marL="0">
+            <a:pPr marL="0" indent="0">
               <a:buNone/>
             </a:pPr>
             <a:r>
@@ -5548,7 +5398,7 @@
           <a:bodyPr wrap="square" lIns="0" tIns="0" rIns="0" bIns="0" rtlCol="0" anchor="ctr"/>
           <a:lstStyle/>
           <a:p>
-            <a:pPr algn="r" indent="0" marL="0">
+            <a:pPr marL="0" indent="0" algn="r">
               <a:buNone/>
             </a:pPr>
             <a:r>
@@ -5585,6 +5435,13 @@
           </a:solidFill>
           <a:ln/>
         </p:spPr>
+        <p:txBody>
+          <a:bodyPr/>
+          <a:lstStyle/>
+          <a:p>
+            <a:endParaRPr lang="en-US"/>
+          </a:p>
+        </p:txBody>
       </p:sp>
       <p:sp>
         <p:nvSpPr>
@@ -5607,7 +5464,7 @@
           <a:bodyPr wrap="square" lIns="0" tIns="0" rIns="0" bIns="0" rtlCol="0" anchor="ctr"/>
           <a:lstStyle/>
           <a:p>
-            <a:pPr indent="0" marL="0">
+            <a:pPr marL="0" indent="0">
               <a:buNone/>
             </a:pPr>
             <a:r>
@@ -5649,6 +5506,13 @@
             <a:prstDash val="solid"/>
           </a:ln>
         </p:spPr>
+        <p:txBody>
+          <a:bodyPr/>
+          <a:lstStyle/>
+          <a:p>
+            <a:endParaRPr lang="en-US"/>
+          </a:p>
+        </p:txBody>
       </p:sp>
       <p:sp>
         <p:nvSpPr>
@@ -5669,6 +5533,13 @@
           </a:solidFill>
           <a:ln/>
         </p:spPr>
+        <p:txBody>
+          <a:bodyPr/>
+          <a:lstStyle/>
+          <a:p>
+            <a:endParaRPr lang="en-US"/>
+          </a:p>
+        </p:txBody>
       </p:sp>
       <p:sp>
         <p:nvSpPr>
@@ -5691,7 +5562,7 @@
           <a:bodyPr wrap="square" lIns="0" tIns="0" rIns="0" bIns="0" rtlCol="0" anchor="ctr"/>
           <a:lstStyle/>
           <a:p>
-            <a:pPr indent="0" marL="0">
+            <a:pPr marL="0" indent="0">
               <a:buNone/>
             </a:pPr>
             <a:r>
@@ -5730,7 +5601,7 @@
           <a:bodyPr wrap="square" lIns="0" tIns="0" rIns="0" bIns="0" rtlCol="0" anchor="ctr"/>
           <a:lstStyle/>
           <a:p>
-            <a:pPr indent="0" marL="0">
+            <a:pPr marL="0" indent="0">
               <a:buNone/>
             </a:pPr>
             <a:r>
@@ -5747,7 +5618,7 @@
             <a:endParaRPr lang="en-US" sz="1300" dirty="0"/>
           </a:p>
           <a:p>
-            <a:pPr indent="0" marL="0">
+            <a:pPr marL="0" indent="0">
               <a:buNone/>
             </a:pPr>
             <a:r>
@@ -5764,7 +5635,7 @@
             <a:endParaRPr lang="en-US" sz="1300" dirty="0"/>
           </a:p>
           <a:p>
-            <a:pPr indent="0" marL="0">
+            <a:pPr marL="0" indent="0">
               <a:buNone/>
             </a:pPr>
             <a:r>
@@ -5781,7 +5652,7 @@
             <a:endParaRPr lang="en-US" sz="1300" dirty="0"/>
           </a:p>
           <a:p>
-            <a:pPr indent="0" marL="0">
+            <a:pPr marL="0" indent="0">
               <a:buNone/>
             </a:pPr>
             <a:r>
@@ -5823,6 +5694,13 @@
             <a:prstDash val="solid"/>
           </a:ln>
         </p:spPr>
+        <p:txBody>
+          <a:bodyPr/>
+          <a:lstStyle/>
+          <a:p>
+            <a:endParaRPr lang="en-US"/>
+          </a:p>
+        </p:txBody>
       </p:sp>
       <p:sp>
         <p:nvSpPr>
@@ -5843,6 +5721,13 @@
           </a:solidFill>
           <a:ln/>
         </p:spPr>
+        <p:txBody>
+          <a:bodyPr/>
+          <a:lstStyle/>
+          <a:p>
+            <a:endParaRPr lang="en-US"/>
+          </a:p>
+        </p:txBody>
       </p:sp>
       <p:sp>
         <p:nvSpPr>
@@ -5865,7 +5750,7 @@
           <a:bodyPr wrap="square" lIns="0" tIns="0" rIns="0" bIns="0" rtlCol="0" anchor="ctr"/>
           <a:lstStyle/>
           <a:p>
-            <a:pPr indent="0" marL="0">
+            <a:pPr marL="0" indent="0">
               <a:buNone/>
             </a:pPr>
             <a:r>
@@ -5904,7 +5789,7 @@
           <a:bodyPr wrap="square" lIns="0" tIns="0" rIns="0" bIns="0" rtlCol="0" anchor="ctr"/>
           <a:lstStyle/>
           <a:p>
-            <a:pPr indent="0" marL="0">
+            <a:pPr marL="0" indent="0">
               <a:buNone/>
             </a:pPr>
             <a:r>
@@ -5921,7 +5806,7 @@
             <a:endParaRPr lang="en-US" sz="1300" dirty="0"/>
           </a:p>
           <a:p>
-            <a:pPr indent="0" marL="0">
+            <a:pPr marL="0" indent="0">
               <a:buNone/>
             </a:pPr>
             <a:r>
@@ -5938,7 +5823,7 @@
             <a:endParaRPr lang="en-US" sz="1300" dirty="0"/>
           </a:p>
           <a:p>
-            <a:pPr indent="0" marL="0">
+            <a:pPr marL="0" indent="0">
               <a:buNone/>
             </a:pPr>
             <a:r>
@@ -5955,7 +5840,7 @@
             <a:endParaRPr lang="en-US" sz="1300" dirty="0"/>
           </a:p>
           <a:p>
-            <a:pPr indent="0" marL="0">
+            <a:pPr marL="0" indent="0">
               <a:buNone/>
             </a:pPr>
             <a:r>
@@ -5997,6 +5882,13 @@
             <a:prstDash val="solid"/>
           </a:ln>
         </p:spPr>
+        <p:txBody>
+          <a:bodyPr/>
+          <a:lstStyle/>
+          <a:p>
+            <a:endParaRPr lang="en-US"/>
+          </a:p>
+        </p:txBody>
       </p:sp>
       <p:sp>
         <p:nvSpPr>
@@ -6017,6 +5909,13 @@
           </a:solidFill>
           <a:ln/>
         </p:spPr>
+        <p:txBody>
+          <a:bodyPr/>
+          <a:lstStyle/>
+          <a:p>
+            <a:endParaRPr lang="en-US"/>
+          </a:p>
+        </p:txBody>
       </p:sp>
       <p:sp>
         <p:nvSpPr>
@@ -6039,7 +5938,7 @@
           <a:bodyPr wrap="square" lIns="0" tIns="0" rIns="0" bIns="0" rtlCol="0" anchor="ctr"/>
           <a:lstStyle/>
           <a:p>
-            <a:pPr indent="0" marL="0">
+            <a:pPr marL="0" indent="0">
               <a:buNone/>
             </a:pPr>
             <a:r>
@@ -6078,7 +5977,7 @@
           <a:bodyPr wrap="square" lIns="0" tIns="0" rIns="0" bIns="0" rtlCol="0" anchor="ctr"/>
           <a:lstStyle/>
           <a:p>
-            <a:pPr indent="0" marL="0">
+            <a:pPr marL="0" indent="0">
               <a:buNone/>
             </a:pPr>
             <a:r>
@@ -6095,7 +5994,7 @@
             <a:endParaRPr lang="en-US" sz="1300" dirty="0"/>
           </a:p>
           <a:p>
-            <a:pPr indent="0" marL="0">
+            <a:pPr marL="0" indent="0">
               <a:buNone/>
             </a:pPr>
             <a:r>
@@ -6112,7 +6011,7 @@
             <a:endParaRPr lang="en-US" sz="1300" dirty="0"/>
           </a:p>
           <a:p>
-            <a:pPr indent="0" marL="0">
+            <a:pPr marL="0" indent="0">
               <a:buNone/>
             </a:pPr>
             <a:r>
@@ -6129,7 +6028,7 @@
             <a:endParaRPr lang="en-US" sz="1300" dirty="0"/>
           </a:p>
           <a:p>
-            <a:pPr indent="0" marL="0">
+            <a:pPr marL="0" indent="0">
               <a:buNone/>
             </a:pPr>
             <a:r>
@@ -6168,7 +6067,7 @@
           <a:bodyPr wrap="square" lIns="0" tIns="0" rIns="0" bIns="0" rtlCol="0" anchor="ctr"/>
           <a:lstStyle/>
           <a:p>
-            <a:pPr algn="ctr" indent="0" marL="0">
+            <a:pPr marL="0" indent="0" algn="ctr">
               <a:buNone/>
             </a:pPr>
             <a:r>
@@ -6207,7 +6106,7 @@
           <a:bodyPr wrap="square" lIns="0" tIns="0" rIns="0" bIns="0" rtlCol="0" anchor="ctr"/>
           <a:lstStyle/>
           <a:p>
-            <a:pPr algn="ctr" indent="0" marL="0">
+            <a:pPr marL="0" indent="0" algn="ctr">
               <a:buNone/>
             </a:pPr>
             <a:r>
@@ -6246,7 +6145,7 @@
           <a:bodyPr wrap="square" lIns="0" tIns="0" rIns="0" bIns="0" rtlCol="0" anchor="ctr"/>
           <a:lstStyle/>
           <a:p>
-            <a:pPr indent="0" marL="0">
+            <a:pPr marL="0" indent="0">
               <a:buNone/>
             </a:pPr>
             <a:r>
@@ -6280,6 +6179,7 @@
         <a:solidFill>
           <a:srgbClr val="1B2A4A"/>
         </a:solidFill>
+        <a:effectLst/>
       </p:bgPr>
     </p:bg>
     <p:spTree>
@@ -6317,11 +6217,11 @@
           <a:bodyPr wrap="square" lIns="0" tIns="0" rIns="0" bIns="0" rtlCol="0" anchor="ctr"/>
           <a:lstStyle/>
           <a:p>
-            <a:pPr indent="0" marL="0">
-              <a:buNone/>
-            </a:pPr>
-            <a:r>
-              <a:rPr lang="en-US" sz="1600" b="1" spc="400" kern="0" dirty="0">
+            <a:pPr marL="0" indent="0">
+              <a:buNone/>
+            </a:pPr>
+            <a:r>
+              <a:rPr lang="en-US" sz="1600" b="1" kern="0" spc="400" dirty="0">
                 <a:solidFill>
                   <a:srgbClr val="0E7C7B"/>
                 </a:solidFill>
@@ -6356,7 +6256,7 @@
           <a:bodyPr wrap="square" lIns="0" tIns="0" rIns="0" bIns="0" rtlCol="0" anchor="ctr"/>
           <a:lstStyle/>
           <a:p>
-            <a:pPr indent="0" marL="0">
+            <a:pPr marL="0" indent="0">
               <a:buNone/>
             </a:pPr>
             <a:r>
@@ -6373,7 +6273,7 @@
             <a:endParaRPr lang="en-US" sz="3600" dirty="0"/>
           </a:p>
           <a:p>
-            <a:pPr indent="0" marL="0">
+            <a:pPr marL="0" indent="0">
               <a:buNone/>
             </a:pPr>
             <a:r>
@@ -6412,7 +6312,7 @@
           <a:bodyPr wrap="square" lIns="0" tIns="0" rIns="0" bIns="0" rtlCol="0" anchor="ctr"/>
           <a:lstStyle/>
           <a:p>
-            <a:pPr indent="0" marL="0">
+            <a:pPr marL="0" indent="0">
               <a:buNone/>
             </a:pPr>
             <a:r>
@@ -6449,6 +6349,13 @@
           </a:solidFill>
           <a:ln/>
         </p:spPr>
+        <p:txBody>
+          <a:bodyPr/>
+          <a:lstStyle/>
+          <a:p>
+            <a:endParaRPr lang="en-US"/>
+          </a:p>
+        </p:txBody>
       </p:sp>
     </p:spTree>
   </p:cSld>
@@ -6496,7 +6403,7 @@
           <a:bodyPr wrap="square" lIns="0" tIns="0" rIns="0" bIns="0" rtlCol="0" anchor="ctr"/>
           <a:lstStyle/>
           <a:p>
-            <a:pPr indent="0" marL="0">
+            <a:pPr marL="0" indent="0">
               <a:buNone/>
             </a:pPr>
             <a:r>
@@ -6533,6 +6440,13 @@
           </a:solidFill>
           <a:ln/>
         </p:spPr>
+        <p:txBody>
+          <a:bodyPr/>
+          <a:lstStyle/>
+          <a:p>
+            <a:endParaRPr lang="en-US"/>
+          </a:p>
+        </p:txBody>
       </p:sp>
       <p:sp>
         <p:nvSpPr>
@@ -6555,7 +6469,7 @@
           <a:bodyPr wrap="square" lIns="0" tIns="0" rIns="0" bIns="0" rtlCol="0" anchor="ctr"/>
           <a:lstStyle/>
           <a:p>
-            <a:pPr indent="0" marL="0">
+            <a:pPr marL="0" indent="0">
               <a:buNone/>
             </a:pPr>
             <a:r>
@@ -6594,7 +6508,7 @@
           <a:bodyPr wrap="square" lIns="0" tIns="0" rIns="0" bIns="0" rtlCol="0" anchor="ctr"/>
           <a:lstStyle/>
           <a:p>
-            <a:pPr algn="r" indent="0" marL="0">
+            <a:pPr marL="0" indent="0" algn="r">
               <a:buNone/>
             </a:pPr>
             <a:r>
@@ -6636,6 +6550,13 @@
             <a:prstDash val="solid"/>
           </a:ln>
         </p:spPr>
+        <p:txBody>
+          <a:bodyPr/>
+          <a:lstStyle/>
+          <a:p>
+            <a:endParaRPr lang="en-US"/>
+          </a:p>
+        </p:txBody>
       </p:sp>
       <p:sp>
         <p:nvSpPr>
@@ -6656,6 +6577,13 @@
           </a:solidFill>
           <a:ln/>
         </p:spPr>
+        <p:txBody>
+          <a:bodyPr/>
+          <a:lstStyle/>
+          <a:p>
+            <a:endParaRPr lang="en-US"/>
+          </a:p>
+        </p:txBody>
       </p:sp>
       <p:sp>
         <p:nvSpPr>
@@ -6678,7 +6606,7 @@
           <a:bodyPr wrap="square" lIns="0" tIns="0" rIns="0" bIns="0" rtlCol="0" anchor="ctr"/>
           <a:lstStyle/>
           <a:p>
-            <a:pPr indent="0" marL="0">
+            <a:pPr marL="0" indent="0">
               <a:buNone/>
             </a:pPr>
             <a:r>
@@ -6717,7 +6645,7 @@
           <a:bodyPr wrap="square" lIns="0" tIns="0" rIns="0" bIns="0" rtlCol="0" anchor="ctr"/>
           <a:lstStyle/>
           <a:p>
-            <a:pPr indent="0" marL="0">
+            <a:pPr marL="0" indent="0">
               <a:buNone/>
             </a:pPr>
             <a:r>
@@ -6734,7 +6662,7 @@
             <a:endParaRPr lang="en-US" sz="1250" dirty="0"/>
           </a:p>
           <a:p>
-            <a:pPr indent="0" marL="0">
+            <a:pPr marL="0" indent="0">
               <a:buNone/>
             </a:pPr>
             <a:r>
@@ -6776,6 +6704,13 @@
             <a:prstDash val="solid"/>
           </a:ln>
         </p:spPr>
+        <p:txBody>
+          <a:bodyPr/>
+          <a:lstStyle/>
+          <a:p>
+            <a:endParaRPr lang="en-US"/>
+          </a:p>
+        </p:txBody>
       </p:sp>
       <p:sp>
         <p:nvSpPr>
@@ -6796,6 +6731,13 @@
           </a:solidFill>
           <a:ln/>
         </p:spPr>
+        <p:txBody>
+          <a:bodyPr/>
+          <a:lstStyle/>
+          <a:p>
+            <a:endParaRPr lang="en-US"/>
+          </a:p>
+        </p:txBody>
       </p:sp>
       <p:sp>
         <p:nvSpPr>
@@ -6818,7 +6760,7 @@
           <a:bodyPr wrap="square" lIns="0" tIns="0" rIns="0" bIns="0" rtlCol="0" anchor="ctr"/>
           <a:lstStyle/>
           <a:p>
-            <a:pPr indent="0" marL="0">
+            <a:pPr marL="0" indent="0">
               <a:buNone/>
             </a:pPr>
             <a:r>
@@ -6857,7 +6799,7 @@
           <a:bodyPr wrap="square" lIns="0" tIns="0" rIns="0" bIns="0" rtlCol="0" anchor="ctr"/>
           <a:lstStyle/>
           <a:p>
-            <a:pPr indent="0" marL="0">
+            <a:pPr marL="0" indent="0">
               <a:buNone/>
             </a:pPr>
             <a:r>
@@ -6874,7 +6816,7 @@
             <a:endParaRPr lang="en-US" sz="1250" dirty="0"/>
           </a:p>
           <a:p>
-            <a:pPr indent="0" marL="0">
+            <a:pPr marL="0" indent="0">
               <a:buNone/>
             </a:pPr>
             <a:r>
@@ -6916,6 +6858,13 @@
             <a:prstDash val="solid"/>
           </a:ln>
         </p:spPr>
+        <p:txBody>
+          <a:bodyPr/>
+          <a:lstStyle/>
+          <a:p>
+            <a:endParaRPr lang="en-US"/>
+          </a:p>
+        </p:txBody>
       </p:sp>
       <p:sp>
         <p:nvSpPr>
@@ -6936,6 +6885,13 @@
           </a:solidFill>
           <a:ln/>
         </p:spPr>
+        <p:txBody>
+          <a:bodyPr/>
+          <a:lstStyle/>
+          <a:p>
+            <a:endParaRPr lang="en-US"/>
+          </a:p>
+        </p:txBody>
       </p:sp>
       <p:sp>
         <p:nvSpPr>
@@ -6958,7 +6914,7 @@
           <a:bodyPr wrap="square" lIns="0" tIns="0" rIns="0" bIns="0" rtlCol="0" anchor="ctr"/>
           <a:lstStyle/>
           <a:p>
-            <a:pPr indent="0" marL="0">
+            <a:pPr marL="0" indent="0">
               <a:buNone/>
             </a:pPr>
             <a:r>
@@ -6997,7 +6953,7 @@
           <a:bodyPr wrap="square" lIns="0" tIns="0" rIns="0" bIns="0" rtlCol="0" anchor="ctr"/>
           <a:lstStyle/>
           <a:p>
-            <a:pPr indent="0" marL="0">
+            <a:pPr marL="0" indent="0">
               <a:buNone/>
             </a:pPr>
             <a:r>
@@ -7014,7 +6970,7 @@
             <a:endParaRPr lang="en-US" sz="1250" dirty="0"/>
           </a:p>
           <a:p>
-            <a:pPr indent="0" marL="0">
+            <a:pPr marL="0" indent="0">
               <a:buNone/>
             </a:pPr>
             <a:r>
@@ -7051,6 +7007,13 @@
           </a:solidFill>
           <a:ln/>
         </p:spPr>
+        <p:txBody>
+          <a:bodyPr/>
+          <a:lstStyle/>
+          <a:p>
+            <a:endParaRPr lang="en-US"/>
+          </a:p>
+        </p:txBody>
       </p:sp>
       <p:sp>
         <p:nvSpPr>
@@ -7073,7 +7036,7 @@
           <a:bodyPr wrap="square" lIns="0" tIns="0" rIns="0" bIns="0" rtlCol="0" anchor="ctr"/>
           <a:lstStyle/>
           <a:p>
-            <a:pPr indent="0" marL="0">
+            <a:pPr marL="0" indent="0">
               <a:buNone/>
             </a:pPr>
             <a:r>
@@ -7137,7 +7100,7 @@
           <a:bodyPr wrap="square" lIns="0" tIns="0" rIns="0" bIns="0" rtlCol="0" anchor="ctr"/>
           <a:lstStyle/>
           <a:p>
-            <a:pPr indent="0" marL="0">
+            <a:pPr marL="0" indent="0">
               <a:buNone/>
             </a:pPr>
             <a:r>
@@ -7174,6 +7137,13 @@
           </a:solidFill>
           <a:ln/>
         </p:spPr>
+        <p:txBody>
+          <a:bodyPr/>
+          <a:lstStyle/>
+          <a:p>
+            <a:endParaRPr lang="en-US"/>
+          </a:p>
+        </p:txBody>
       </p:sp>
       <p:sp>
         <p:nvSpPr>
@@ -7196,7 +7166,7 @@
           <a:bodyPr wrap="square" lIns="0" tIns="0" rIns="0" bIns="0" rtlCol="0" anchor="ctr"/>
           <a:lstStyle/>
           <a:p>
-            <a:pPr indent="0" marL="0">
+            <a:pPr marL="0" indent="0">
               <a:buNone/>
             </a:pPr>
             <a:r>
@@ -7235,7 +7205,7 @@
           <a:bodyPr wrap="square" lIns="0" tIns="0" rIns="0" bIns="0" rtlCol="0" anchor="ctr"/>
           <a:lstStyle/>
           <a:p>
-            <a:pPr algn="r" indent="0" marL="0">
+            <a:pPr marL="0" indent="0" algn="r">
               <a:buNone/>
             </a:pPr>
             <a:r>
@@ -7277,6 +7247,13 @@
             <a:prstDash val="solid"/>
           </a:ln>
         </p:spPr>
+        <p:txBody>
+          <a:bodyPr/>
+          <a:lstStyle/>
+          <a:p>
+            <a:endParaRPr lang="en-US"/>
+          </a:p>
+        </p:txBody>
       </p:sp>
       <p:sp>
         <p:nvSpPr>
@@ -7297,6 +7274,13 @@
           </a:solidFill>
           <a:ln/>
         </p:spPr>
+        <p:txBody>
+          <a:bodyPr/>
+          <a:lstStyle/>
+          <a:p>
+            <a:endParaRPr lang="en-US"/>
+          </a:p>
+        </p:txBody>
       </p:sp>
       <p:sp>
         <p:nvSpPr>
@@ -7319,7 +7303,7 @@
           <a:bodyPr wrap="square" lIns="0" tIns="0" rIns="0" bIns="0" rtlCol="0" anchor="ctr"/>
           <a:lstStyle/>
           <a:p>
-            <a:pPr indent="0" marL="0">
+            <a:pPr marL="0" indent="0">
               <a:buNone/>
             </a:pPr>
             <a:r>
@@ -7358,7 +7342,7 @@
           <a:bodyPr wrap="square" lIns="0" tIns="0" rIns="0" bIns="0" rtlCol="0" anchor="ctr"/>
           <a:lstStyle/>
           <a:p>
-            <a:pPr indent="0" marL="0">
+            <a:pPr marL="0" indent="0">
               <a:buNone/>
             </a:pPr>
             <a:r>
@@ -7397,7 +7381,7 @@
           <a:bodyPr wrap="square" lIns="0" tIns="0" rIns="0" bIns="0" rtlCol="0" anchor="ctr"/>
           <a:lstStyle/>
           <a:p>
-            <a:pPr indent="0" marL="0">
+            <a:pPr marL="0" indent="0">
               <a:buNone/>
             </a:pPr>
             <a:r>
@@ -7439,6 +7423,13 @@
             <a:prstDash val="solid"/>
           </a:ln>
         </p:spPr>
+        <p:txBody>
+          <a:bodyPr/>
+          <a:lstStyle/>
+          <a:p>
+            <a:endParaRPr lang="en-US"/>
+          </a:p>
+        </p:txBody>
       </p:sp>
       <p:sp>
         <p:nvSpPr>
@@ -7459,6 +7450,13 @@
           </a:solidFill>
           <a:ln/>
         </p:spPr>
+        <p:txBody>
+          <a:bodyPr/>
+          <a:lstStyle/>
+          <a:p>
+            <a:endParaRPr lang="en-US"/>
+          </a:p>
+        </p:txBody>
       </p:sp>
       <p:sp>
         <p:nvSpPr>
@@ -7481,7 +7479,7 @@
           <a:bodyPr wrap="square" lIns="0" tIns="0" rIns="0" bIns="0" rtlCol="0" anchor="ctr"/>
           <a:lstStyle/>
           <a:p>
-            <a:pPr indent="0" marL="0">
+            <a:pPr marL="0" indent="0">
               <a:buNone/>
             </a:pPr>
             <a:r>
@@ -7520,7 +7518,7 @@
           <a:bodyPr wrap="square" lIns="0" tIns="0" rIns="0" bIns="0" rtlCol="0" anchor="ctr"/>
           <a:lstStyle/>
           <a:p>
-            <a:pPr indent="0" marL="0">
+            <a:pPr marL="0" indent="0">
               <a:buNone/>
             </a:pPr>
             <a:r>
@@ -7559,7 +7557,7 @@
           <a:bodyPr wrap="square" lIns="0" tIns="0" rIns="0" bIns="0" rtlCol="0" anchor="ctr"/>
           <a:lstStyle/>
           <a:p>
-            <a:pPr indent="0" marL="0">
+            <a:pPr marL="0" indent="0">
               <a:buNone/>
             </a:pPr>
             <a:r>
@@ -7598,7 +7596,7 @@
           <a:bodyPr wrap="square" lIns="0" tIns="0" rIns="0" bIns="0" rtlCol="0" anchor="ctr"/>
           <a:lstStyle/>
           <a:p>
-            <a:pPr indent="0" marL="0">
+            <a:pPr marL="0" indent="0">
               <a:buNone/>
             </a:pPr>
             <a:r>
@@ -7635,6 +7633,13 @@
           </a:solidFill>
           <a:ln/>
         </p:spPr>
+        <p:txBody>
+          <a:bodyPr/>
+          <a:lstStyle/>
+          <a:p>
+            <a:endParaRPr lang="en-US"/>
+          </a:p>
+        </p:txBody>
       </p:sp>
       <p:sp>
         <p:nvSpPr>
@@ -7657,7 +7662,7 @@
           <a:bodyPr wrap="square" lIns="0" tIns="0" rIns="0" bIns="0" rtlCol="0" anchor="ctr"/>
           <a:lstStyle/>
           <a:p>
-            <a:pPr algn="ctr" indent="0" marL="0">
+            <a:pPr marL="0" indent="0" algn="ctr">
               <a:buNone/>
             </a:pPr>
             <a:r>
@@ -7696,7 +7701,7 @@
           <a:bodyPr wrap="square" lIns="0" tIns="0" rIns="0" bIns="0" rtlCol="0" anchor="ctr"/>
           <a:lstStyle/>
           <a:p>
-            <a:pPr indent="0" marL="0">
+            <a:pPr marL="0" indent="0">
               <a:buNone/>
             </a:pPr>
             <a:r>
@@ -7735,7 +7740,7 @@
           <a:bodyPr wrap="square" lIns="0" tIns="0" rIns="0" bIns="0" rtlCol="0" anchor="ctr"/>
           <a:lstStyle/>
           <a:p>
-            <a:pPr indent="0" marL="0">
+            <a:pPr marL="0" indent="0">
               <a:buNone/>
             </a:pPr>
             <a:r>
@@ -7772,6 +7777,13 @@
           </a:solidFill>
           <a:ln/>
         </p:spPr>
+        <p:txBody>
+          <a:bodyPr/>
+          <a:lstStyle/>
+          <a:p>
+            <a:endParaRPr lang="en-US"/>
+          </a:p>
+        </p:txBody>
       </p:sp>
       <p:sp>
         <p:nvSpPr>
@@ -7794,7 +7806,7 @@
           <a:bodyPr wrap="square" lIns="0" tIns="0" rIns="0" bIns="0" rtlCol="0" anchor="ctr"/>
           <a:lstStyle/>
           <a:p>
-            <a:pPr algn="ctr" indent="0" marL="0">
+            <a:pPr marL="0" indent="0" algn="ctr">
               <a:buNone/>
             </a:pPr>
             <a:r>
@@ -7833,7 +7845,7 @@
           <a:bodyPr wrap="square" lIns="0" tIns="0" rIns="0" bIns="0" rtlCol="0" anchor="ctr"/>
           <a:lstStyle/>
           <a:p>
-            <a:pPr indent="0" marL="0">
+            <a:pPr marL="0" indent="0">
               <a:buNone/>
             </a:pPr>
             <a:r>
@@ -7872,7 +7884,7 @@
           <a:bodyPr wrap="square" lIns="0" tIns="0" rIns="0" bIns="0" rtlCol="0" anchor="ctr"/>
           <a:lstStyle/>
           <a:p>
-            <a:pPr indent="0" marL="0">
+            <a:pPr marL="0" indent="0">
               <a:buNone/>
             </a:pPr>
             <a:r>
@@ -7909,6 +7921,13 @@
           </a:solidFill>
           <a:ln/>
         </p:spPr>
+        <p:txBody>
+          <a:bodyPr/>
+          <a:lstStyle/>
+          <a:p>
+            <a:endParaRPr lang="en-US"/>
+          </a:p>
+        </p:txBody>
       </p:sp>
       <p:sp>
         <p:nvSpPr>
@@ -7931,7 +7950,7 @@
           <a:bodyPr wrap="square" lIns="0" tIns="0" rIns="0" bIns="0" rtlCol="0" anchor="ctr"/>
           <a:lstStyle/>
           <a:p>
-            <a:pPr algn="ctr" indent="0" marL="0">
+            <a:pPr marL="0" indent="0" algn="ctr">
               <a:buNone/>
             </a:pPr>
             <a:r>
@@ -7970,7 +7989,7 @@
           <a:bodyPr wrap="square" lIns="0" tIns="0" rIns="0" bIns="0" rtlCol="0" anchor="ctr"/>
           <a:lstStyle/>
           <a:p>
-            <a:pPr indent="0" marL="0">
+            <a:pPr marL="0" indent="0">
               <a:buNone/>
             </a:pPr>
             <a:r>
@@ -8009,7 +8028,7 @@
           <a:bodyPr wrap="square" lIns="0" tIns="0" rIns="0" bIns="0" rtlCol="0" anchor="ctr"/>
           <a:lstStyle/>
           <a:p>
-            <a:pPr indent="0" marL="0">
+            <a:pPr marL="0" indent="0">
               <a:buNone/>
             </a:pPr>
             <a:r>
@@ -8073,7 +8092,7 @@
           <a:bodyPr wrap="square" lIns="0" tIns="0" rIns="0" bIns="0" rtlCol="0" anchor="ctr"/>
           <a:lstStyle/>
           <a:p>
-            <a:pPr indent="0" marL="0">
+            <a:pPr marL="0" indent="0">
               <a:buNone/>
             </a:pPr>
             <a:r>
@@ -8110,6 +8129,13 @@
           </a:solidFill>
           <a:ln/>
         </p:spPr>
+        <p:txBody>
+          <a:bodyPr/>
+          <a:lstStyle/>
+          <a:p>
+            <a:endParaRPr lang="en-US"/>
+          </a:p>
+        </p:txBody>
       </p:sp>
       <p:sp>
         <p:nvSpPr>
@@ -8132,7 +8158,7 @@
           <a:bodyPr wrap="square" lIns="0" tIns="0" rIns="0" bIns="0" rtlCol="0" anchor="ctr"/>
           <a:lstStyle/>
           <a:p>
-            <a:pPr indent="0" marL="0">
+            <a:pPr marL="0" indent="0">
               <a:buNone/>
             </a:pPr>
             <a:r>
@@ -8171,7 +8197,7 @@
           <a:bodyPr wrap="square" lIns="0" tIns="0" rIns="0" bIns="0" rtlCol="0" anchor="ctr"/>
           <a:lstStyle/>
           <a:p>
-            <a:pPr algn="r" indent="0" marL="0">
+            <a:pPr marL="0" indent="0" algn="r">
               <a:buNone/>
             </a:pPr>
             <a:r>
@@ -8213,6 +8239,13 @@
             <a:prstDash val="solid"/>
           </a:ln>
         </p:spPr>
+        <p:txBody>
+          <a:bodyPr/>
+          <a:lstStyle/>
+          <a:p>
+            <a:endParaRPr lang="en-US"/>
+          </a:p>
+        </p:txBody>
       </p:sp>
       <p:sp>
         <p:nvSpPr>
@@ -8233,6 +8266,13 @@
           </a:solidFill>
           <a:ln/>
         </p:spPr>
+        <p:txBody>
+          <a:bodyPr/>
+          <a:lstStyle/>
+          <a:p>
+            <a:endParaRPr lang="en-US"/>
+          </a:p>
+        </p:txBody>
       </p:sp>
       <p:sp>
         <p:nvSpPr>
@@ -8255,7 +8295,7 @@
           <a:bodyPr wrap="square" lIns="0" tIns="0" rIns="0" bIns="0" rtlCol="0" anchor="ctr"/>
           <a:lstStyle/>
           <a:p>
-            <a:pPr indent="0" marL="0">
+            <a:pPr marL="0" indent="0">
               <a:buNone/>
             </a:pPr>
             <a:r>
@@ -8294,7 +8334,7 @@
           <a:bodyPr wrap="square" lIns="0" tIns="0" rIns="0" bIns="0" rtlCol="0" anchor="ctr"/>
           <a:lstStyle/>
           <a:p>
-            <a:pPr indent="0" marL="0">
+            <a:pPr marL="0" indent="0">
               <a:buNone/>
             </a:pPr>
             <a:r>
@@ -8311,7 +8351,7 @@
             <a:endParaRPr lang="en-US" sz="1400" dirty="0"/>
           </a:p>
           <a:p>
-            <a:pPr indent="0" marL="0">
+            <a:pPr marL="0" indent="0">
               <a:buNone/>
             </a:pPr>
             <a:r>
@@ -8328,7 +8368,7 @@
             <a:endParaRPr lang="en-US" sz="1400" dirty="0"/>
           </a:p>
           <a:p>
-            <a:pPr indent="0" marL="0">
+            <a:pPr marL="0" indent="0">
               <a:buNone/>
             </a:pPr>
             <a:r>
@@ -8370,6 +8410,13 @@
             <a:prstDash val="solid"/>
           </a:ln>
         </p:spPr>
+        <p:txBody>
+          <a:bodyPr/>
+          <a:lstStyle/>
+          <a:p>
+            <a:endParaRPr lang="en-US"/>
+          </a:p>
+        </p:txBody>
       </p:sp>
       <p:sp>
         <p:nvSpPr>
@@ -8390,6 +8437,13 @@
           </a:solidFill>
           <a:ln/>
         </p:spPr>
+        <p:txBody>
+          <a:bodyPr/>
+          <a:lstStyle/>
+          <a:p>
+            <a:endParaRPr lang="en-US"/>
+          </a:p>
+        </p:txBody>
       </p:sp>
       <p:sp>
         <p:nvSpPr>
@@ -8412,7 +8466,7 @@
           <a:bodyPr wrap="square" lIns="0" tIns="0" rIns="0" bIns="0" rtlCol="0" anchor="ctr"/>
           <a:lstStyle/>
           <a:p>
-            <a:pPr indent="0" marL="0">
+            <a:pPr marL="0" indent="0">
               <a:buNone/>
             </a:pPr>
             <a:r>
@@ -8451,7 +8505,7 @@
           <a:bodyPr wrap="square" lIns="0" tIns="0" rIns="0" bIns="0" rtlCol="0" anchor="ctr"/>
           <a:lstStyle/>
           <a:p>
-            <a:pPr indent="0" marL="0">
+            <a:pPr marL="0" indent="0">
               <a:buNone/>
             </a:pPr>
             <a:r>
@@ -8468,7 +8522,7 @@
             <a:endParaRPr lang="en-US" sz="1400" dirty="0"/>
           </a:p>
           <a:p>
-            <a:pPr indent="0" marL="0">
+            <a:pPr marL="0" indent="0">
               <a:buNone/>
             </a:pPr>
             <a:r>
@@ -8485,7 +8539,7 @@
             <a:endParaRPr lang="en-US" sz="1400" dirty="0"/>
           </a:p>
           <a:p>
-            <a:pPr indent="0" marL="0">
+            <a:pPr marL="0" indent="0">
               <a:buNone/>
             </a:pPr>
             <a:r>
@@ -8511,7 +8565,7 @@
         </p:nvSpPr>
         <p:spPr>
           <a:xfrm>
-            <a:off x="457200" y="2743200"/>
+            <a:off x="457200" y="2716530"/>
             <a:ext cx="8229600" cy="365760"/>
           </a:xfrm>
           <a:prstGeom prst="rect">
@@ -8524,7 +8578,7 @@
           <a:bodyPr wrap="square" lIns="0" tIns="0" rIns="0" bIns="0" rtlCol="0" anchor="ctr"/>
           <a:lstStyle/>
           <a:p>
-            <a:pPr indent="0" marL="0">
+            <a:pPr marL="0" indent="0">
               <a:buNone/>
             </a:pPr>
             <a:r>
@@ -8550,7 +8604,7 @@
         </p:nvSpPr>
         <p:spPr>
           <a:xfrm>
-            <a:off x="457200" y="3200400"/>
+            <a:off x="457200" y="3203448"/>
             <a:ext cx="8229600" cy="384048"/>
           </a:xfrm>
           <a:prstGeom prst="rect">
@@ -8566,6 +8620,13 @@
             <a:prstDash val="solid"/>
           </a:ln>
         </p:spPr>
+        <p:txBody>
+          <a:bodyPr/>
+          <a:lstStyle/>
+          <a:p>
+            <a:endParaRPr lang="en-US"/>
+          </a:p>
+        </p:txBody>
       </p:sp>
       <p:sp>
         <p:nvSpPr>
@@ -8575,7 +8636,7 @@
         </p:nvSpPr>
         <p:spPr>
           <a:xfrm>
-            <a:off x="594360" y="3200400"/>
+            <a:off x="594360" y="3203448"/>
             <a:ext cx="914400" cy="384048"/>
           </a:xfrm>
           <a:prstGeom prst="rect">
@@ -8588,7 +8649,7 @@
           <a:bodyPr wrap="square" lIns="0" tIns="0" rIns="0" bIns="0" rtlCol="0" anchor="ctr"/>
           <a:lstStyle/>
           <a:p>
-            <a:pPr indent="0" marL="0">
+            <a:pPr marL="0" indent="0">
               <a:buNone/>
             </a:pPr>
             <a:r>
@@ -8614,7 +8675,7 @@
         </p:nvSpPr>
         <p:spPr>
           <a:xfrm>
-            <a:off x="1554480" y="3200400"/>
+            <a:off x="1554480" y="3203448"/>
             <a:ext cx="4754880" cy="384048"/>
           </a:xfrm>
           <a:prstGeom prst="rect">
@@ -8627,7 +8688,7 @@
           <a:bodyPr wrap="square" lIns="0" tIns="0" rIns="0" bIns="0" rtlCol="0" anchor="ctr"/>
           <a:lstStyle/>
           <a:p>
-            <a:pPr indent="0" marL="0">
+            <a:pPr marL="0" indent="0">
               <a:buNone/>
             </a:pPr>
             <a:r>
@@ -8653,7 +8714,7 @@
         </p:nvSpPr>
         <p:spPr>
           <a:xfrm>
-            <a:off x="6400800" y="3200400"/>
+            <a:off x="6400800" y="3203448"/>
             <a:ext cx="2103120" cy="384048"/>
           </a:xfrm>
           <a:prstGeom prst="rect">
@@ -8666,7 +8727,7 @@
           <a:bodyPr wrap="square" lIns="0" tIns="0" rIns="0" bIns="0" rtlCol="0" anchor="ctr"/>
           <a:lstStyle/>
           <a:p>
-            <a:pPr indent="0" marL="0">
+            <a:pPr marL="0" indent="0">
               <a:buNone/>
             </a:pPr>
             <a:r>
@@ -8692,7 +8753,7 @@
         </p:nvSpPr>
         <p:spPr>
           <a:xfrm>
-            <a:off x="457200" y="3639312"/>
+            <a:off x="457200" y="3507486"/>
             <a:ext cx="8229600" cy="384048"/>
           </a:xfrm>
           <a:prstGeom prst="rect">
@@ -8708,6 +8769,13 @@
             <a:prstDash val="solid"/>
           </a:ln>
         </p:spPr>
+        <p:txBody>
+          <a:bodyPr/>
+          <a:lstStyle/>
+          <a:p>
+            <a:endParaRPr lang="en-US"/>
+          </a:p>
+        </p:txBody>
       </p:sp>
       <p:sp>
         <p:nvSpPr>
@@ -8717,7 +8785,7 @@
         </p:nvSpPr>
         <p:spPr>
           <a:xfrm>
-            <a:off x="594360" y="3639312"/>
+            <a:off x="594360" y="3507486"/>
             <a:ext cx="914400" cy="384048"/>
           </a:xfrm>
           <a:prstGeom prst="rect">
@@ -8730,7 +8798,7 @@
           <a:bodyPr wrap="square" lIns="0" tIns="0" rIns="0" bIns="0" rtlCol="0" anchor="ctr"/>
           <a:lstStyle/>
           <a:p>
-            <a:pPr indent="0" marL="0">
+            <a:pPr marL="0" indent="0">
               <a:buNone/>
             </a:pPr>
             <a:r>
@@ -8756,7 +8824,7 @@
         </p:nvSpPr>
         <p:spPr>
           <a:xfrm>
-            <a:off x="1554480" y="3639312"/>
+            <a:off x="1554480" y="3507486"/>
             <a:ext cx="4754880" cy="384048"/>
           </a:xfrm>
           <a:prstGeom prst="rect">
@@ -8769,7 +8837,7 @@
           <a:bodyPr wrap="square" lIns="0" tIns="0" rIns="0" bIns="0" rtlCol="0" anchor="ctr"/>
           <a:lstStyle/>
           <a:p>
-            <a:pPr indent="0" marL="0">
+            <a:pPr marL="0" indent="0">
               <a:buNone/>
             </a:pPr>
             <a:r>
@@ -8795,7 +8863,7 @@
         </p:nvSpPr>
         <p:spPr>
           <a:xfrm>
-            <a:off x="6400800" y="3639312"/>
+            <a:off x="6400800" y="3507486"/>
             <a:ext cx="2103120" cy="384048"/>
           </a:xfrm>
           <a:prstGeom prst="rect">
@@ -8808,7 +8876,7 @@
           <a:bodyPr wrap="square" lIns="0" tIns="0" rIns="0" bIns="0" rtlCol="0" anchor="ctr"/>
           <a:lstStyle/>
           <a:p>
-            <a:pPr indent="0" marL="0">
+            <a:pPr marL="0" indent="0">
               <a:buNone/>
             </a:pPr>
             <a:r>
@@ -8834,7 +8902,7 @@
         </p:nvSpPr>
         <p:spPr>
           <a:xfrm>
-            <a:off x="457200" y="4078224"/>
+            <a:off x="457200" y="3811524"/>
             <a:ext cx="8229600" cy="384048"/>
           </a:xfrm>
           <a:prstGeom prst="rect">
@@ -8850,6 +8918,13 @@
             <a:prstDash val="solid"/>
           </a:ln>
         </p:spPr>
+        <p:txBody>
+          <a:bodyPr/>
+          <a:lstStyle/>
+          <a:p>
+            <a:endParaRPr lang="en-US"/>
+          </a:p>
+        </p:txBody>
       </p:sp>
       <p:sp>
         <p:nvSpPr>
@@ -8859,7 +8934,7 @@
         </p:nvSpPr>
         <p:spPr>
           <a:xfrm>
-            <a:off x="594360" y="4078224"/>
+            <a:off x="594360" y="3811524"/>
             <a:ext cx="914400" cy="384048"/>
           </a:xfrm>
           <a:prstGeom prst="rect">
@@ -8872,7 +8947,7 @@
           <a:bodyPr wrap="square" lIns="0" tIns="0" rIns="0" bIns="0" rtlCol="0" anchor="ctr"/>
           <a:lstStyle/>
           <a:p>
-            <a:pPr indent="0" marL="0">
+            <a:pPr marL="0" indent="0">
               <a:buNone/>
             </a:pPr>
             <a:r>
@@ -8898,7 +8973,7 @@
         </p:nvSpPr>
         <p:spPr>
           <a:xfrm>
-            <a:off x="1554480" y="4078224"/>
+            <a:off x="1554480" y="3811524"/>
             <a:ext cx="4754880" cy="384048"/>
           </a:xfrm>
           <a:prstGeom prst="rect">
@@ -8911,7 +8986,7 @@
           <a:bodyPr wrap="square" lIns="0" tIns="0" rIns="0" bIns="0" rtlCol="0" anchor="ctr"/>
           <a:lstStyle/>
           <a:p>
-            <a:pPr indent="0" marL="0">
+            <a:pPr marL="0" indent="0">
               <a:buNone/>
             </a:pPr>
             <a:r>
@@ -8937,7 +9012,7 @@
         </p:nvSpPr>
         <p:spPr>
           <a:xfrm>
-            <a:off x="6400800" y="4078224"/>
+            <a:off x="6400800" y="3811524"/>
             <a:ext cx="2103120" cy="384048"/>
           </a:xfrm>
           <a:prstGeom prst="rect">
@@ -8950,7 +9025,7 @@
           <a:bodyPr wrap="square" lIns="0" tIns="0" rIns="0" bIns="0" rtlCol="0" anchor="ctr"/>
           <a:lstStyle/>
           <a:p>
-            <a:pPr indent="0" marL="0">
+            <a:pPr marL="0" indent="0">
               <a:buNone/>
             </a:pPr>
             <a:r>
@@ -8976,7 +9051,7 @@
         </p:nvSpPr>
         <p:spPr>
           <a:xfrm>
-            <a:off x="457200" y="4517136"/>
+            <a:off x="457200" y="4115562"/>
             <a:ext cx="8229600" cy="384048"/>
           </a:xfrm>
           <a:prstGeom prst="rect">
@@ -8992,6 +9067,13 @@
             <a:prstDash val="solid"/>
           </a:ln>
         </p:spPr>
+        <p:txBody>
+          <a:bodyPr/>
+          <a:lstStyle/>
+          <a:p>
+            <a:endParaRPr lang="en-US"/>
+          </a:p>
+        </p:txBody>
       </p:sp>
       <p:sp>
         <p:nvSpPr>
@@ -9001,7 +9083,7 @@
         </p:nvSpPr>
         <p:spPr>
           <a:xfrm>
-            <a:off x="594360" y="4517136"/>
+            <a:off x="594360" y="4115562"/>
             <a:ext cx="914400" cy="384048"/>
           </a:xfrm>
           <a:prstGeom prst="rect">
@@ -9014,7 +9096,7 @@
           <a:bodyPr wrap="square" lIns="0" tIns="0" rIns="0" bIns="0" rtlCol="0" anchor="ctr"/>
           <a:lstStyle/>
           <a:p>
-            <a:pPr indent="0" marL="0">
+            <a:pPr marL="0" indent="0">
               <a:buNone/>
             </a:pPr>
             <a:r>
@@ -9040,7 +9122,7 @@
         </p:nvSpPr>
         <p:spPr>
           <a:xfrm>
-            <a:off x="1554480" y="4517136"/>
+            <a:off x="1554480" y="4115562"/>
             <a:ext cx="4754880" cy="384048"/>
           </a:xfrm>
           <a:prstGeom prst="rect">
@@ -9053,7 +9135,7 @@
           <a:bodyPr wrap="square" lIns="0" tIns="0" rIns="0" bIns="0" rtlCol="0" anchor="ctr"/>
           <a:lstStyle/>
           <a:p>
-            <a:pPr indent="0" marL="0">
+            <a:pPr marL="0" indent="0">
               <a:buNone/>
             </a:pPr>
             <a:r>
@@ -9079,7 +9161,7 @@
         </p:nvSpPr>
         <p:spPr>
           <a:xfrm>
-            <a:off x="6400800" y="4517136"/>
+            <a:off x="6400800" y="4115562"/>
             <a:ext cx="2103120" cy="384048"/>
           </a:xfrm>
           <a:prstGeom prst="rect">
@@ -9092,7 +9174,7 @@
           <a:bodyPr wrap="square" lIns="0" tIns="0" rIns="0" bIns="0" rtlCol="0" anchor="ctr"/>
           <a:lstStyle/>
           <a:p>
-            <a:pPr indent="0" marL="0">
+            <a:pPr marL="0" indent="0">
               <a:buNone/>
             </a:pPr>
             <a:r>
@@ -9156,7 +9238,7 @@
           <a:bodyPr wrap="square" lIns="0" tIns="0" rIns="0" bIns="0" rtlCol="0" anchor="ctr"/>
           <a:lstStyle/>
           <a:p>
-            <a:pPr indent="0" marL="0">
+            <a:pPr marL="0" indent="0">
               <a:buNone/>
             </a:pPr>
             <a:r>
@@ -9193,6 +9275,13 @@
           </a:solidFill>
           <a:ln/>
         </p:spPr>
+        <p:txBody>
+          <a:bodyPr/>
+          <a:lstStyle/>
+          <a:p>
+            <a:endParaRPr lang="en-US"/>
+          </a:p>
+        </p:txBody>
       </p:sp>
       <p:sp>
         <p:nvSpPr>
@@ -9215,7 +9304,7 @@
           <a:bodyPr wrap="square" lIns="0" tIns="0" rIns="0" bIns="0" rtlCol="0" anchor="ctr"/>
           <a:lstStyle/>
           <a:p>
-            <a:pPr indent="0" marL="0">
+            <a:pPr marL="0" indent="0">
               <a:buNone/>
             </a:pPr>
             <a:r>
@@ -9254,7 +9343,7 @@
           <a:bodyPr wrap="square" lIns="0" tIns="0" rIns="0" bIns="0" rtlCol="0" anchor="ctr"/>
           <a:lstStyle/>
           <a:p>
-            <a:pPr algn="r" indent="0" marL="0">
+            <a:pPr marL="0" indent="0" algn="r">
               <a:buNone/>
             </a:pPr>
             <a:r>
@@ -9280,8 +9369,8 @@
         </p:nvSpPr>
         <p:spPr>
           <a:xfrm>
-            <a:off x="457200" y="914400"/>
-            <a:ext cx="3931920" cy="1828800"/>
+            <a:off x="457200" y="1193800"/>
+            <a:ext cx="3931920" cy="1549400"/>
           </a:xfrm>
           <a:prstGeom prst="rect">
             <a:avLst/>
@@ -9296,6 +9385,13 @@
             <a:prstDash val="solid"/>
           </a:ln>
         </p:spPr>
+        <p:txBody>
+          <a:bodyPr/>
+          <a:lstStyle/>
+          <a:p>
+            <a:endParaRPr lang="en-US"/>
+          </a:p>
+        </p:txBody>
       </p:sp>
       <p:sp>
         <p:nvSpPr>
@@ -9305,8 +9401,8 @@
         </p:nvSpPr>
         <p:spPr>
           <a:xfrm>
-            <a:off x="457200" y="914400"/>
-            <a:ext cx="54864" cy="1828800"/>
+            <a:off x="457200" y="1193800"/>
+            <a:ext cx="54864" cy="1549400"/>
           </a:xfrm>
           <a:prstGeom prst="rect">
             <a:avLst/>
@@ -9316,6 +9412,13 @@
           </a:solidFill>
           <a:ln/>
         </p:spPr>
+        <p:txBody>
+          <a:bodyPr/>
+          <a:lstStyle/>
+          <a:p>
+            <a:endParaRPr lang="en-US"/>
+          </a:p>
+        </p:txBody>
       </p:sp>
       <p:sp>
         <p:nvSpPr>
@@ -9325,7 +9428,7 @@
         </p:nvSpPr>
         <p:spPr>
           <a:xfrm>
-            <a:off x="685800" y="1005840"/>
+            <a:off x="685800" y="1285240"/>
             <a:ext cx="3474720" cy="320040"/>
           </a:xfrm>
           <a:prstGeom prst="rect">
@@ -9338,7 +9441,7 @@
           <a:bodyPr wrap="square" lIns="0" tIns="0" rIns="0" bIns="0" rtlCol="0" anchor="ctr"/>
           <a:lstStyle/>
           <a:p>
-            <a:pPr indent="0" marL="0">
+            <a:pPr marL="0" indent="0">
               <a:buNone/>
             </a:pPr>
             <a:r>
@@ -9364,20 +9467,20 @@
         </p:nvSpPr>
         <p:spPr>
           <a:xfrm>
-            <a:off x="685800" y="1371600"/>
-            <a:ext cx="3474720" cy="1188720"/>
-          </a:xfrm>
-          <a:prstGeom prst="rect">
-            <a:avLst/>
-          </a:prstGeom>
-          <a:noFill/>
-          <a:ln/>
-        </p:spPr>
-        <p:txBody>
-          <a:bodyPr wrap="square" lIns="0" tIns="0" rIns="0" bIns="0" rtlCol="0" anchor="ctr"/>
-          <a:lstStyle/>
-          <a:p>
-            <a:pPr indent="0" marL="0">
+            <a:off x="685800" y="1651000"/>
+            <a:ext cx="3474720" cy="909319"/>
+          </a:xfrm>
+          <a:prstGeom prst="rect">
+            <a:avLst/>
+          </a:prstGeom>
+          <a:noFill/>
+          <a:ln/>
+        </p:spPr>
+        <p:txBody>
+          <a:bodyPr wrap="square" lIns="0" tIns="0" rIns="0" bIns="0" rtlCol="0" anchor="ctr"/>
+          <a:lstStyle/>
+          <a:p>
+            <a:pPr marL="0" indent="0">
               <a:buNone/>
             </a:pPr>
             <a:r>
@@ -9394,7 +9497,7 @@
             <a:endParaRPr lang="en-US" sz="1250" dirty="0"/>
           </a:p>
           <a:p>
-            <a:pPr indent="0" marL="0">
+            <a:pPr marL="0" indent="0">
               <a:buNone/>
             </a:pPr>
             <a:r>
@@ -9411,7 +9514,7 @@
             <a:endParaRPr lang="en-US" sz="1250" dirty="0"/>
           </a:p>
           <a:p>
-            <a:pPr indent="0" marL="0">
+            <a:pPr marL="0" indent="0">
               <a:buNone/>
             </a:pPr>
             <a:r>
@@ -9437,8 +9540,8 @@
         </p:nvSpPr>
         <p:spPr>
           <a:xfrm>
-            <a:off x="4754880" y="914400"/>
-            <a:ext cx="3931920" cy="1828800"/>
+            <a:off x="4754880" y="1193800"/>
+            <a:ext cx="3931920" cy="1549400"/>
           </a:xfrm>
           <a:prstGeom prst="rect">
             <a:avLst/>
@@ -9453,6 +9556,13 @@
             <a:prstDash val="solid"/>
           </a:ln>
         </p:spPr>
+        <p:txBody>
+          <a:bodyPr/>
+          <a:lstStyle/>
+          <a:p>
+            <a:endParaRPr lang="en-US"/>
+          </a:p>
+        </p:txBody>
       </p:sp>
       <p:sp>
         <p:nvSpPr>
@@ -9462,8 +9572,8 @@
         </p:nvSpPr>
         <p:spPr>
           <a:xfrm>
-            <a:off x="4754880" y="914400"/>
-            <a:ext cx="54864" cy="1828800"/>
+            <a:off x="4754880" y="1193800"/>
+            <a:ext cx="54864" cy="1549400"/>
           </a:xfrm>
           <a:prstGeom prst="rect">
             <a:avLst/>
@@ -9473,6 +9583,13 @@
           </a:solidFill>
           <a:ln/>
         </p:spPr>
+        <p:txBody>
+          <a:bodyPr/>
+          <a:lstStyle/>
+          <a:p>
+            <a:endParaRPr lang="en-US"/>
+          </a:p>
+        </p:txBody>
       </p:sp>
       <p:sp>
         <p:nvSpPr>
@@ -9482,7 +9599,7 @@
         </p:nvSpPr>
         <p:spPr>
           <a:xfrm>
-            <a:off x="4983480" y="1005840"/>
+            <a:off x="4983480" y="1285240"/>
             <a:ext cx="3474720" cy="320040"/>
           </a:xfrm>
           <a:prstGeom prst="rect">
@@ -9495,7 +9612,7 @@
           <a:bodyPr wrap="square" lIns="0" tIns="0" rIns="0" bIns="0" rtlCol="0" anchor="ctr"/>
           <a:lstStyle/>
           <a:p>
-            <a:pPr indent="0" marL="0">
+            <a:pPr marL="0" indent="0">
               <a:buNone/>
             </a:pPr>
             <a:r>
@@ -9521,20 +9638,20 @@
         </p:nvSpPr>
         <p:spPr>
           <a:xfrm>
-            <a:off x="4983480" y="1371600"/>
-            <a:ext cx="3474720" cy="1280160"/>
-          </a:xfrm>
-          <a:prstGeom prst="rect">
-            <a:avLst/>
-          </a:prstGeom>
-          <a:noFill/>
-          <a:ln/>
-        </p:spPr>
-        <p:txBody>
-          <a:bodyPr wrap="square" lIns="0" tIns="0" rIns="0" bIns="0" rtlCol="0" anchor="ctr"/>
-          <a:lstStyle/>
-          <a:p>
-            <a:pPr indent="0" marL="0">
+            <a:off x="4983480" y="1651000"/>
+            <a:ext cx="3474720" cy="1000760"/>
+          </a:xfrm>
+          <a:prstGeom prst="rect">
+            <a:avLst/>
+          </a:prstGeom>
+          <a:noFill/>
+          <a:ln/>
+        </p:spPr>
+        <p:txBody>
+          <a:bodyPr wrap="square" lIns="0" tIns="0" rIns="0" bIns="0" rtlCol="0" anchor="ctr"/>
+          <a:lstStyle/>
+          <a:p>
+            <a:pPr marL="0" indent="0">
               <a:buNone/>
             </a:pPr>
             <a:r>
@@ -9551,7 +9668,7 @@
             <a:endParaRPr lang="en-US" sz="1200" dirty="0"/>
           </a:p>
           <a:p>
-            <a:pPr indent="0" marL="0">
+            <a:pPr marL="0" indent="0">
               <a:buNone/>
             </a:pPr>
             <a:r>
@@ -9568,13 +9685,13 @@
             <a:endParaRPr lang="en-US" sz="1200" dirty="0"/>
           </a:p>
           <a:p>
-            <a:pPr indent="0" marL="0">
+            <a:pPr marL="0" indent="0">
               <a:buNone/>
             </a:pPr>
             <a:endParaRPr lang="en-US" sz="1200" dirty="0"/>
           </a:p>
           <a:p>
-            <a:pPr indent="0" marL="0">
+            <a:pPr marL="0" indent="0">
               <a:buNone/>
             </a:pPr>
             <a:r>
@@ -9591,7 +9708,7 @@
             <a:endParaRPr lang="en-US" sz="1200" dirty="0"/>
           </a:p>
           <a:p>
-            <a:pPr indent="0" marL="0">
+            <a:pPr marL="0" indent="0">
               <a:buNone/>
             </a:pPr>
             <a:r>
@@ -9608,7 +9725,7 @@
             <a:endParaRPr lang="en-US" sz="1200" dirty="0"/>
           </a:p>
           <a:p>
-            <a:pPr indent="0" marL="0">
+            <a:pPr marL="0" indent="0">
               <a:buNone/>
             </a:pPr>
             <a:r>
@@ -9625,7 +9742,7 @@
             <a:endParaRPr lang="en-US" sz="1200" dirty="0"/>
           </a:p>
           <a:p>
-            <a:pPr indent="0" marL="0">
+            <a:pPr marL="0" indent="0">
               <a:buNone/>
             </a:pPr>
             <a:r>
@@ -9667,6 +9784,13 @@
             <a:prstDash val="solid"/>
           </a:ln>
         </p:spPr>
+        <p:txBody>
+          <a:bodyPr/>
+          <a:lstStyle/>
+          <a:p>
+            <a:endParaRPr lang="en-US"/>
+          </a:p>
+        </p:txBody>
       </p:sp>
       <p:sp>
         <p:nvSpPr>
@@ -9689,7 +9813,7 @@
           <a:bodyPr wrap="square" lIns="0" tIns="0" rIns="0" bIns="0" rtlCol="0" anchor="ctr"/>
           <a:lstStyle/>
           <a:p>
-            <a:pPr indent="0" marL="0">
+            <a:pPr marL="0" indent="0">
               <a:buNone/>
             </a:pPr>
             <a:r>
@@ -9731,6 +9855,13 @@
             <a:prstDash val="solid"/>
           </a:ln>
         </p:spPr>
+        <p:txBody>
+          <a:bodyPr/>
+          <a:lstStyle/>
+          <a:p>
+            <a:endParaRPr lang="en-US"/>
+          </a:p>
+        </p:txBody>
       </p:sp>
       <p:sp>
         <p:nvSpPr>
@@ -9751,6 +9882,13 @@
           </a:solidFill>
           <a:ln/>
         </p:spPr>
+        <p:txBody>
+          <a:bodyPr/>
+          <a:lstStyle/>
+          <a:p>
+            <a:endParaRPr lang="en-US"/>
+          </a:p>
+        </p:txBody>
       </p:sp>
       <p:sp>
         <p:nvSpPr>
@@ -9773,7 +9911,7 @@
           <a:bodyPr wrap="square" lIns="0" tIns="0" rIns="0" bIns="0" rtlCol="0" anchor="ctr"/>
           <a:lstStyle/>
           <a:p>
-            <a:pPr indent="0" marL="0">
+            <a:pPr marL="0" indent="0">
               <a:buNone/>
             </a:pPr>
             <a:r>
@@ -9812,7 +9950,7 @@
           <a:bodyPr wrap="square" lIns="0" tIns="0" rIns="0" bIns="0" rtlCol="0" anchor="ctr"/>
           <a:lstStyle/>
           <a:p>
-            <a:pPr indent="0" marL="0">
+            <a:pPr marL="0" indent="0">
               <a:buNone/>
             </a:pPr>
             <a:r>
@@ -9851,7 +9989,7 @@
           <a:bodyPr wrap="square" lIns="0" tIns="0" rIns="0" bIns="0" rtlCol="0" anchor="ctr"/>
           <a:lstStyle/>
           <a:p>
-            <a:pPr algn="ctr" indent="0" marL="0">
+            <a:pPr marL="0" indent="0" algn="ctr">
               <a:buNone/>
             </a:pPr>
             <a:r>
@@ -9893,6 +10031,13 @@
             <a:prstDash val="solid"/>
           </a:ln>
         </p:spPr>
+        <p:txBody>
+          <a:bodyPr/>
+          <a:lstStyle/>
+          <a:p>
+            <a:endParaRPr lang="en-US"/>
+          </a:p>
+        </p:txBody>
       </p:sp>
       <p:sp>
         <p:nvSpPr>
@@ -9913,6 +10058,13 @@
           </a:solidFill>
           <a:ln/>
         </p:spPr>
+        <p:txBody>
+          <a:bodyPr/>
+          <a:lstStyle/>
+          <a:p>
+            <a:endParaRPr lang="en-US"/>
+          </a:p>
+        </p:txBody>
       </p:sp>
       <p:sp>
         <p:nvSpPr>
@@ -9935,7 +10087,7 @@
           <a:bodyPr wrap="square" lIns="0" tIns="0" rIns="0" bIns="0" rtlCol="0" anchor="ctr"/>
           <a:lstStyle/>
           <a:p>
-            <a:pPr indent="0" marL="0">
+            <a:pPr marL="0" indent="0">
               <a:buNone/>
             </a:pPr>
             <a:r>
@@ -9974,7 +10126,7 @@
           <a:bodyPr wrap="square" lIns="0" tIns="0" rIns="0" bIns="0" rtlCol="0" anchor="ctr"/>
           <a:lstStyle/>
           <a:p>
-            <a:pPr indent="0" marL="0">
+            <a:pPr marL="0" indent="0">
               <a:buNone/>
             </a:pPr>
             <a:r>
@@ -9989,6 +10141,51 @@
               <a:t>of Python</a:t>
             </a:r>
             <a:endParaRPr lang="en-US" sz="1400" dirty="0"/>
+          </a:p>
+        </p:txBody>
+      </p:sp>
+      <p:sp>
+        <p:nvSpPr>
+          <p:cNvPr id="25" name="TextBox 24">
+            <a:extLst>
+              <a:ext uri="{FF2B5EF4-FFF2-40B4-BE49-F238E27FC236}">
+                <a16:creationId xmlns:a16="http://schemas.microsoft.com/office/drawing/2014/main" id="{37C4D3D0-7025-CE4B-B697-CDF22AC6C6B2}"/>
+              </a:ext>
+            </a:extLst>
+          </p:cNvPr>
+          <p:cNvSpPr txBox="1"/>
+          <p:nvPr/>
+        </p:nvSpPr>
+        <p:spPr>
+          <a:xfrm>
+            <a:off x="457200" y="838200"/>
+            <a:ext cx="8229600" cy="304800"/>
+          </a:xfrm>
+          <a:prstGeom prst="rect">
+            <a:avLst/>
+          </a:prstGeom>
+          <a:noFill/>
+          <a:ln>
+            <a:noFill/>
+          </a:ln>
+        </p:spPr>
+        <p:txBody>
+          <a:bodyPr vertOverflow="overflow" vert="horz" wrap="square" rtlCol="0" anchor="ctr" anchorCtr="0">
+            <a:noAutofit/>
+          </a:bodyPr>
+          <a:lstStyle/>
+          <a:p>
+            <a:pPr algn="l"/>
+            <a:r>
+              <a:rPr lang="en-US" sz="1300" b="1">
+                <a:solidFill>
+                  <a:srgbClr val="0E7C7B"/>
+                </a:solidFill>
+                <a:latin typeface="Calibri"/>
+                <a:cs typeface="Calibri"/>
+              </a:rPr>
+              <a:t>A definition d: x = ... reaches a program point p if there is a path from d to p along which x is not redefined.</a:t>
+            </a:r>
           </a:p>
         </p:txBody>
       </p:sp>
@@ -10038,7 +10235,7 @@
           <a:bodyPr wrap="square" lIns="0" tIns="0" rIns="0" bIns="0" rtlCol="0" anchor="ctr"/>
           <a:lstStyle/>
           <a:p>
-            <a:pPr indent="0" marL="0">
+            <a:pPr marL="0" indent="0">
               <a:buNone/>
             </a:pPr>
             <a:r>
@@ -10075,6 +10272,13 @@
           </a:solidFill>
           <a:ln/>
         </p:spPr>
+        <p:txBody>
+          <a:bodyPr/>
+          <a:lstStyle/>
+          <a:p>
+            <a:endParaRPr lang="en-US"/>
+          </a:p>
+        </p:txBody>
       </p:sp>
       <p:sp>
         <p:nvSpPr>
@@ -10097,7 +10301,7 @@
           <a:bodyPr wrap="square" lIns="0" tIns="0" rIns="0" bIns="0" rtlCol="0" anchor="ctr"/>
           <a:lstStyle/>
           <a:p>
-            <a:pPr indent="0" marL="0">
+            <a:pPr marL="0" indent="0">
               <a:buNone/>
             </a:pPr>
             <a:r>
@@ -10136,7 +10340,7 @@
           <a:bodyPr wrap="square" lIns="0" tIns="0" rIns="0" bIns="0" rtlCol="0" anchor="ctr"/>
           <a:lstStyle/>
           <a:p>
-            <a:pPr algn="r" indent="0" marL="0">
+            <a:pPr marL="0" indent="0" algn="r">
               <a:buNone/>
             </a:pPr>
             <a:r>
@@ -10173,6 +10377,13 @@
           </a:solidFill>
           <a:ln/>
         </p:spPr>
+        <p:txBody>
+          <a:bodyPr/>
+          <a:lstStyle/>
+          <a:p>
+            <a:endParaRPr lang="en-US"/>
+          </a:p>
+        </p:txBody>
       </p:sp>
       <p:sp>
         <p:nvSpPr>
@@ -10195,7 +10406,7 @@
           <a:bodyPr wrap="square" lIns="0" tIns="0" rIns="0" bIns="0" rtlCol="0" anchor="ctr"/>
           <a:lstStyle/>
           <a:p>
-            <a:pPr indent="0" marL="0">
+            <a:pPr marL="0" indent="0">
               <a:buNone/>
             </a:pPr>
             <a:r>
@@ -10234,7 +10445,7 @@
           <a:bodyPr wrap="square" lIns="0" tIns="0" rIns="0" bIns="0" rtlCol="0" anchor="ctr"/>
           <a:lstStyle/>
           <a:p>
-            <a:pPr indent="0" marL="0">
+            <a:pPr marL="0" indent="0">
               <a:buNone/>
             </a:pPr>
             <a:r>
@@ -10251,13 +10462,13 @@
             <a:endParaRPr lang="en-US" sz="1600" dirty="0"/>
           </a:p>
           <a:p>
-            <a:pPr indent="0" marL="0">
+            <a:pPr marL="0" indent="0">
               <a:buNone/>
             </a:pPr>
             <a:endParaRPr lang="en-US" sz="1600" dirty="0"/>
           </a:p>
           <a:p>
-            <a:pPr indent="0" marL="0">
+            <a:pPr marL="0" indent="0">
               <a:buNone/>
             </a:pPr>
             <a:r>
@@ -10274,7 +10485,7 @@
             <a:endParaRPr lang="en-US" sz="1600" dirty="0"/>
           </a:p>
           <a:p>
-            <a:pPr indent="0" marL="0">
+            <a:pPr marL="0" indent="0">
               <a:buNone/>
             </a:pPr>
             <a:r>
@@ -10291,7 +10502,7 @@
             <a:endParaRPr lang="en-US" sz="1600" dirty="0"/>
           </a:p>
           <a:p>
-            <a:pPr indent="0" marL="0">
+            <a:pPr marL="0" indent="0">
               <a:buNone/>
             </a:pPr>
             <a:r>
@@ -10308,13 +10519,13 @@
             <a:endParaRPr lang="en-US" sz="1600" dirty="0"/>
           </a:p>
           <a:p>
-            <a:pPr indent="0" marL="0">
+            <a:pPr marL="0" indent="0">
               <a:buNone/>
             </a:pPr>
             <a:endParaRPr lang="en-US" sz="1600" dirty="0"/>
           </a:p>
           <a:p>
-            <a:pPr indent="0" marL="0">
+            <a:pPr marL="0" indent="0">
               <a:buNone/>
             </a:pPr>
             <a:r>
@@ -10353,7 +10564,7 @@
           <a:bodyPr wrap="square" lIns="0" tIns="0" rIns="0" bIns="0" rtlCol="0" anchor="ctr"/>
           <a:lstStyle/>
           <a:p>
-            <a:pPr indent="0" marL="0">
+            <a:pPr marL="0" indent="0">
               <a:buNone/>
             </a:pPr>
             <a:r>
@@ -10395,6 +10606,13 @@
             <a:prstDash val="solid"/>
           </a:ln>
         </p:spPr>
+        <p:txBody>
+          <a:bodyPr/>
+          <a:lstStyle/>
+          <a:p>
+            <a:endParaRPr lang="en-US"/>
+          </a:p>
+        </p:txBody>
       </p:sp>
       <p:sp>
         <p:nvSpPr>
@@ -10417,7 +10635,7 @@
           <a:bodyPr wrap="square" lIns="0" tIns="0" rIns="0" bIns="0" rtlCol="0" anchor="ctr"/>
           <a:lstStyle/>
           <a:p>
-            <a:pPr indent="0" marL="0">
+            <a:pPr marL="0" indent="0">
               <a:buNone/>
             </a:pPr>
             <a:r>
@@ -10456,7 +10674,7 @@
           <a:bodyPr wrap="square" lIns="0" tIns="0" rIns="0" bIns="0" rtlCol="0" anchor="ctr"/>
           <a:lstStyle/>
           <a:p>
-            <a:pPr indent="0" marL="0">
+            <a:pPr marL="0" indent="0">
               <a:buNone/>
             </a:pPr>
             <a:r>
@@ -10498,6 +10716,13 @@
             <a:prstDash val="solid"/>
           </a:ln>
         </p:spPr>
+        <p:txBody>
+          <a:bodyPr/>
+          <a:lstStyle/>
+          <a:p>
+            <a:endParaRPr lang="en-US"/>
+          </a:p>
+        </p:txBody>
       </p:sp>
       <p:sp>
         <p:nvSpPr>
@@ -10520,7 +10745,7 @@
           <a:bodyPr wrap="square" lIns="0" tIns="0" rIns="0" bIns="0" rtlCol="0" anchor="ctr"/>
           <a:lstStyle/>
           <a:p>
-            <a:pPr indent="0" marL="0">
+            <a:pPr marL="0" indent="0">
               <a:buNone/>
             </a:pPr>
             <a:r>
@@ -10559,7 +10784,7 @@
           <a:bodyPr wrap="square" lIns="0" tIns="0" rIns="0" bIns="0" rtlCol="0" anchor="ctr"/>
           <a:lstStyle/>
           <a:p>
-            <a:pPr indent="0" marL="0">
+            <a:pPr marL="0" indent="0">
               <a:buNone/>
             </a:pPr>
             <a:r>
@@ -10601,6 +10826,13 @@
             <a:prstDash val="solid"/>
           </a:ln>
         </p:spPr>
+        <p:txBody>
+          <a:bodyPr/>
+          <a:lstStyle/>
+          <a:p>
+            <a:endParaRPr lang="en-US"/>
+          </a:p>
+        </p:txBody>
       </p:sp>
       <p:sp>
         <p:nvSpPr>
@@ -10623,7 +10855,7 @@
           <a:bodyPr wrap="square" lIns="0" tIns="0" rIns="0" bIns="0" rtlCol="0" anchor="ctr"/>
           <a:lstStyle/>
           <a:p>
-            <a:pPr indent="0" marL="0">
+            <a:pPr marL="0" indent="0">
               <a:buNone/>
             </a:pPr>
             <a:r>
@@ -10662,7 +10894,7 @@
           <a:bodyPr wrap="square" lIns="0" tIns="0" rIns="0" bIns="0" rtlCol="0" anchor="ctr"/>
           <a:lstStyle/>
           <a:p>
-            <a:pPr indent="0" marL="0">
+            <a:pPr marL="0" indent="0">
               <a:buNone/>
             </a:pPr>
             <a:r>
@@ -10704,6 +10936,13 @@
             <a:prstDash val="solid"/>
           </a:ln>
         </p:spPr>
+        <p:txBody>
+          <a:bodyPr/>
+          <a:lstStyle/>
+          <a:p>
+            <a:endParaRPr lang="en-US"/>
+          </a:p>
+        </p:txBody>
       </p:sp>
       <p:sp>
         <p:nvSpPr>
@@ -10726,7 +10965,7 @@
           <a:bodyPr wrap="square" lIns="0" tIns="0" rIns="0" bIns="0" rtlCol="0" anchor="ctr"/>
           <a:lstStyle/>
           <a:p>
-            <a:pPr indent="0" marL="0">
+            <a:pPr marL="0" indent="0">
               <a:buNone/>
             </a:pPr>
             <a:r>
@@ -10765,7 +11004,7 @@
           <a:bodyPr wrap="square" lIns="0" tIns="0" rIns="0" bIns="0" rtlCol="0" anchor="ctr"/>
           <a:lstStyle/>
           <a:p>
-            <a:pPr indent="0" marL="0">
+            <a:pPr marL="0" indent="0">
               <a:buNone/>
             </a:pPr>
             <a:r>
@@ -10829,7 +11068,7 @@
           <a:bodyPr wrap="square" lIns="0" tIns="0" rIns="0" bIns="0" rtlCol="0" anchor="ctr"/>
           <a:lstStyle/>
           <a:p>
-            <a:pPr indent="0" marL="0">
+            <a:pPr marL="0" indent="0">
               <a:buNone/>
             </a:pPr>
             <a:r>
@@ -10866,6 +11105,13 @@
           </a:solidFill>
           <a:ln/>
         </p:spPr>
+        <p:txBody>
+          <a:bodyPr/>
+          <a:lstStyle/>
+          <a:p>
+            <a:endParaRPr lang="en-US"/>
+          </a:p>
+        </p:txBody>
       </p:sp>
       <p:sp>
         <p:nvSpPr>
@@ -10888,7 +11134,7 @@
           <a:bodyPr wrap="square" lIns="0" tIns="0" rIns="0" bIns="0" rtlCol="0" anchor="ctr"/>
           <a:lstStyle/>
           <a:p>
-            <a:pPr indent="0" marL="0">
+            <a:pPr marL="0" indent="0">
               <a:buNone/>
             </a:pPr>
             <a:r>
@@ -10927,7 +11173,7 @@
           <a:bodyPr wrap="square" lIns="0" tIns="0" rIns="0" bIns="0" rtlCol="0" anchor="ctr"/>
           <a:lstStyle/>
           <a:p>
-            <a:pPr algn="r" indent="0" marL="0">
+            <a:pPr marL="0" indent="0" algn="r">
               <a:buNone/>
             </a:pPr>
             <a:r>
@@ -10964,6 +11210,13 @@
           </a:solidFill>
           <a:ln/>
         </p:spPr>
+        <p:txBody>
+          <a:bodyPr/>
+          <a:lstStyle/>
+          <a:p>
+            <a:endParaRPr lang="en-US"/>
+          </a:p>
+        </p:txBody>
       </p:sp>
       <p:sp>
         <p:nvSpPr>
@@ -10986,7 +11239,7 @@
           <a:bodyPr wrap="square" lIns="0" tIns="0" rIns="0" bIns="0" rtlCol="0" anchor="ctr"/>
           <a:lstStyle/>
           <a:p>
-            <a:pPr indent="0" marL="0">
+            <a:pPr marL="0" indent="0">
               <a:buNone/>
             </a:pPr>
             <a:r>
@@ -11028,6 +11281,13 @@
             <a:prstDash val="solid"/>
           </a:ln>
         </p:spPr>
+        <p:txBody>
+          <a:bodyPr/>
+          <a:lstStyle/>
+          <a:p>
+            <a:endParaRPr lang="en-US"/>
+          </a:p>
+        </p:txBody>
       </p:sp>
       <p:sp>
         <p:nvSpPr>
@@ -11048,6 +11308,13 @@
           </a:solidFill>
           <a:ln/>
         </p:spPr>
+        <p:txBody>
+          <a:bodyPr/>
+          <a:lstStyle/>
+          <a:p>
+            <a:endParaRPr lang="en-US"/>
+          </a:p>
+        </p:txBody>
       </p:sp>
       <p:sp>
         <p:nvSpPr>
@@ -11070,7 +11337,7 @@
           <a:bodyPr wrap="square" lIns="0" tIns="0" rIns="0" bIns="0" rtlCol="0" anchor="ctr"/>
           <a:lstStyle/>
           <a:p>
-            <a:pPr indent="0" marL="0">
+            <a:pPr marL="0" indent="0">
               <a:buNone/>
             </a:pPr>
             <a:r>
@@ -11109,7 +11376,7 @@
           <a:bodyPr wrap="square" lIns="0" tIns="0" rIns="0" bIns="0" rtlCol="0" anchor="ctr"/>
           <a:lstStyle/>
           <a:p>
-            <a:pPr indent="0" marL="0">
+            <a:pPr marL="0" indent="0">
               <a:buNone/>
             </a:pPr>
             <a:r>
@@ -11126,7 +11393,7 @@
             <a:endParaRPr lang="en-US" sz="1200" dirty="0"/>
           </a:p>
           <a:p>
-            <a:pPr indent="0" marL="0">
+            <a:pPr marL="0" indent="0">
               <a:buNone/>
             </a:pPr>
             <a:r>
@@ -11168,6 +11435,13 @@
             <a:prstDash val="solid"/>
           </a:ln>
         </p:spPr>
+        <p:txBody>
+          <a:bodyPr/>
+          <a:lstStyle/>
+          <a:p>
+            <a:endParaRPr lang="en-US"/>
+          </a:p>
+        </p:txBody>
       </p:sp>
       <p:sp>
         <p:nvSpPr>
@@ -11188,6 +11462,13 @@
           </a:solidFill>
           <a:ln/>
         </p:spPr>
+        <p:txBody>
+          <a:bodyPr/>
+          <a:lstStyle/>
+          <a:p>
+            <a:endParaRPr lang="en-US"/>
+          </a:p>
+        </p:txBody>
       </p:sp>
       <p:sp>
         <p:nvSpPr>
@@ -11210,7 +11491,7 @@
           <a:bodyPr wrap="square" lIns="0" tIns="0" rIns="0" bIns="0" rtlCol="0" anchor="ctr"/>
           <a:lstStyle/>
           <a:p>
-            <a:pPr indent="0" marL="0">
+            <a:pPr marL="0" indent="0">
               <a:buNone/>
             </a:pPr>
             <a:r>
@@ -11249,7 +11530,7 @@
           <a:bodyPr wrap="square" lIns="0" tIns="0" rIns="0" bIns="0" rtlCol="0" anchor="ctr"/>
           <a:lstStyle/>
           <a:p>
-            <a:pPr indent="0" marL="0">
+            <a:pPr marL="0" indent="0">
               <a:buNone/>
             </a:pPr>
             <a:r>
@@ -11266,7 +11547,7 @@
             <a:endParaRPr lang="en-US" sz="1200" dirty="0"/>
           </a:p>
           <a:p>
-            <a:pPr indent="0" marL="0">
+            <a:pPr marL="0" indent="0">
               <a:buNone/>
             </a:pPr>
             <a:r>
@@ -11283,7 +11564,7 @@
             <a:endParaRPr lang="en-US" sz="1200" dirty="0"/>
           </a:p>
           <a:p>
-            <a:pPr indent="0" marL="0">
+            <a:pPr marL="0" indent="0">
               <a:buNone/>
             </a:pPr>
             <a:r>
@@ -11325,6 +11606,13 @@
             <a:prstDash val="solid"/>
           </a:ln>
         </p:spPr>
+        <p:txBody>
+          <a:bodyPr/>
+          <a:lstStyle/>
+          <a:p>
+            <a:endParaRPr lang="en-US"/>
+          </a:p>
+        </p:txBody>
       </p:sp>
       <p:sp>
         <p:nvSpPr>
@@ -11345,6 +11633,13 @@
           </a:solidFill>
           <a:ln/>
         </p:spPr>
+        <p:txBody>
+          <a:bodyPr/>
+          <a:lstStyle/>
+          <a:p>
+            <a:endParaRPr lang="en-US"/>
+          </a:p>
+        </p:txBody>
       </p:sp>
       <p:sp>
         <p:nvSpPr>
@@ -11367,7 +11662,7 @@
           <a:bodyPr wrap="square" lIns="0" tIns="0" rIns="0" bIns="0" rtlCol="0" anchor="ctr"/>
           <a:lstStyle/>
           <a:p>
-            <a:pPr indent="0" marL="0">
+            <a:pPr marL="0" indent="0">
               <a:buNone/>
             </a:pPr>
             <a:r>
@@ -11406,7 +11701,7 @@
           <a:bodyPr wrap="square" lIns="0" tIns="0" rIns="0" bIns="0" rtlCol="0" anchor="ctr"/>
           <a:lstStyle/>
           <a:p>
-            <a:pPr indent="0" marL="0">
+            <a:pPr marL="0" indent="0">
               <a:buNone/>
             </a:pPr>
             <a:r>
@@ -11423,7 +11718,7 @@
             <a:endParaRPr lang="en-US" sz="1200" dirty="0"/>
           </a:p>
           <a:p>
-            <a:pPr indent="0" marL="0">
+            <a:pPr marL="0" indent="0">
               <a:buNone/>
             </a:pPr>
             <a:r>
@@ -11465,6 +11760,13 @@
             <a:prstDash val="solid"/>
           </a:ln>
         </p:spPr>
+        <p:txBody>
+          <a:bodyPr/>
+          <a:lstStyle/>
+          <a:p>
+            <a:endParaRPr lang="en-US"/>
+          </a:p>
+        </p:txBody>
       </p:sp>
       <p:sp>
         <p:nvSpPr>
@@ -11485,6 +11787,13 @@
           </a:solidFill>
           <a:ln/>
         </p:spPr>
+        <p:txBody>
+          <a:bodyPr/>
+          <a:lstStyle/>
+          <a:p>
+            <a:endParaRPr lang="en-US"/>
+          </a:p>
+        </p:txBody>
       </p:sp>
       <p:sp>
         <p:nvSpPr>
@@ -11507,7 +11816,7 @@
           <a:bodyPr wrap="square" lIns="0" tIns="0" rIns="0" bIns="0" rtlCol="0" anchor="ctr"/>
           <a:lstStyle/>
           <a:p>
-            <a:pPr indent="0" marL="0">
+            <a:pPr marL="0" indent="0">
               <a:buNone/>
             </a:pPr>
             <a:r>
@@ -11546,7 +11855,7 @@
           <a:bodyPr wrap="square" lIns="0" tIns="0" rIns="0" bIns="0" rtlCol="0" anchor="ctr"/>
           <a:lstStyle/>
           <a:p>
-            <a:pPr indent="0" marL="0">
+            <a:pPr marL="0" indent="0">
               <a:buNone/>
             </a:pPr>
             <a:r>
@@ -11563,7 +11872,7 @@
             <a:endParaRPr lang="en-US" sz="1200" dirty="0"/>
           </a:p>
           <a:p>
-            <a:pPr indent="0" marL="0">
+            <a:pPr marL="0" indent="0">
               <a:buNone/>
             </a:pPr>
             <a:r>
@@ -11580,7 +11889,7 @@
             <a:endParaRPr lang="en-US" sz="1200" dirty="0"/>
           </a:p>
           <a:p>
-            <a:pPr indent="0" marL="0">
+            <a:pPr marL="0" indent="0">
               <a:buNone/>
             </a:pPr>
             <a:r>
@@ -11619,7 +11928,7 @@
           <a:bodyPr wrap="square" lIns="0" tIns="0" rIns="0" bIns="0" rtlCol="0" anchor="ctr"/>
           <a:lstStyle/>
           <a:p>
-            <a:pPr indent="0" marL="0">
+            <a:pPr marL="0" indent="0">
               <a:buNone/>
             </a:pPr>
             <a:r>
@@ -11683,7 +11992,7 @@
           <a:bodyPr wrap="square" lIns="0" tIns="0" rIns="0" bIns="0" rtlCol="0" anchor="ctr"/>
           <a:lstStyle/>
           <a:p>
-            <a:pPr indent="0" marL="0">
+            <a:pPr marL="0" indent="0">
               <a:buNone/>
             </a:pPr>
             <a:r>
@@ -11720,6 +12029,13 @@
           </a:solidFill>
           <a:ln/>
         </p:spPr>
+        <p:txBody>
+          <a:bodyPr/>
+          <a:lstStyle/>
+          <a:p>
+            <a:endParaRPr lang="en-US"/>
+          </a:p>
+        </p:txBody>
       </p:sp>
       <p:sp>
         <p:nvSpPr>
@@ -11742,7 +12058,7 @@
           <a:bodyPr wrap="square" lIns="0" tIns="0" rIns="0" bIns="0" rtlCol="0" anchor="ctr"/>
           <a:lstStyle/>
           <a:p>
-            <a:pPr indent="0" marL="0">
+            <a:pPr marL="0" indent="0">
               <a:buNone/>
             </a:pPr>
             <a:r>
@@ -11781,7 +12097,7 @@
           <a:bodyPr wrap="square" lIns="0" tIns="0" rIns="0" bIns="0" rtlCol="0" anchor="ctr"/>
           <a:lstStyle/>
           <a:p>
-            <a:pPr algn="r" indent="0" marL="0">
+            <a:pPr marL="0" indent="0" algn="r">
               <a:buNone/>
             </a:pPr>
             <a:r>
@@ -11823,6 +12139,13 @@
             <a:prstDash val="solid"/>
           </a:ln>
         </p:spPr>
+        <p:txBody>
+          <a:bodyPr/>
+          <a:lstStyle/>
+          <a:p>
+            <a:endParaRPr lang="en-US"/>
+          </a:p>
+        </p:txBody>
       </p:sp>
       <p:sp>
         <p:nvSpPr>
@@ -11843,6 +12166,13 @@
           </a:solidFill>
           <a:ln/>
         </p:spPr>
+        <p:txBody>
+          <a:bodyPr/>
+          <a:lstStyle/>
+          <a:p>
+            <a:endParaRPr lang="en-US"/>
+          </a:p>
+        </p:txBody>
       </p:sp>
       <p:sp>
         <p:nvSpPr>
@@ -11865,7 +12195,7 @@
           <a:bodyPr wrap="square" lIns="0" tIns="0" rIns="0" bIns="0" rtlCol="0" anchor="ctr"/>
           <a:lstStyle/>
           <a:p>
-            <a:pPr indent="0" marL="0">
+            <a:pPr marL="0" indent="0">
               <a:buNone/>
             </a:pPr>
             <a:r>
@@ -11904,7 +12234,7 @@
           <a:bodyPr wrap="square" lIns="0" tIns="0" rIns="0" bIns="0" rtlCol="0" anchor="ctr"/>
           <a:lstStyle/>
           <a:p>
-            <a:pPr indent="0" marL="0">
+            <a:pPr marL="0" indent="0">
               <a:buNone/>
             </a:pPr>
             <a:r>
@@ -11946,6 +12276,13 @@
             <a:prstDash val="solid"/>
           </a:ln>
         </p:spPr>
+        <p:txBody>
+          <a:bodyPr/>
+          <a:lstStyle/>
+          <a:p>
+            <a:endParaRPr lang="en-US"/>
+          </a:p>
+        </p:txBody>
       </p:sp>
       <p:sp>
         <p:nvSpPr>
@@ -11966,6 +12303,13 @@
           </a:solidFill>
           <a:ln/>
         </p:spPr>
+        <p:txBody>
+          <a:bodyPr/>
+          <a:lstStyle/>
+          <a:p>
+            <a:endParaRPr lang="en-US"/>
+          </a:p>
+        </p:txBody>
       </p:sp>
       <p:sp>
         <p:nvSpPr>
@@ -11988,7 +12332,7 @@
           <a:bodyPr wrap="square" lIns="0" tIns="0" rIns="0" bIns="0" rtlCol="0" anchor="ctr"/>
           <a:lstStyle/>
           <a:p>
-            <a:pPr indent="0" marL="0">
+            <a:pPr marL="0" indent="0">
               <a:buNone/>
             </a:pPr>
             <a:r>
@@ -12027,7 +12371,7 @@
           <a:bodyPr wrap="square" lIns="0" tIns="0" rIns="0" bIns="0" rtlCol="0" anchor="ctr"/>
           <a:lstStyle/>
           <a:p>
-            <a:pPr indent="0" marL="0">
+            <a:pPr marL="0" indent="0">
               <a:buNone/>
             </a:pPr>
             <a:r>
@@ -12069,6 +12413,13 @@
             <a:prstDash val="solid"/>
           </a:ln>
         </p:spPr>
+        <p:txBody>
+          <a:bodyPr/>
+          <a:lstStyle/>
+          <a:p>
+            <a:endParaRPr lang="en-US"/>
+          </a:p>
+        </p:txBody>
       </p:sp>
       <p:sp>
         <p:nvSpPr>
@@ -12089,6 +12440,13 @@
           </a:solidFill>
           <a:ln/>
         </p:spPr>
+        <p:txBody>
+          <a:bodyPr/>
+          <a:lstStyle/>
+          <a:p>
+            <a:endParaRPr lang="en-US"/>
+          </a:p>
+        </p:txBody>
       </p:sp>
       <p:sp>
         <p:nvSpPr>
@@ -12111,7 +12469,7 @@
           <a:bodyPr wrap="square" lIns="0" tIns="0" rIns="0" bIns="0" rtlCol="0" anchor="ctr"/>
           <a:lstStyle/>
           <a:p>
-            <a:pPr indent="0" marL="0">
+            <a:pPr marL="0" indent="0">
               <a:buNone/>
             </a:pPr>
             <a:r>
@@ -12150,7 +12508,7 @@
           <a:bodyPr wrap="square" lIns="0" tIns="0" rIns="0" bIns="0" rtlCol="0" anchor="ctr"/>
           <a:lstStyle/>
           <a:p>
-            <a:pPr indent="0" marL="0">
+            <a:pPr marL="0" indent="0">
               <a:buNone/>
             </a:pPr>
             <a:r>
@@ -12187,6 +12545,13 @@
           </a:solidFill>
           <a:ln/>
         </p:spPr>
+        <p:txBody>
+          <a:bodyPr/>
+          <a:lstStyle/>
+          <a:p>
+            <a:endParaRPr lang="en-US"/>
+          </a:p>
+        </p:txBody>
       </p:sp>
       <p:sp>
         <p:nvSpPr>
@@ -12209,7 +12574,7 @@
           <a:bodyPr wrap="square" lIns="0" tIns="0" rIns="0" bIns="0" rtlCol="0" anchor="ctr"/>
           <a:lstStyle/>
           <a:p>
-            <a:pPr indent="0" marL="0">
+            <a:pPr marL="0" indent="0">
               <a:buNone/>
             </a:pPr>
             <a:r>
@@ -12243,6 +12608,7 @@
         <a:solidFill>
           <a:srgbClr val="1B2A4A"/>
         </a:solidFill>
+        <a:effectLst/>
       </p:bgPr>
     </p:bg>
     <p:spTree>
@@ -12280,11 +12646,11 @@
           <a:bodyPr wrap="square" lIns="0" tIns="0" rIns="0" bIns="0" rtlCol="0" anchor="ctr"/>
           <a:lstStyle/>
           <a:p>
-            <a:pPr indent="0" marL="0">
-              <a:buNone/>
-            </a:pPr>
-            <a:r>
-              <a:rPr lang="en-US" sz="1600" b="1" spc="400" kern="0" dirty="0">
+            <a:pPr marL="0" indent="0">
+              <a:buNone/>
+            </a:pPr>
+            <a:r>
+              <a:rPr lang="en-US" sz="1600" b="1" kern="0" spc="400" dirty="0">
                 <a:solidFill>
                   <a:srgbClr val="0E7C7B"/>
                 </a:solidFill>
@@ -12319,7 +12685,7 @@
           <a:bodyPr wrap="square" lIns="0" tIns="0" rIns="0" bIns="0" rtlCol="0" anchor="ctr"/>
           <a:lstStyle/>
           <a:p>
-            <a:pPr indent="0" marL="0">
+            <a:pPr marL="0" indent="0">
               <a:buNone/>
             </a:pPr>
             <a:r>
@@ -12336,7 +12702,7 @@
             <a:endParaRPr lang="en-US" sz="3600" dirty="0"/>
           </a:p>
           <a:p>
-            <a:pPr indent="0" marL="0">
+            <a:pPr marL="0" indent="0">
               <a:buNone/>
             </a:pPr>
             <a:r>
@@ -12375,7 +12741,7 @@
           <a:bodyPr wrap="square" lIns="0" tIns="0" rIns="0" bIns="0" rtlCol="0" anchor="ctr"/>
           <a:lstStyle/>
           <a:p>
-            <a:pPr indent="0" marL="0">
+            <a:pPr marL="0" indent="0">
               <a:buNone/>
             </a:pPr>
             <a:r>
@@ -12412,6 +12778,13 @@
           </a:solidFill>
           <a:ln/>
         </p:spPr>
+        <p:txBody>
+          <a:bodyPr/>
+          <a:lstStyle/>
+          <a:p>
+            <a:endParaRPr lang="en-US"/>
+          </a:p>
+        </p:txBody>
       </p:sp>
     </p:spTree>
   </p:cSld>
@@ -12459,7 +12832,7 @@
           <a:bodyPr wrap="square" lIns="0" tIns="0" rIns="0" bIns="0" rtlCol="0" anchor="ctr"/>
           <a:lstStyle/>
           <a:p>
-            <a:pPr indent="0" marL="0">
+            <a:pPr marL="0" indent="0">
               <a:buNone/>
             </a:pPr>
             <a:r>
@@ -12496,6 +12869,13 @@
           </a:solidFill>
           <a:ln/>
         </p:spPr>
+        <p:txBody>
+          <a:bodyPr/>
+          <a:lstStyle/>
+          <a:p>
+            <a:endParaRPr lang="en-US"/>
+          </a:p>
+        </p:txBody>
       </p:sp>
       <p:sp>
         <p:nvSpPr>
@@ -12518,7 +12898,7 @@
           <a:bodyPr wrap="square" lIns="0" tIns="0" rIns="0" bIns="0" rtlCol="0" anchor="ctr"/>
           <a:lstStyle/>
           <a:p>
-            <a:pPr indent="0" marL="0">
+            <a:pPr marL="0" indent="0">
               <a:buNone/>
             </a:pPr>
             <a:r>
@@ -12557,7 +12937,7 @@
           <a:bodyPr wrap="square" lIns="0" tIns="0" rIns="0" bIns="0" rtlCol="0" anchor="ctr"/>
           <a:lstStyle/>
           <a:p>
-            <a:pPr algn="r" indent="0" marL="0">
+            <a:pPr marL="0" indent="0" algn="r">
               <a:buNone/>
             </a:pPr>
             <a:r>
@@ -12594,6 +12974,13 @@
           </a:solidFill>
           <a:ln/>
         </p:spPr>
+        <p:txBody>
+          <a:bodyPr/>
+          <a:lstStyle/>
+          <a:p>
+            <a:endParaRPr lang="en-US"/>
+          </a:p>
+        </p:txBody>
       </p:sp>
       <p:sp>
         <p:nvSpPr>
@@ -12616,7 +13003,7 @@
           <a:bodyPr wrap="square" lIns="0" tIns="0" rIns="0" bIns="0" rtlCol="0" anchor="ctr"/>
           <a:lstStyle/>
           <a:p>
-            <a:pPr indent="0" marL="0">
+            <a:pPr marL="0" indent="0">
               <a:buNone/>
             </a:pPr>
             <a:r>
@@ -12658,6 +13045,13 @@
             <a:prstDash val="solid"/>
           </a:ln>
         </p:spPr>
+        <p:txBody>
+          <a:bodyPr/>
+          <a:lstStyle/>
+          <a:p>
+            <a:endParaRPr lang="en-US"/>
+          </a:p>
+        </p:txBody>
       </p:sp>
       <p:sp>
         <p:nvSpPr>
@@ -12678,6 +13072,13 @@
           </a:solidFill>
           <a:ln/>
         </p:spPr>
+        <p:txBody>
+          <a:bodyPr/>
+          <a:lstStyle/>
+          <a:p>
+            <a:endParaRPr lang="en-US"/>
+          </a:p>
+        </p:txBody>
       </p:sp>
       <p:sp>
         <p:nvSpPr>
@@ -12700,7 +13101,7 @@
           <a:bodyPr wrap="square" lIns="0" tIns="0" rIns="0" bIns="0" rtlCol="0" anchor="ctr"/>
           <a:lstStyle/>
           <a:p>
-            <a:pPr indent="0" marL="0">
+            <a:pPr marL="0" indent="0">
               <a:buNone/>
             </a:pPr>
             <a:r>
@@ -12739,7 +13140,7 @@
           <a:bodyPr wrap="square" lIns="0" tIns="0" rIns="0" bIns="0" rtlCol="0" anchor="ctr"/>
           <a:lstStyle/>
           <a:p>
-            <a:pPr indent="0" marL="0">
+            <a:pPr marL="0" indent="0">
               <a:buNone/>
             </a:pPr>
             <a:r>
@@ -12781,6 +13182,13 @@
             <a:prstDash val="solid"/>
           </a:ln>
         </p:spPr>
+        <p:txBody>
+          <a:bodyPr/>
+          <a:lstStyle/>
+          <a:p>
+            <a:endParaRPr lang="en-US"/>
+          </a:p>
+        </p:txBody>
       </p:sp>
       <p:sp>
         <p:nvSpPr>
@@ -12801,6 +13209,13 @@
           </a:solidFill>
           <a:ln/>
         </p:spPr>
+        <p:txBody>
+          <a:bodyPr/>
+          <a:lstStyle/>
+          <a:p>
+            <a:endParaRPr lang="en-US"/>
+          </a:p>
+        </p:txBody>
       </p:sp>
       <p:sp>
         <p:nvSpPr>
@@ -12823,7 +13238,7 @@
           <a:bodyPr wrap="square" lIns="0" tIns="0" rIns="0" bIns="0" rtlCol="0" anchor="ctr"/>
           <a:lstStyle/>
           <a:p>
-            <a:pPr indent="0" marL="0">
+            <a:pPr marL="0" indent="0">
               <a:buNone/>
             </a:pPr>
             <a:r>
@@ -12862,7 +13277,7 @@
           <a:bodyPr wrap="square" lIns="0" tIns="0" rIns="0" bIns="0" rtlCol="0" anchor="ctr"/>
           <a:lstStyle/>
           <a:p>
-            <a:pPr indent="0" marL="0">
+            <a:pPr marL="0" indent="0">
               <a:buNone/>
             </a:pPr>
             <a:r>
@@ -12904,6 +13319,13 @@
             <a:prstDash val="solid"/>
           </a:ln>
         </p:spPr>
+        <p:txBody>
+          <a:bodyPr/>
+          <a:lstStyle/>
+          <a:p>
+            <a:endParaRPr lang="en-US"/>
+          </a:p>
+        </p:txBody>
       </p:sp>
       <p:sp>
         <p:nvSpPr>
@@ -12924,6 +13346,13 @@
           </a:solidFill>
           <a:ln/>
         </p:spPr>
+        <p:txBody>
+          <a:bodyPr/>
+          <a:lstStyle/>
+          <a:p>
+            <a:endParaRPr lang="en-US"/>
+          </a:p>
+        </p:txBody>
       </p:sp>
       <p:sp>
         <p:nvSpPr>
@@ -12946,7 +13375,7 @@
           <a:bodyPr wrap="square" lIns="0" tIns="0" rIns="0" bIns="0" rtlCol="0" anchor="ctr"/>
           <a:lstStyle/>
           <a:p>
-            <a:pPr indent="0" marL="0">
+            <a:pPr marL="0" indent="0">
               <a:buNone/>
             </a:pPr>
             <a:r>
@@ -12985,7 +13414,7 @@
           <a:bodyPr wrap="square" lIns="0" tIns="0" rIns="0" bIns="0" rtlCol="0" anchor="ctr"/>
           <a:lstStyle/>
           <a:p>
-            <a:pPr indent="0" marL="0">
+            <a:pPr marL="0" indent="0">
               <a:buNone/>
             </a:pPr>
             <a:r>
@@ -13022,6 +13451,13 @@
           </a:solidFill>
           <a:ln/>
         </p:spPr>
+        <p:txBody>
+          <a:bodyPr/>
+          <a:lstStyle/>
+          <a:p>
+            <a:endParaRPr lang="en-US"/>
+          </a:p>
+        </p:txBody>
       </p:sp>
       <p:sp>
         <p:nvSpPr>
@@ -13044,7 +13480,7 @@
           <a:bodyPr wrap="square" lIns="0" tIns="0" rIns="0" bIns="0" rtlCol="0" anchor="ctr"/>
           <a:lstStyle/>
           <a:p>
-            <a:pPr indent="0" marL="0">
+            <a:pPr marL="0" indent="0">
               <a:buNone/>
             </a:pPr>
             <a:r>
@@ -13108,7 +13544,7 @@
           <a:bodyPr wrap="square" lIns="0" tIns="0" rIns="0" bIns="0" rtlCol="0" anchor="ctr"/>
           <a:lstStyle/>
           <a:p>
-            <a:pPr indent="0" marL="0">
+            <a:pPr marL="0" indent="0">
               <a:buNone/>
             </a:pPr>
             <a:r>
@@ -13145,6 +13581,13 @@
           </a:solidFill>
           <a:ln/>
         </p:spPr>
+        <p:txBody>
+          <a:bodyPr/>
+          <a:lstStyle/>
+          <a:p>
+            <a:endParaRPr lang="en-US"/>
+          </a:p>
+        </p:txBody>
       </p:sp>
       <p:sp>
         <p:nvSpPr>
@@ -13167,7 +13610,7 @@
           <a:bodyPr wrap="square" lIns="0" tIns="0" rIns="0" bIns="0" rtlCol="0" anchor="ctr"/>
           <a:lstStyle/>
           <a:p>
-            <a:pPr indent="0" marL="0">
+            <a:pPr marL="0" indent="0">
               <a:buNone/>
             </a:pPr>
             <a:r>
@@ -13206,7 +13649,7 @@
           <a:bodyPr wrap="square" lIns="0" tIns="0" rIns="0" bIns="0" rtlCol="0" anchor="ctr"/>
           <a:lstStyle/>
           <a:p>
-            <a:pPr algn="r" indent="0" marL="0">
+            <a:pPr marL="0" indent="0" algn="r">
               <a:buNone/>
             </a:pPr>
             <a:r>
@@ -13245,7 +13688,7 @@
           <a:bodyPr wrap="square" lIns="0" tIns="0" rIns="0" bIns="0" rtlCol="0" anchor="ctr"/>
           <a:lstStyle/>
           <a:p>
-            <a:pPr indent="0" marL="0">
+            <a:pPr marL="0" indent="0">
               <a:buNone/>
             </a:pPr>
             <a:r>
@@ -13287,6 +13730,13 @@
             <a:prstDash val="solid"/>
           </a:ln>
         </p:spPr>
+        <p:txBody>
+          <a:bodyPr/>
+          <a:lstStyle/>
+          <a:p>
+            <a:endParaRPr lang="en-US"/>
+          </a:p>
+        </p:txBody>
       </p:sp>
       <p:sp>
         <p:nvSpPr>
@@ -13307,6 +13757,13 @@
           </a:solidFill>
           <a:ln/>
         </p:spPr>
+        <p:txBody>
+          <a:bodyPr/>
+          <a:lstStyle/>
+          <a:p>
+            <a:endParaRPr lang="en-US"/>
+          </a:p>
+        </p:txBody>
       </p:sp>
       <p:sp>
         <p:nvSpPr>
@@ -13327,6 +13784,13 @@
           </a:solidFill>
           <a:ln/>
         </p:spPr>
+        <p:txBody>
+          <a:bodyPr/>
+          <a:lstStyle/>
+          <a:p>
+            <a:endParaRPr lang="en-US"/>
+          </a:p>
+        </p:txBody>
       </p:sp>
       <p:sp>
         <p:nvSpPr>
@@ -13349,7 +13813,7 @@
           <a:bodyPr wrap="square" lIns="0" tIns="0" rIns="0" bIns="0" rtlCol="0" anchor="ctr"/>
           <a:lstStyle/>
           <a:p>
-            <a:pPr algn="ctr" indent="0" marL="0">
+            <a:pPr marL="0" indent="0" algn="ctr">
               <a:buNone/>
             </a:pPr>
             <a:r>
@@ -13388,7 +13852,7 @@
           <a:bodyPr wrap="square" lIns="0" tIns="0" rIns="0" bIns="0" rtlCol="0" anchor="ctr"/>
           <a:lstStyle/>
           <a:p>
-            <a:pPr indent="0" marL="0">
+            <a:pPr marL="0" indent="0">
               <a:buNone/>
             </a:pPr>
             <a:r>
@@ -13427,7 +13891,7 @@
           <a:bodyPr wrap="square" lIns="0" tIns="0" rIns="0" bIns="0" rtlCol="0" anchor="ctr"/>
           <a:lstStyle/>
           <a:p>
-            <a:pPr indent="0" marL="0">
+            <a:pPr marL="0" indent="0">
               <a:buNone/>
             </a:pPr>
             <a:r>
@@ -13466,7 +13930,7 @@
           <a:bodyPr wrap="square" lIns="0" tIns="0" rIns="0" bIns="0" rtlCol="0" anchor="ctr"/>
           <a:lstStyle/>
           <a:p>
-            <a:pPr indent="0" marL="0">
+            <a:pPr marL="0" indent="0">
               <a:buNone/>
             </a:pPr>
             <a:r>
@@ -13508,6 +13972,13 @@
             <a:prstDash val="solid"/>
           </a:ln>
         </p:spPr>
+        <p:txBody>
+          <a:bodyPr/>
+          <a:lstStyle/>
+          <a:p>
+            <a:endParaRPr lang="en-US"/>
+          </a:p>
+        </p:txBody>
       </p:sp>
       <p:sp>
         <p:nvSpPr>
@@ -13528,6 +13999,13 @@
           </a:solidFill>
           <a:ln/>
         </p:spPr>
+        <p:txBody>
+          <a:bodyPr/>
+          <a:lstStyle/>
+          <a:p>
+            <a:endParaRPr lang="en-US"/>
+          </a:p>
+        </p:txBody>
       </p:sp>
       <p:sp>
         <p:nvSpPr>
@@ -13548,6 +14026,13 @@
           </a:solidFill>
           <a:ln/>
         </p:spPr>
+        <p:txBody>
+          <a:bodyPr/>
+          <a:lstStyle/>
+          <a:p>
+            <a:endParaRPr lang="en-US"/>
+          </a:p>
+        </p:txBody>
       </p:sp>
       <p:sp>
         <p:nvSpPr>
@@ -13570,7 +14055,7 @@
           <a:bodyPr wrap="square" lIns="0" tIns="0" rIns="0" bIns="0" rtlCol="0" anchor="ctr"/>
           <a:lstStyle/>
           <a:p>
-            <a:pPr algn="ctr" indent="0" marL="0">
+            <a:pPr marL="0" indent="0" algn="ctr">
               <a:buNone/>
             </a:pPr>
             <a:r>
@@ -13609,7 +14094,7 @@
           <a:bodyPr wrap="square" lIns="0" tIns="0" rIns="0" bIns="0" rtlCol="0" anchor="ctr"/>
           <a:lstStyle/>
           <a:p>
-            <a:pPr indent="0" marL="0">
+            <a:pPr marL="0" indent="0">
               <a:buNone/>
             </a:pPr>
             <a:r>
@@ -13648,7 +14133,7 @@
           <a:bodyPr wrap="square" lIns="0" tIns="0" rIns="0" bIns="0" rtlCol="0" anchor="ctr"/>
           <a:lstStyle/>
           <a:p>
-            <a:pPr indent="0" marL="0">
+            <a:pPr marL="0" indent="0">
               <a:buNone/>
             </a:pPr>
             <a:r>
@@ -13687,7 +14172,7 @@
           <a:bodyPr wrap="square" lIns="0" tIns="0" rIns="0" bIns="0" rtlCol="0" anchor="ctr"/>
           <a:lstStyle/>
           <a:p>
-            <a:pPr indent="0" marL="0">
+            <a:pPr marL="0" indent="0">
               <a:buNone/>
             </a:pPr>
             <a:r>
@@ -13729,6 +14214,13 @@
             <a:prstDash val="solid"/>
           </a:ln>
         </p:spPr>
+        <p:txBody>
+          <a:bodyPr/>
+          <a:lstStyle/>
+          <a:p>
+            <a:endParaRPr lang="en-US"/>
+          </a:p>
+        </p:txBody>
       </p:sp>
       <p:sp>
         <p:nvSpPr>
@@ -13749,6 +14241,13 @@
           </a:solidFill>
           <a:ln/>
         </p:spPr>
+        <p:txBody>
+          <a:bodyPr/>
+          <a:lstStyle/>
+          <a:p>
+            <a:endParaRPr lang="en-US"/>
+          </a:p>
+        </p:txBody>
       </p:sp>
       <p:sp>
         <p:nvSpPr>
@@ -13769,6 +14268,13 @@
           </a:solidFill>
           <a:ln/>
         </p:spPr>
+        <p:txBody>
+          <a:bodyPr/>
+          <a:lstStyle/>
+          <a:p>
+            <a:endParaRPr lang="en-US"/>
+          </a:p>
+        </p:txBody>
       </p:sp>
       <p:sp>
         <p:nvSpPr>
@@ -13791,7 +14297,7 @@
           <a:bodyPr wrap="square" lIns="0" tIns="0" rIns="0" bIns="0" rtlCol="0" anchor="ctr"/>
           <a:lstStyle/>
           <a:p>
-            <a:pPr algn="ctr" indent="0" marL="0">
+            <a:pPr marL="0" indent="0" algn="ctr">
               <a:buNone/>
             </a:pPr>
             <a:r>
@@ -13830,7 +14336,7 @@
           <a:bodyPr wrap="square" lIns="0" tIns="0" rIns="0" bIns="0" rtlCol="0" anchor="ctr"/>
           <a:lstStyle/>
           <a:p>
-            <a:pPr indent="0" marL="0">
+            <a:pPr marL="0" indent="0">
               <a:buNone/>
             </a:pPr>
             <a:r>
@@ -13869,7 +14375,7 @@
           <a:bodyPr wrap="square" lIns="0" tIns="0" rIns="0" bIns="0" rtlCol="0" anchor="ctr"/>
           <a:lstStyle/>
           <a:p>
-            <a:pPr indent="0" marL="0">
+            <a:pPr marL="0" indent="0">
               <a:buNone/>
             </a:pPr>
             <a:r>
@@ -13908,7 +14414,7 @@
           <a:bodyPr wrap="square" lIns="0" tIns="0" rIns="0" bIns="0" rtlCol="0" anchor="ctr"/>
           <a:lstStyle/>
           <a:p>
-            <a:pPr indent="0" marL="0">
+            <a:pPr marL="0" indent="0">
               <a:buNone/>
             </a:pPr>
             <a:r>
@@ -13950,6 +14456,13 @@
             <a:prstDash val="solid"/>
           </a:ln>
         </p:spPr>
+        <p:txBody>
+          <a:bodyPr/>
+          <a:lstStyle/>
+          <a:p>
+            <a:endParaRPr lang="en-US"/>
+          </a:p>
+        </p:txBody>
       </p:sp>
       <p:sp>
         <p:nvSpPr>
@@ -13970,6 +14483,13 @@
           </a:solidFill>
           <a:ln/>
         </p:spPr>
+        <p:txBody>
+          <a:bodyPr/>
+          <a:lstStyle/>
+          <a:p>
+            <a:endParaRPr lang="en-US"/>
+          </a:p>
+        </p:txBody>
       </p:sp>
       <p:sp>
         <p:nvSpPr>
@@ -13990,6 +14510,13 @@
           </a:solidFill>
           <a:ln/>
         </p:spPr>
+        <p:txBody>
+          <a:bodyPr/>
+          <a:lstStyle/>
+          <a:p>
+            <a:endParaRPr lang="en-US"/>
+          </a:p>
+        </p:txBody>
       </p:sp>
       <p:sp>
         <p:nvSpPr>
@@ -14012,7 +14539,7 @@
           <a:bodyPr wrap="square" lIns="0" tIns="0" rIns="0" bIns="0" rtlCol="0" anchor="ctr"/>
           <a:lstStyle/>
           <a:p>
-            <a:pPr algn="ctr" indent="0" marL="0">
+            <a:pPr marL="0" indent="0" algn="ctr">
               <a:buNone/>
             </a:pPr>
             <a:r>
@@ -14051,7 +14578,7 @@
           <a:bodyPr wrap="square" lIns="0" tIns="0" rIns="0" bIns="0" rtlCol="0" anchor="ctr"/>
           <a:lstStyle/>
           <a:p>
-            <a:pPr indent="0" marL="0">
+            <a:pPr marL="0" indent="0">
               <a:buNone/>
             </a:pPr>
             <a:r>
@@ -14090,7 +14617,7 @@
           <a:bodyPr wrap="square" lIns="0" tIns="0" rIns="0" bIns="0" rtlCol="0" anchor="ctr"/>
           <a:lstStyle/>
           <a:p>
-            <a:pPr indent="0" marL="0">
+            <a:pPr marL="0" indent="0">
               <a:buNone/>
             </a:pPr>
             <a:r>
@@ -14129,7 +14656,7 @@
           <a:bodyPr wrap="square" lIns="0" tIns="0" rIns="0" bIns="0" rtlCol="0" anchor="ctr"/>
           <a:lstStyle/>
           <a:p>
-            <a:pPr indent="0" marL="0">
+            <a:pPr marL="0" indent="0">
               <a:buNone/>
             </a:pPr>
             <a:r>
@@ -14193,7 +14720,7 @@
           <a:bodyPr wrap="square" lIns="0" tIns="0" rIns="0" bIns="0" rtlCol="0" anchor="ctr"/>
           <a:lstStyle/>
           <a:p>
-            <a:pPr indent="0" marL="0">
+            <a:pPr marL="0" indent="0">
               <a:buNone/>
             </a:pPr>
             <a:r>
@@ -14230,6 +14757,13 @@
           </a:solidFill>
           <a:ln/>
         </p:spPr>
+        <p:txBody>
+          <a:bodyPr/>
+          <a:lstStyle/>
+          <a:p>
+            <a:endParaRPr lang="en-US"/>
+          </a:p>
+        </p:txBody>
       </p:sp>
       <p:sp>
         <p:nvSpPr>
@@ -14252,7 +14786,7 @@
           <a:bodyPr wrap="square" lIns="0" tIns="0" rIns="0" bIns="0" rtlCol="0" anchor="ctr"/>
           <a:lstStyle/>
           <a:p>
-            <a:pPr indent="0" marL="0">
+            <a:pPr marL="0" indent="0">
               <a:buNone/>
             </a:pPr>
             <a:r>
@@ -14291,7 +14825,7 @@
           <a:bodyPr wrap="square" lIns="0" tIns="0" rIns="0" bIns="0" rtlCol="0" anchor="ctr"/>
           <a:lstStyle/>
           <a:p>
-            <a:pPr algn="r" indent="0" marL="0">
+            <a:pPr marL="0" indent="0" algn="r">
               <a:buNone/>
             </a:pPr>
             <a:r>
@@ -14333,6 +14867,13 @@
             <a:prstDash val="solid"/>
           </a:ln>
         </p:spPr>
+        <p:txBody>
+          <a:bodyPr/>
+          <a:lstStyle/>
+          <a:p>
+            <a:endParaRPr lang="en-US"/>
+          </a:p>
+        </p:txBody>
       </p:sp>
       <p:sp>
         <p:nvSpPr>
@@ -14353,6 +14894,13 @@
           </a:solidFill>
           <a:ln/>
         </p:spPr>
+        <p:txBody>
+          <a:bodyPr/>
+          <a:lstStyle/>
+          <a:p>
+            <a:endParaRPr lang="en-US"/>
+          </a:p>
+        </p:txBody>
       </p:sp>
       <p:sp>
         <p:nvSpPr>
@@ -14375,7 +14923,7 @@
           <a:bodyPr wrap="square" lIns="0" tIns="0" rIns="0" bIns="0" rtlCol="0" anchor="ctr"/>
           <a:lstStyle/>
           <a:p>
-            <a:pPr indent="0" marL="0">
+            <a:pPr marL="0" indent="0">
               <a:buNone/>
             </a:pPr>
             <a:r>
@@ -14414,7 +14962,7 @@
           <a:bodyPr wrap="square" lIns="0" tIns="0" rIns="0" bIns="0" rtlCol="0" anchor="ctr"/>
           <a:lstStyle/>
           <a:p>
-            <a:pPr indent="0" marL="0">
+            <a:pPr marL="0" indent="0">
               <a:buNone/>
             </a:pPr>
             <a:r>
@@ -14431,7 +14979,7 @@
             <a:endParaRPr lang="en-US" sz="1300" dirty="0"/>
           </a:p>
           <a:p>
-            <a:pPr indent="0" marL="0">
+            <a:pPr marL="0" indent="0">
               <a:buNone/>
             </a:pPr>
             <a:r>
@@ -14448,7 +14996,7 @@
             <a:endParaRPr lang="en-US" sz="1300" dirty="0"/>
           </a:p>
           <a:p>
-            <a:pPr indent="0" marL="0">
+            <a:pPr marL="0" indent="0">
               <a:buNone/>
             </a:pPr>
             <a:r>
@@ -14465,7 +15013,7 @@
             <a:endParaRPr lang="en-US" sz="1300" dirty="0"/>
           </a:p>
           <a:p>
-            <a:pPr indent="0" marL="0">
+            <a:pPr marL="0" indent="0">
               <a:buNone/>
             </a:pPr>
             <a:r>
@@ -14482,7 +15030,7 @@
             <a:endParaRPr lang="en-US" sz="1300" dirty="0"/>
           </a:p>
           <a:p>
-            <a:pPr indent="0" marL="0">
+            <a:pPr marL="0" indent="0">
               <a:buNone/>
             </a:pPr>
             <a:r>
@@ -14499,7 +15047,7 @@
             <a:endParaRPr lang="en-US" sz="1300" dirty="0"/>
           </a:p>
           <a:p>
-            <a:pPr indent="0" marL="0">
+            <a:pPr marL="0" indent="0">
               <a:buNone/>
             </a:pPr>
             <a:r>
@@ -14541,6 +15089,13 @@
             <a:prstDash val="solid"/>
           </a:ln>
         </p:spPr>
+        <p:txBody>
+          <a:bodyPr/>
+          <a:lstStyle/>
+          <a:p>
+            <a:endParaRPr lang="en-US"/>
+          </a:p>
+        </p:txBody>
       </p:sp>
       <p:sp>
         <p:nvSpPr>
@@ -14561,6 +15116,13 @@
           </a:solidFill>
           <a:ln/>
         </p:spPr>
+        <p:txBody>
+          <a:bodyPr/>
+          <a:lstStyle/>
+          <a:p>
+            <a:endParaRPr lang="en-US"/>
+          </a:p>
+        </p:txBody>
       </p:sp>
       <p:sp>
         <p:nvSpPr>
@@ -14583,7 +15145,7 @@
           <a:bodyPr wrap="square" lIns="0" tIns="0" rIns="0" bIns="0" rtlCol="0" anchor="ctr"/>
           <a:lstStyle/>
           <a:p>
-            <a:pPr indent="0" marL="0">
+            <a:pPr marL="0" indent="0">
               <a:buNone/>
             </a:pPr>
             <a:r>
@@ -14622,7 +15184,7 @@
           <a:bodyPr wrap="square" lIns="0" tIns="0" rIns="0" bIns="0" rtlCol="0" anchor="ctr"/>
           <a:lstStyle/>
           <a:p>
-            <a:pPr indent="0" marL="0">
+            <a:pPr marL="0" indent="0">
               <a:buNone/>
             </a:pPr>
             <a:r>
@@ -14639,7 +15201,7 @@
             <a:endParaRPr lang="en-US" sz="1300" dirty="0"/>
           </a:p>
           <a:p>
-            <a:pPr indent="0" marL="0">
+            <a:pPr marL="0" indent="0">
               <a:buNone/>
             </a:pPr>
             <a:r>
@@ -14656,7 +15218,7 @@
             <a:endParaRPr lang="en-US" sz="1300" dirty="0"/>
           </a:p>
           <a:p>
-            <a:pPr indent="0" marL="0">
+            <a:pPr marL="0" indent="0">
               <a:buNone/>
             </a:pPr>
             <a:r>
@@ -14673,7 +15235,7 @@
             <a:endParaRPr lang="en-US" sz="1300" dirty="0"/>
           </a:p>
           <a:p>
-            <a:pPr indent="0" marL="0">
+            <a:pPr marL="0" indent="0">
               <a:buNone/>
             </a:pPr>
             <a:r>
@@ -14690,7 +15252,7 @@
             <a:endParaRPr lang="en-US" sz="1300" dirty="0"/>
           </a:p>
           <a:p>
-            <a:pPr indent="0" marL="0">
+            <a:pPr marL="0" indent="0">
               <a:buNone/>
             </a:pPr>
             <a:r>
@@ -14727,6 +15289,13 @@
           </a:solidFill>
           <a:ln/>
         </p:spPr>
+        <p:txBody>
+          <a:bodyPr/>
+          <a:lstStyle/>
+          <a:p>
+            <a:endParaRPr lang="en-US"/>
+          </a:p>
+        </p:txBody>
       </p:sp>
       <p:sp>
         <p:nvSpPr>
@@ -14749,7 +15318,7 @@
           <a:bodyPr wrap="square" lIns="0" tIns="0" rIns="0" bIns="0" rtlCol="0" anchor="ctr"/>
           <a:lstStyle/>
           <a:p>
-            <a:pPr indent="0" marL="0">
+            <a:pPr marL="0" indent="0">
               <a:buNone/>
             </a:pPr>
             <a:r>
@@ -14813,7 +15382,7 @@
           <a:bodyPr wrap="square" lIns="0" tIns="0" rIns="0" bIns="0" rtlCol="0" anchor="ctr"/>
           <a:lstStyle/>
           <a:p>
-            <a:pPr indent="0" marL="0">
+            <a:pPr marL="0" indent="0">
               <a:buNone/>
             </a:pPr>
             <a:r>
@@ -14850,6 +15419,13 @@
           </a:solidFill>
           <a:ln/>
         </p:spPr>
+        <p:txBody>
+          <a:bodyPr/>
+          <a:lstStyle/>
+          <a:p>
+            <a:endParaRPr lang="en-US"/>
+          </a:p>
+        </p:txBody>
       </p:sp>
       <p:sp>
         <p:nvSpPr>
@@ -14872,7 +15448,7 @@
           <a:bodyPr wrap="square" lIns="0" tIns="0" rIns="0" bIns="0" rtlCol="0" anchor="ctr"/>
           <a:lstStyle/>
           <a:p>
-            <a:pPr indent="0" marL="0">
+            <a:pPr marL="0" indent="0">
               <a:buNone/>
             </a:pPr>
             <a:r>
@@ -14911,7 +15487,7 @@
           <a:bodyPr wrap="square" lIns="0" tIns="0" rIns="0" bIns="0" rtlCol="0" anchor="ctr"/>
           <a:lstStyle/>
           <a:p>
-            <a:pPr algn="r" indent="0" marL="0">
+            <a:pPr marL="0" indent="0" algn="r">
               <a:buNone/>
             </a:pPr>
             <a:r>
@@ -14948,6 +15524,13 @@
           </a:solidFill>
           <a:ln/>
         </p:spPr>
+        <p:txBody>
+          <a:bodyPr/>
+          <a:lstStyle/>
+          <a:p>
+            <a:endParaRPr lang="en-US"/>
+          </a:p>
+        </p:txBody>
       </p:sp>
       <p:sp>
         <p:nvSpPr>
@@ -14970,7 +15553,7 @@
           <a:bodyPr wrap="square" lIns="0" tIns="0" rIns="0" bIns="0" rtlCol="0" anchor="ctr"/>
           <a:lstStyle/>
           <a:p>
-            <a:pPr indent="0" marL="0">
+            <a:pPr marL="0" indent="0">
               <a:buNone/>
             </a:pPr>
             <a:r>
@@ -15009,7 +15592,7 @@
           <a:bodyPr wrap="square" lIns="0" tIns="0" rIns="0" bIns="0" rtlCol="0" anchor="ctr"/>
           <a:lstStyle/>
           <a:p>
-            <a:pPr indent="0" marL="0">
+            <a:pPr marL="0" indent="0">
               <a:buNone/>
             </a:pPr>
             <a:r>
@@ -15048,7 +15631,7 @@
           <a:bodyPr wrap="square" lIns="0" tIns="0" rIns="0" bIns="0" rtlCol="0" anchor="ctr"/>
           <a:lstStyle/>
           <a:p>
-            <a:pPr indent="0" marL="0">
+            <a:pPr marL="0" indent="0">
               <a:buNone/>
             </a:pPr>
             <a:r>
@@ -15087,7 +15670,7 @@
           <a:bodyPr wrap="square" lIns="0" tIns="0" rIns="0" bIns="0" rtlCol="0" anchor="ctr"/>
           <a:lstStyle/>
           <a:p>
-            <a:pPr indent="0" marL="0">
+            <a:pPr marL="0" indent="0">
               <a:buNone/>
             </a:pPr>
             <a:r>
@@ -15126,7 +15709,7 @@
           <a:bodyPr wrap="square" lIns="0" tIns="0" rIns="0" bIns="0" rtlCol="0" anchor="ctr"/>
           <a:lstStyle/>
           <a:p>
-            <a:pPr indent="0" marL="0">
+            <a:pPr marL="0" indent="0">
               <a:buNone/>
             </a:pPr>
             <a:r>
@@ -15165,7 +15748,7 @@
           <a:bodyPr wrap="square" lIns="0" tIns="0" rIns="0" bIns="0" rtlCol="0" anchor="ctr"/>
           <a:lstStyle/>
           <a:p>
-            <a:pPr indent="0" marL="0">
+            <a:pPr marL="0" indent="0">
               <a:buNone/>
             </a:pPr>
             <a:r>
@@ -15204,7 +15787,7 @@
           <a:bodyPr wrap="square" lIns="0" tIns="0" rIns="0" bIns="0" rtlCol="0" anchor="ctr"/>
           <a:lstStyle/>
           <a:p>
-            <a:pPr indent="0" marL="0">
+            <a:pPr marL="0" indent="0">
               <a:buNone/>
             </a:pPr>
             <a:r>
@@ -15243,7 +15826,7 @@
           <a:bodyPr wrap="square" lIns="0" tIns="0" rIns="0" bIns="0" rtlCol="0" anchor="ctr"/>
           <a:lstStyle/>
           <a:p>
-            <a:pPr indent="0" marL="0">
+            <a:pPr marL="0" indent="0">
               <a:buNone/>
             </a:pPr>
             <a:r>
@@ -15282,7 +15865,7 @@
           <a:bodyPr wrap="square" lIns="0" tIns="0" rIns="0" bIns="0" rtlCol="0" anchor="ctr"/>
           <a:lstStyle/>
           <a:p>
-            <a:pPr indent="0" marL="0">
+            <a:pPr marL="0" indent="0">
               <a:buNone/>
             </a:pPr>
             <a:r>
@@ -15321,7 +15904,7 @@
           <a:bodyPr wrap="square" lIns="0" tIns="0" rIns="0" bIns="0" rtlCol="0" anchor="ctr"/>
           <a:lstStyle/>
           <a:p>
-            <a:pPr indent="0" marL="0">
+            <a:pPr marL="0" indent="0">
               <a:buNone/>
             </a:pPr>
             <a:r>
@@ -15360,7 +15943,7 @@
           <a:bodyPr wrap="square" lIns="0" tIns="0" rIns="0" bIns="0" rtlCol="0" anchor="ctr"/>
           <a:lstStyle/>
           <a:p>
-            <a:pPr indent="0" marL="0">
+            <a:pPr marL="0" indent="0">
               <a:buNone/>
             </a:pPr>
             <a:r>
@@ -15399,7 +15982,7 @@
           <a:bodyPr wrap="square" lIns="0" tIns="0" rIns="0" bIns="0" rtlCol="0" anchor="ctr"/>
           <a:lstStyle/>
           <a:p>
-            <a:pPr indent="0" marL="0">
+            <a:pPr marL="0" indent="0">
               <a:buNone/>
             </a:pPr>
             <a:r>
@@ -15438,7 +16021,7 @@
           <a:bodyPr wrap="square" lIns="0" tIns="0" rIns="0" bIns="0" rtlCol="0" anchor="ctr"/>
           <a:lstStyle/>
           <a:p>
-            <a:pPr indent="0" marL="0">
+            <a:pPr marL="0" indent="0">
               <a:buNone/>
             </a:pPr>
             <a:r>
@@ -15477,7 +16060,7 @@
           <a:bodyPr wrap="square" lIns="0" tIns="0" rIns="0" bIns="0" rtlCol="0" anchor="ctr"/>
           <a:lstStyle/>
           <a:p>
-            <a:pPr indent="0" marL="0">
+            <a:pPr marL="0" indent="0">
               <a:buNone/>
             </a:pPr>
             <a:r>
@@ -15516,7 +16099,7 @@
           <a:bodyPr wrap="square" lIns="0" tIns="0" rIns="0" bIns="0" rtlCol="0" anchor="ctr"/>
           <a:lstStyle/>
           <a:p>
-            <a:pPr indent="0" marL="0">
+            <a:pPr marL="0" indent="0">
               <a:buNone/>
             </a:pPr>
             <a:r>
@@ -15553,6 +16136,13 @@
           </a:solidFill>
           <a:ln/>
         </p:spPr>
+        <p:txBody>
+          <a:bodyPr/>
+          <a:lstStyle/>
+          <a:p>
+            <a:endParaRPr lang="en-US"/>
+          </a:p>
+        </p:txBody>
       </p:sp>
       <p:sp>
         <p:nvSpPr>
@@ -15575,7 +16165,7 @@
           <a:bodyPr wrap="square" lIns="0" tIns="0" rIns="0" bIns="0" rtlCol="0" anchor="ctr"/>
           <a:lstStyle/>
           <a:p>
-            <a:pPr indent="0" marL="0">
+            <a:pPr marL="0" indent="0">
               <a:buNone/>
             </a:pPr>
             <a:r>
@@ -15639,7 +16229,7 @@
           <a:bodyPr wrap="square" lIns="0" tIns="0" rIns="0" bIns="0" rtlCol="0" anchor="ctr"/>
           <a:lstStyle/>
           <a:p>
-            <a:pPr indent="0" marL="0">
+            <a:pPr marL="0" indent="0">
               <a:buNone/>
             </a:pPr>
             <a:r>
@@ -15676,6 +16266,13 @@
           </a:solidFill>
           <a:ln/>
         </p:spPr>
+        <p:txBody>
+          <a:bodyPr/>
+          <a:lstStyle/>
+          <a:p>
+            <a:endParaRPr lang="en-US"/>
+          </a:p>
+        </p:txBody>
       </p:sp>
       <p:sp>
         <p:nvSpPr>
@@ -15698,7 +16295,7 @@
           <a:bodyPr wrap="square" lIns="0" tIns="0" rIns="0" bIns="0" rtlCol="0" anchor="ctr"/>
           <a:lstStyle/>
           <a:p>
-            <a:pPr indent="0" marL="0">
+            <a:pPr marL="0" indent="0">
               <a:buNone/>
             </a:pPr>
             <a:r>
@@ -15737,7 +16334,7 @@
           <a:bodyPr wrap="square" lIns="0" tIns="0" rIns="0" bIns="0" rtlCol="0" anchor="ctr"/>
           <a:lstStyle/>
           <a:p>
-            <a:pPr algn="r" indent="0" marL="0">
+            <a:pPr marL="0" indent="0" algn="r">
               <a:buNone/>
             </a:pPr>
             <a:r>
@@ -15776,7 +16373,7 @@
           <a:bodyPr wrap="square" lIns="0" tIns="0" rIns="0" bIns="0" rtlCol="0" anchor="ctr"/>
           <a:lstStyle/>
           <a:p>
-            <a:pPr indent="0" marL="0">
+            <a:pPr marL="0" indent="0">
               <a:buNone/>
             </a:pPr>
             <a:r>
@@ -15818,6 +16415,13 @@
             <a:prstDash val="solid"/>
           </a:ln>
         </p:spPr>
+        <p:txBody>
+          <a:bodyPr/>
+          <a:lstStyle/>
+          <a:p>
+            <a:endParaRPr lang="en-US"/>
+          </a:p>
+        </p:txBody>
       </p:sp>
       <p:sp>
         <p:nvSpPr>
@@ -15838,6 +16442,13 @@
           </a:solidFill>
           <a:ln/>
         </p:spPr>
+        <p:txBody>
+          <a:bodyPr/>
+          <a:lstStyle/>
+          <a:p>
+            <a:endParaRPr lang="en-US"/>
+          </a:p>
+        </p:txBody>
       </p:sp>
       <p:sp>
         <p:nvSpPr>
@@ -15860,7 +16471,7 @@
           <a:bodyPr wrap="square" lIns="0" tIns="0" rIns="0" bIns="0" rtlCol="0" anchor="ctr"/>
           <a:lstStyle/>
           <a:p>
-            <a:pPr indent="0" marL="0">
+            <a:pPr marL="0" indent="0">
               <a:buNone/>
             </a:pPr>
             <a:r>
@@ -15899,7 +16510,7 @@
           <a:bodyPr wrap="square" lIns="0" tIns="0" rIns="0" bIns="0" rtlCol="0" anchor="ctr"/>
           <a:lstStyle/>
           <a:p>
-            <a:pPr indent="0" marL="0">
+            <a:pPr marL="0" indent="0">
               <a:buNone/>
             </a:pPr>
             <a:r>
@@ -15938,7 +16549,7 @@
           <a:bodyPr wrap="square" lIns="0" tIns="0" rIns="0" bIns="0" rtlCol="0" anchor="ctr"/>
           <a:lstStyle/>
           <a:p>
-            <a:pPr indent="0" marL="0">
+            <a:pPr marL="0" indent="0">
               <a:buNone/>
             </a:pPr>
             <a:r>
@@ -15980,6 +16591,13 @@
             <a:prstDash val="solid"/>
           </a:ln>
         </p:spPr>
+        <p:txBody>
+          <a:bodyPr/>
+          <a:lstStyle/>
+          <a:p>
+            <a:endParaRPr lang="en-US"/>
+          </a:p>
+        </p:txBody>
       </p:sp>
       <p:sp>
         <p:nvSpPr>
@@ -16000,6 +16618,13 @@
           </a:solidFill>
           <a:ln/>
         </p:spPr>
+        <p:txBody>
+          <a:bodyPr/>
+          <a:lstStyle/>
+          <a:p>
+            <a:endParaRPr lang="en-US"/>
+          </a:p>
+        </p:txBody>
       </p:sp>
       <p:sp>
         <p:nvSpPr>
@@ -16022,7 +16647,7 @@
           <a:bodyPr wrap="square" lIns="0" tIns="0" rIns="0" bIns="0" rtlCol="0" anchor="ctr"/>
           <a:lstStyle/>
           <a:p>
-            <a:pPr indent="0" marL="0">
+            <a:pPr marL="0" indent="0">
               <a:buNone/>
             </a:pPr>
             <a:r>
@@ -16061,7 +16686,7 @@
           <a:bodyPr wrap="square" lIns="0" tIns="0" rIns="0" bIns="0" rtlCol="0" anchor="ctr"/>
           <a:lstStyle/>
           <a:p>
-            <a:pPr indent="0" marL="0">
+            <a:pPr marL="0" indent="0">
               <a:buNone/>
             </a:pPr>
             <a:r>
@@ -16100,7 +16725,7 @@
           <a:bodyPr wrap="square" lIns="0" tIns="0" rIns="0" bIns="0" rtlCol="0" anchor="ctr"/>
           <a:lstStyle/>
           <a:p>
-            <a:pPr indent="0" marL="0">
+            <a:pPr marL="0" indent="0">
               <a:buNone/>
             </a:pPr>
             <a:r>
@@ -16142,6 +16767,13 @@
             <a:prstDash val="solid"/>
           </a:ln>
         </p:spPr>
+        <p:txBody>
+          <a:bodyPr/>
+          <a:lstStyle/>
+          <a:p>
+            <a:endParaRPr lang="en-US"/>
+          </a:p>
+        </p:txBody>
       </p:sp>
       <p:sp>
         <p:nvSpPr>
@@ -16162,6 +16794,13 @@
           </a:solidFill>
           <a:ln/>
         </p:spPr>
+        <p:txBody>
+          <a:bodyPr/>
+          <a:lstStyle/>
+          <a:p>
+            <a:endParaRPr lang="en-US"/>
+          </a:p>
+        </p:txBody>
       </p:sp>
       <p:sp>
         <p:nvSpPr>
@@ -16184,7 +16823,7 @@
           <a:bodyPr wrap="square" lIns="0" tIns="0" rIns="0" bIns="0" rtlCol="0" anchor="ctr"/>
           <a:lstStyle/>
           <a:p>
-            <a:pPr indent="0" marL="0">
+            <a:pPr marL="0" indent="0">
               <a:buNone/>
             </a:pPr>
             <a:r>
@@ -16223,7 +16862,7 @@
           <a:bodyPr wrap="square" lIns="0" tIns="0" rIns="0" bIns="0" rtlCol="0" anchor="ctr"/>
           <a:lstStyle/>
           <a:p>
-            <a:pPr indent="0" marL="0">
+            <a:pPr marL="0" indent="0">
               <a:buNone/>
             </a:pPr>
             <a:r>
@@ -16262,7 +16901,7 @@
           <a:bodyPr wrap="square" lIns="0" tIns="0" rIns="0" bIns="0" rtlCol="0" anchor="ctr"/>
           <a:lstStyle/>
           <a:p>
-            <a:pPr indent="0" marL="0">
+            <a:pPr marL="0" indent="0">
               <a:buNone/>
             </a:pPr>
             <a:r>
@@ -16304,6 +16943,13 @@
             <a:prstDash val="solid"/>
           </a:ln>
         </p:spPr>
+        <p:txBody>
+          <a:bodyPr/>
+          <a:lstStyle/>
+          <a:p>
+            <a:endParaRPr lang="en-US"/>
+          </a:p>
+        </p:txBody>
       </p:sp>
       <p:sp>
         <p:nvSpPr>
@@ -16324,6 +16970,13 @@
           </a:solidFill>
           <a:ln/>
         </p:spPr>
+        <p:txBody>
+          <a:bodyPr/>
+          <a:lstStyle/>
+          <a:p>
+            <a:endParaRPr lang="en-US"/>
+          </a:p>
+        </p:txBody>
       </p:sp>
       <p:sp>
         <p:nvSpPr>
@@ -16346,7 +16999,7 @@
           <a:bodyPr wrap="square" lIns="0" tIns="0" rIns="0" bIns="0" rtlCol="0" anchor="ctr"/>
           <a:lstStyle/>
           <a:p>
-            <a:pPr indent="0" marL="0">
+            <a:pPr marL="0" indent="0">
               <a:buNone/>
             </a:pPr>
             <a:r>
@@ -16385,7 +17038,7 @@
           <a:bodyPr wrap="square" lIns="0" tIns="0" rIns="0" bIns="0" rtlCol="0" anchor="ctr"/>
           <a:lstStyle/>
           <a:p>
-            <a:pPr indent="0" marL="0">
+            <a:pPr marL="0" indent="0">
               <a:buNone/>
             </a:pPr>
             <a:r>
@@ -16424,7 +17077,7 @@
           <a:bodyPr wrap="square" lIns="0" tIns="0" rIns="0" bIns="0" rtlCol="0" anchor="ctr"/>
           <a:lstStyle/>
           <a:p>
-            <a:pPr indent="0" marL="0">
+            <a:pPr marL="0" indent="0">
               <a:buNone/>
             </a:pPr>
             <a:r>
@@ -16461,6 +17114,13 @@
           </a:solidFill>
           <a:ln/>
         </p:spPr>
+        <p:txBody>
+          <a:bodyPr/>
+          <a:lstStyle/>
+          <a:p>
+            <a:endParaRPr lang="en-US"/>
+          </a:p>
+        </p:txBody>
       </p:sp>
       <p:sp>
         <p:nvSpPr>
@@ -16483,7 +17143,7 @@
           <a:bodyPr wrap="square" lIns="0" tIns="0" rIns="0" bIns="0" rtlCol="0" anchor="ctr"/>
           <a:lstStyle/>
           <a:p>
-            <a:pPr indent="0" marL="0">
+            <a:pPr marL="0" indent="0">
               <a:buNone/>
             </a:pPr>
             <a:r>
@@ -16547,7 +17207,7 @@
           <a:bodyPr wrap="square" lIns="0" tIns="0" rIns="0" bIns="0" rtlCol="0" anchor="ctr"/>
           <a:lstStyle/>
           <a:p>
-            <a:pPr indent="0" marL="0">
+            <a:pPr marL="0" indent="0">
               <a:buNone/>
             </a:pPr>
             <a:r>
@@ -16584,6 +17244,13 @@
           </a:solidFill>
           <a:ln/>
         </p:spPr>
+        <p:txBody>
+          <a:bodyPr/>
+          <a:lstStyle/>
+          <a:p>
+            <a:endParaRPr lang="en-US"/>
+          </a:p>
+        </p:txBody>
       </p:sp>
       <p:sp>
         <p:nvSpPr>
@@ -16606,7 +17273,7 @@
           <a:bodyPr wrap="square" lIns="0" tIns="0" rIns="0" bIns="0" rtlCol="0" anchor="ctr"/>
           <a:lstStyle/>
           <a:p>
-            <a:pPr indent="0" marL="0">
+            <a:pPr marL="0" indent="0">
               <a:buNone/>
             </a:pPr>
             <a:r>
@@ -16645,7 +17312,7 @@
           <a:bodyPr wrap="square" lIns="0" tIns="0" rIns="0" bIns="0" rtlCol="0" anchor="ctr"/>
           <a:lstStyle/>
           <a:p>
-            <a:pPr algn="r" indent="0" marL="0">
+            <a:pPr marL="0" indent="0" algn="r">
               <a:buNone/>
             </a:pPr>
             <a:r>
@@ -16687,6 +17354,13 @@
             <a:prstDash val="solid"/>
           </a:ln>
         </p:spPr>
+        <p:txBody>
+          <a:bodyPr/>
+          <a:lstStyle/>
+          <a:p>
+            <a:endParaRPr lang="en-US"/>
+          </a:p>
+        </p:txBody>
       </p:sp>
       <p:sp>
         <p:nvSpPr>
@@ -16707,6 +17381,13 @@
           </a:solidFill>
           <a:ln/>
         </p:spPr>
+        <p:txBody>
+          <a:bodyPr/>
+          <a:lstStyle/>
+          <a:p>
+            <a:endParaRPr lang="en-US"/>
+          </a:p>
+        </p:txBody>
       </p:sp>
       <p:sp>
         <p:nvSpPr>
@@ -16729,7 +17410,7 @@
           <a:bodyPr wrap="square" lIns="0" tIns="0" rIns="0" bIns="0" rtlCol="0" anchor="ctr"/>
           <a:lstStyle/>
           <a:p>
-            <a:pPr indent="0" marL="0">
+            <a:pPr marL="0" indent="0">
               <a:buNone/>
             </a:pPr>
             <a:r>
@@ -16746,7 +17427,7 @@
             <a:endParaRPr lang="en-US" sz="1400" dirty="0"/>
           </a:p>
           <a:p>
-            <a:pPr indent="0" marL="0">
+            <a:pPr marL="0" indent="0">
               <a:buNone/>
             </a:pPr>
             <a:r>
@@ -16785,7 +17466,7 @@
           <a:bodyPr wrap="square" lIns="0" tIns="0" rIns="0" bIns="0" rtlCol="0" anchor="ctr"/>
           <a:lstStyle/>
           <a:p>
-            <a:pPr indent="0" marL="0">
+            <a:pPr marL="0" indent="0">
               <a:buNone/>
             </a:pPr>
             <a:r>
@@ -16802,7 +17483,7 @@
             <a:endParaRPr lang="en-US" sz="1200" dirty="0"/>
           </a:p>
           <a:p>
-            <a:pPr indent="0" marL="0">
+            <a:pPr marL="0" indent="0">
               <a:buNone/>
             </a:pPr>
             <a:r>
@@ -16844,6 +17525,13 @@
             <a:prstDash val="solid"/>
           </a:ln>
         </p:spPr>
+        <p:txBody>
+          <a:bodyPr/>
+          <a:lstStyle/>
+          <a:p>
+            <a:endParaRPr lang="en-US"/>
+          </a:p>
+        </p:txBody>
       </p:sp>
       <p:sp>
         <p:nvSpPr>
@@ -16864,6 +17552,13 @@
           </a:solidFill>
           <a:ln/>
         </p:spPr>
+        <p:txBody>
+          <a:bodyPr/>
+          <a:lstStyle/>
+          <a:p>
+            <a:endParaRPr lang="en-US"/>
+          </a:p>
+        </p:txBody>
       </p:sp>
       <p:sp>
         <p:nvSpPr>
@@ -16886,7 +17581,7 @@
           <a:bodyPr wrap="square" lIns="0" tIns="0" rIns="0" bIns="0" rtlCol="0" anchor="ctr"/>
           <a:lstStyle/>
           <a:p>
-            <a:pPr indent="0" marL="0">
+            <a:pPr marL="0" indent="0">
               <a:buNone/>
             </a:pPr>
             <a:r>
@@ -16903,7 +17598,7 @@
             <a:endParaRPr lang="en-US" sz="1400" dirty="0"/>
           </a:p>
           <a:p>
-            <a:pPr indent="0" marL="0">
+            <a:pPr marL="0" indent="0">
               <a:buNone/>
             </a:pPr>
             <a:r>
@@ -16942,7 +17637,7 @@
           <a:bodyPr wrap="square" lIns="0" tIns="0" rIns="0" bIns="0" rtlCol="0" anchor="ctr"/>
           <a:lstStyle/>
           <a:p>
-            <a:pPr indent="0" marL="0">
+            <a:pPr marL="0" indent="0">
               <a:buNone/>
             </a:pPr>
             <a:r>
@@ -16959,7 +17654,7 @@
             <a:endParaRPr lang="en-US" sz="1200" dirty="0"/>
           </a:p>
           <a:p>
-            <a:pPr indent="0" marL="0">
+            <a:pPr marL="0" indent="0">
               <a:buNone/>
             </a:pPr>
             <a:r>
@@ -17001,6 +17696,13 @@
             <a:prstDash val="solid"/>
           </a:ln>
         </p:spPr>
+        <p:txBody>
+          <a:bodyPr/>
+          <a:lstStyle/>
+          <a:p>
+            <a:endParaRPr lang="en-US"/>
+          </a:p>
+        </p:txBody>
       </p:sp>
       <p:sp>
         <p:nvSpPr>
@@ -17021,6 +17723,13 @@
           </a:solidFill>
           <a:ln/>
         </p:spPr>
+        <p:txBody>
+          <a:bodyPr/>
+          <a:lstStyle/>
+          <a:p>
+            <a:endParaRPr lang="en-US"/>
+          </a:p>
+        </p:txBody>
       </p:sp>
       <p:sp>
         <p:nvSpPr>
@@ -17043,7 +17752,7 @@
           <a:bodyPr wrap="square" lIns="0" tIns="0" rIns="0" bIns="0" rtlCol="0" anchor="ctr"/>
           <a:lstStyle/>
           <a:p>
-            <a:pPr indent="0" marL="0">
+            <a:pPr marL="0" indent="0">
               <a:buNone/>
             </a:pPr>
             <a:r>
@@ -17060,7 +17769,7 @@
             <a:endParaRPr lang="en-US" sz="1400" dirty="0"/>
           </a:p>
           <a:p>
-            <a:pPr indent="0" marL="0">
+            <a:pPr marL="0" indent="0">
               <a:buNone/>
             </a:pPr>
             <a:r>
@@ -17099,7 +17808,7 @@
           <a:bodyPr wrap="square" lIns="0" tIns="0" rIns="0" bIns="0" rtlCol="0" anchor="ctr"/>
           <a:lstStyle/>
           <a:p>
-            <a:pPr indent="0" marL="0">
+            <a:pPr marL="0" indent="0">
               <a:buNone/>
             </a:pPr>
             <a:r>
@@ -17116,7 +17825,7 @@
             <a:endParaRPr lang="en-US" sz="1200" dirty="0"/>
           </a:p>
           <a:p>
-            <a:pPr indent="0" marL="0">
+            <a:pPr marL="0" indent="0">
               <a:buNone/>
             </a:pPr>
             <a:r>
@@ -17155,7 +17864,7 @@
           <a:bodyPr wrap="square" lIns="0" tIns="0" rIns="0" bIns="0" rtlCol="0" anchor="ctr"/>
           <a:lstStyle/>
           <a:p>
-            <a:pPr algn="ctr" indent="0" marL="0">
+            <a:pPr marL="0" indent="0" algn="ctr">
               <a:buNone/>
             </a:pPr>
             <a:r>
@@ -17194,7 +17903,7 @@
           <a:bodyPr wrap="square" lIns="0" tIns="0" rIns="0" bIns="0" rtlCol="0" anchor="ctr"/>
           <a:lstStyle/>
           <a:p>
-            <a:pPr algn="ctr" indent="0" marL="0">
+            <a:pPr marL="0" indent="0" algn="ctr">
               <a:buNone/>
             </a:pPr>
             <a:r>
@@ -17233,7 +17942,7 @@
           <a:bodyPr wrap="square" lIns="0" tIns="0" rIns="0" bIns="0" rtlCol="0" anchor="ctr"/>
           <a:lstStyle/>
           <a:p>
-            <a:pPr indent="0" marL="0">
+            <a:pPr marL="0" indent="0">
               <a:buNone/>
             </a:pPr>
             <a:r>
@@ -17270,6 +17979,13 @@
           </a:solidFill>
           <a:ln/>
         </p:spPr>
+        <p:txBody>
+          <a:bodyPr/>
+          <a:lstStyle/>
+          <a:p>
+            <a:endParaRPr lang="en-US"/>
+          </a:p>
+        </p:txBody>
       </p:sp>
       <p:sp>
         <p:nvSpPr>
@@ -17292,7 +18008,7 @@
           <a:bodyPr wrap="square" lIns="0" tIns="0" rIns="0" bIns="0" rtlCol="0" anchor="ctr"/>
           <a:lstStyle/>
           <a:p>
-            <a:pPr algn="ctr" indent="0" marL="0">
+            <a:pPr marL="0" indent="0" algn="ctr">
               <a:buNone/>
             </a:pPr>
             <a:r>
@@ -17331,7 +18047,7 @@
           <a:bodyPr wrap="square" lIns="0" tIns="0" rIns="0" bIns="0" rtlCol="0" anchor="ctr"/>
           <a:lstStyle/>
           <a:p>
-            <a:pPr indent="0" marL="0">
+            <a:pPr marL="0" indent="0">
               <a:buNone/>
             </a:pPr>
             <a:r>
@@ -17370,7 +18086,7 @@
           <a:bodyPr wrap="square" lIns="0" tIns="0" rIns="0" bIns="0" rtlCol="0" anchor="ctr"/>
           <a:lstStyle/>
           <a:p>
-            <a:pPr indent="0" marL="0">
+            <a:pPr marL="0" indent="0">
               <a:buNone/>
             </a:pPr>
             <a:r>
@@ -17407,6 +18123,13 @@
           </a:solidFill>
           <a:ln/>
         </p:spPr>
+        <p:txBody>
+          <a:bodyPr/>
+          <a:lstStyle/>
+          <a:p>
+            <a:endParaRPr lang="en-US"/>
+          </a:p>
+        </p:txBody>
       </p:sp>
       <p:sp>
         <p:nvSpPr>
@@ -17429,7 +18152,7 @@
           <a:bodyPr wrap="square" lIns="0" tIns="0" rIns="0" bIns="0" rtlCol="0" anchor="ctr"/>
           <a:lstStyle/>
           <a:p>
-            <a:pPr algn="ctr" indent="0" marL="0">
+            <a:pPr marL="0" indent="0" algn="ctr">
               <a:buNone/>
             </a:pPr>
             <a:r>
@@ -17468,7 +18191,7 @@
           <a:bodyPr wrap="square" lIns="0" tIns="0" rIns="0" bIns="0" rtlCol="0" anchor="ctr"/>
           <a:lstStyle/>
           <a:p>
-            <a:pPr indent="0" marL="0">
+            <a:pPr marL="0" indent="0">
               <a:buNone/>
             </a:pPr>
             <a:r>
@@ -17507,7 +18230,7 @@
           <a:bodyPr wrap="square" lIns="0" tIns="0" rIns="0" bIns="0" rtlCol="0" anchor="ctr"/>
           <a:lstStyle/>
           <a:p>
-            <a:pPr indent="0" marL="0">
+            <a:pPr marL="0" indent="0">
               <a:buNone/>
             </a:pPr>
             <a:r>
@@ -17544,6 +18267,13 @@
           </a:solidFill>
           <a:ln/>
         </p:spPr>
+        <p:txBody>
+          <a:bodyPr/>
+          <a:lstStyle/>
+          <a:p>
+            <a:endParaRPr lang="en-US"/>
+          </a:p>
+        </p:txBody>
       </p:sp>
       <p:sp>
         <p:nvSpPr>
@@ -17566,7 +18296,7 @@
           <a:bodyPr wrap="square" lIns="0" tIns="0" rIns="0" bIns="0" rtlCol="0" anchor="ctr"/>
           <a:lstStyle/>
           <a:p>
-            <a:pPr algn="ctr" indent="0" marL="0">
+            <a:pPr marL="0" indent="0" algn="ctr">
               <a:buNone/>
             </a:pPr>
             <a:r>
@@ -17605,7 +18335,7 @@
           <a:bodyPr wrap="square" lIns="0" tIns="0" rIns="0" bIns="0" rtlCol="0" anchor="ctr"/>
           <a:lstStyle/>
           <a:p>
-            <a:pPr indent="0" marL="0">
+            <a:pPr marL="0" indent="0">
               <a:buNone/>
             </a:pPr>
             <a:r>
@@ -17644,7 +18374,7 @@
           <a:bodyPr wrap="square" lIns="0" tIns="0" rIns="0" bIns="0" rtlCol="0" anchor="ctr"/>
           <a:lstStyle/>
           <a:p>
-            <a:pPr indent="0" marL="0">
+            <a:pPr marL="0" indent="0">
               <a:buNone/>
             </a:pPr>
             <a:r>
@@ -17708,7 +18438,7 @@
           <a:bodyPr wrap="square" lIns="0" tIns="0" rIns="0" bIns="0" rtlCol="0" anchor="ctr"/>
           <a:lstStyle/>
           <a:p>
-            <a:pPr indent="0" marL="0">
+            <a:pPr marL="0" indent="0">
               <a:buNone/>
             </a:pPr>
             <a:r>
@@ -17745,6 +18475,13 @@
           </a:solidFill>
           <a:ln/>
         </p:spPr>
+        <p:txBody>
+          <a:bodyPr/>
+          <a:lstStyle/>
+          <a:p>
+            <a:endParaRPr lang="en-US"/>
+          </a:p>
+        </p:txBody>
       </p:sp>
       <p:sp>
         <p:nvSpPr>
@@ -17767,7 +18504,7 @@
           <a:bodyPr wrap="square" lIns="0" tIns="0" rIns="0" bIns="0" rtlCol="0" anchor="ctr"/>
           <a:lstStyle/>
           <a:p>
-            <a:pPr indent="0" marL="0">
+            <a:pPr marL="0" indent="0">
               <a:buNone/>
             </a:pPr>
             <a:r>
@@ -17806,7 +18543,7 @@
           <a:bodyPr wrap="square" lIns="0" tIns="0" rIns="0" bIns="0" rtlCol="0" anchor="ctr"/>
           <a:lstStyle/>
           <a:p>
-            <a:pPr algn="r" indent="0" marL="0">
+            <a:pPr marL="0" indent="0" algn="r">
               <a:buNone/>
             </a:pPr>
             <a:r>
@@ -17848,6 +18585,13 @@
             <a:prstDash val="solid"/>
           </a:ln>
         </p:spPr>
+        <p:txBody>
+          <a:bodyPr/>
+          <a:lstStyle/>
+          <a:p>
+            <a:endParaRPr lang="en-US"/>
+          </a:p>
+        </p:txBody>
       </p:sp>
       <p:sp>
         <p:nvSpPr>
@@ -17868,6 +18612,13 @@
           </a:solidFill>
           <a:ln/>
         </p:spPr>
+        <p:txBody>
+          <a:bodyPr/>
+          <a:lstStyle/>
+          <a:p>
+            <a:endParaRPr lang="en-US"/>
+          </a:p>
+        </p:txBody>
       </p:sp>
       <p:sp>
         <p:nvSpPr>
@@ -17890,7 +18641,7 @@
           <a:bodyPr wrap="square" lIns="0" tIns="0" rIns="0" bIns="0" rtlCol="0" anchor="ctr"/>
           <a:lstStyle/>
           <a:p>
-            <a:pPr indent="0" marL="0">
+            <a:pPr marL="0" indent="0">
               <a:buNone/>
             </a:pPr>
             <a:r>
@@ -17929,7 +18680,7 @@
           <a:bodyPr wrap="square" lIns="0" tIns="0" rIns="0" bIns="0" rtlCol="0" anchor="ctr"/>
           <a:lstStyle/>
           <a:p>
-            <a:pPr indent="0" marL="0">
+            <a:pPr marL="0" indent="0">
               <a:buNone/>
             </a:pPr>
             <a:r>
@@ -17968,7 +18719,7 @@
           <a:bodyPr wrap="square" lIns="0" tIns="0" rIns="0" bIns="0" rtlCol="0" anchor="ctr"/>
           <a:lstStyle/>
           <a:p>
-            <a:pPr indent="0" marL="0">
+            <a:pPr marL="0" indent="0">
               <a:buNone/>
             </a:pPr>
             <a:r>
@@ -18007,7 +18758,7 @@
           <a:bodyPr wrap="square" lIns="0" tIns="0" rIns="0" bIns="0" rtlCol="0" anchor="ctr"/>
           <a:lstStyle/>
           <a:p>
-            <a:pPr indent="0" marL="0">
+            <a:pPr marL="0" indent="0">
               <a:buNone/>
             </a:pPr>
             <a:r>
@@ -18046,7 +18797,7 @@
           <a:bodyPr wrap="square" lIns="0" tIns="0" rIns="0" bIns="0" rtlCol="0" anchor="ctr"/>
           <a:lstStyle/>
           <a:p>
-            <a:pPr indent="0" marL="0">
+            <a:pPr marL="0" indent="0">
               <a:buNone/>
             </a:pPr>
             <a:r>
@@ -18088,6 +18839,13 @@
             <a:prstDash val="solid"/>
           </a:ln>
         </p:spPr>
+        <p:txBody>
+          <a:bodyPr/>
+          <a:lstStyle/>
+          <a:p>
+            <a:endParaRPr lang="en-US"/>
+          </a:p>
+        </p:txBody>
       </p:sp>
       <p:sp>
         <p:nvSpPr>
@@ -18108,6 +18866,13 @@
           </a:solidFill>
           <a:ln/>
         </p:spPr>
+        <p:txBody>
+          <a:bodyPr/>
+          <a:lstStyle/>
+          <a:p>
+            <a:endParaRPr lang="en-US"/>
+          </a:p>
+        </p:txBody>
       </p:sp>
       <p:sp>
         <p:nvSpPr>
@@ -18130,7 +18895,7 @@
           <a:bodyPr wrap="square" lIns="0" tIns="0" rIns="0" bIns="0" rtlCol="0" anchor="ctr"/>
           <a:lstStyle/>
           <a:p>
-            <a:pPr indent="0" marL="0">
+            <a:pPr marL="0" indent="0">
               <a:buNone/>
             </a:pPr>
             <a:r>
@@ -18169,7 +18934,7 @@
           <a:bodyPr wrap="square" lIns="0" tIns="0" rIns="0" bIns="0" rtlCol="0" anchor="ctr"/>
           <a:lstStyle/>
           <a:p>
-            <a:pPr indent="0" marL="0">
+            <a:pPr marL="0" indent="0">
               <a:buNone/>
             </a:pPr>
             <a:r>
@@ -18208,7 +18973,7 @@
           <a:bodyPr wrap="square" lIns="0" tIns="0" rIns="0" bIns="0" rtlCol="0" anchor="ctr"/>
           <a:lstStyle/>
           <a:p>
-            <a:pPr indent="0" marL="0">
+            <a:pPr marL="0" indent="0">
               <a:buNone/>
             </a:pPr>
             <a:r>
@@ -18247,7 +19012,7 @@
           <a:bodyPr wrap="square" lIns="0" tIns="0" rIns="0" bIns="0" rtlCol="0" anchor="ctr"/>
           <a:lstStyle/>
           <a:p>
-            <a:pPr indent="0" marL="0">
+            <a:pPr marL="0" indent="0">
               <a:buNone/>
             </a:pPr>
             <a:r>
@@ -18286,7 +19051,7 @@
           <a:bodyPr wrap="square" lIns="0" tIns="0" rIns="0" bIns="0" rtlCol="0" anchor="ctr"/>
           <a:lstStyle/>
           <a:p>
-            <a:pPr indent="0" marL="0">
+            <a:pPr marL="0" indent="0">
               <a:buNone/>
             </a:pPr>
             <a:r>
@@ -18328,6 +19093,13 @@
             <a:prstDash val="solid"/>
           </a:ln>
         </p:spPr>
+        <p:txBody>
+          <a:bodyPr/>
+          <a:lstStyle/>
+          <a:p>
+            <a:endParaRPr lang="en-US"/>
+          </a:p>
+        </p:txBody>
       </p:sp>
       <p:sp>
         <p:nvSpPr>
@@ -18350,7 +19122,7 @@
           <a:bodyPr wrap="square" lIns="0" tIns="0" rIns="0" bIns="0" rtlCol="0" anchor="ctr"/>
           <a:lstStyle/>
           <a:p>
-            <a:pPr indent="0" marL="0">
+            <a:pPr marL="0" indent="0">
               <a:buNone/>
             </a:pPr>
             <a:r>
@@ -18389,7 +19161,7 @@
           <a:bodyPr wrap="square" lIns="0" tIns="0" rIns="0" bIns="0" rtlCol="0" anchor="ctr"/>
           <a:lstStyle/>
           <a:p>
-            <a:pPr indent="0" marL="0">
+            <a:pPr marL="0" indent="0">
               <a:buNone/>
             </a:pPr>
             <a:r>
@@ -18453,7 +19225,7 @@
           <a:bodyPr wrap="square" lIns="0" tIns="0" rIns="0" bIns="0" rtlCol="0" anchor="ctr"/>
           <a:lstStyle/>
           <a:p>
-            <a:pPr indent="0" marL="0">
+            <a:pPr marL="0" indent="0">
               <a:buNone/>
             </a:pPr>
             <a:r>
@@ -18490,6 +19262,13 @@
           </a:solidFill>
           <a:ln/>
         </p:spPr>
+        <p:txBody>
+          <a:bodyPr/>
+          <a:lstStyle/>
+          <a:p>
+            <a:endParaRPr lang="en-US"/>
+          </a:p>
+        </p:txBody>
       </p:sp>
       <p:sp>
         <p:nvSpPr>
@@ -18512,7 +19291,7 @@
           <a:bodyPr wrap="square" lIns="0" tIns="0" rIns="0" bIns="0" rtlCol="0" anchor="ctr"/>
           <a:lstStyle/>
           <a:p>
-            <a:pPr indent="0" marL="0">
+            <a:pPr marL="0" indent="0">
               <a:buNone/>
             </a:pPr>
             <a:r>
@@ -18551,7 +19330,7 @@
           <a:bodyPr wrap="square" lIns="0" tIns="0" rIns="0" bIns="0" rtlCol="0" anchor="ctr"/>
           <a:lstStyle/>
           <a:p>
-            <a:pPr algn="r" indent="0" marL="0">
+            <a:pPr marL="0" indent="0" algn="r">
               <a:buNone/>
             </a:pPr>
             <a:r>
@@ -18588,6 +19367,13 @@
           </a:solidFill>
           <a:ln/>
         </p:spPr>
+        <p:txBody>
+          <a:bodyPr/>
+          <a:lstStyle/>
+          <a:p>
+            <a:endParaRPr lang="en-US"/>
+          </a:p>
+        </p:txBody>
       </p:sp>
       <p:sp>
         <p:nvSpPr>
@@ -18610,7 +19396,7 @@
           <a:bodyPr wrap="square" lIns="0" tIns="0" rIns="0" bIns="0" rtlCol="0" anchor="ctr"/>
           <a:lstStyle/>
           <a:p>
-            <a:pPr algn="ctr" indent="0" marL="0">
+            <a:pPr marL="0" indent="0" algn="ctr">
               <a:buNone/>
             </a:pPr>
             <a:r>
@@ -18649,7 +19435,7 @@
           <a:bodyPr wrap="square" lIns="0" tIns="0" rIns="0" bIns="0" rtlCol="0" anchor="ctr"/>
           <a:lstStyle/>
           <a:p>
-            <a:pPr indent="0" marL="0">
+            <a:pPr marL="0" indent="0">
               <a:buNone/>
             </a:pPr>
             <a:r>
@@ -18686,6 +19472,13 @@
           </a:solidFill>
           <a:ln/>
         </p:spPr>
+        <p:txBody>
+          <a:bodyPr/>
+          <a:lstStyle/>
+          <a:p>
+            <a:endParaRPr lang="en-US"/>
+          </a:p>
+        </p:txBody>
       </p:sp>
       <p:sp>
         <p:nvSpPr>
@@ -18708,7 +19501,7 @@
           <a:bodyPr wrap="square" lIns="0" tIns="0" rIns="0" bIns="0" rtlCol="0" anchor="ctr"/>
           <a:lstStyle/>
           <a:p>
-            <a:pPr algn="ctr" indent="0" marL="0">
+            <a:pPr marL="0" indent="0" algn="ctr">
               <a:buNone/>
             </a:pPr>
             <a:r>
@@ -18747,7 +19540,7 @@
           <a:bodyPr wrap="square" lIns="0" tIns="0" rIns="0" bIns="0" rtlCol="0" anchor="ctr"/>
           <a:lstStyle/>
           <a:p>
-            <a:pPr indent="0" marL="0">
+            <a:pPr marL="0" indent="0">
               <a:buNone/>
             </a:pPr>
             <a:r>
@@ -18784,6 +19577,13 @@
           </a:solidFill>
           <a:ln/>
         </p:spPr>
+        <p:txBody>
+          <a:bodyPr/>
+          <a:lstStyle/>
+          <a:p>
+            <a:endParaRPr lang="en-US"/>
+          </a:p>
+        </p:txBody>
       </p:sp>
       <p:sp>
         <p:nvSpPr>
@@ -18806,7 +19606,7 @@
           <a:bodyPr wrap="square" lIns="0" tIns="0" rIns="0" bIns="0" rtlCol="0" anchor="ctr"/>
           <a:lstStyle/>
           <a:p>
-            <a:pPr algn="ctr" indent="0" marL="0">
+            <a:pPr marL="0" indent="0" algn="ctr">
               <a:buNone/>
             </a:pPr>
             <a:r>
@@ -18845,7 +19645,7 @@
           <a:bodyPr wrap="square" lIns="0" tIns="0" rIns="0" bIns="0" rtlCol="0" anchor="ctr"/>
           <a:lstStyle/>
           <a:p>
-            <a:pPr indent="0" marL="0">
+            <a:pPr marL="0" indent="0">
               <a:buNone/>
             </a:pPr>
             <a:r>
@@ -18882,6 +19682,13 @@
           </a:solidFill>
           <a:ln/>
         </p:spPr>
+        <p:txBody>
+          <a:bodyPr/>
+          <a:lstStyle/>
+          <a:p>
+            <a:endParaRPr lang="en-US"/>
+          </a:p>
+        </p:txBody>
       </p:sp>
       <p:sp>
         <p:nvSpPr>
@@ -18904,7 +19711,7 @@
           <a:bodyPr wrap="square" lIns="0" tIns="0" rIns="0" bIns="0" rtlCol="0" anchor="ctr"/>
           <a:lstStyle/>
           <a:p>
-            <a:pPr algn="ctr" indent="0" marL="0">
+            <a:pPr marL="0" indent="0" algn="ctr">
               <a:buNone/>
             </a:pPr>
             <a:r>
@@ -18943,7 +19750,7 @@
           <a:bodyPr wrap="square" lIns="0" tIns="0" rIns="0" bIns="0" rtlCol="0" anchor="ctr"/>
           <a:lstStyle/>
           <a:p>
-            <a:pPr indent="0" marL="0">
+            <a:pPr marL="0" indent="0">
               <a:buNone/>
             </a:pPr>
             <a:r>
@@ -18980,6 +19787,13 @@
           </a:solidFill>
           <a:ln/>
         </p:spPr>
+        <p:txBody>
+          <a:bodyPr/>
+          <a:lstStyle/>
+          <a:p>
+            <a:endParaRPr lang="en-US"/>
+          </a:p>
+        </p:txBody>
       </p:sp>
       <p:sp>
         <p:nvSpPr>
@@ -19002,7 +19816,7 @@
           <a:bodyPr wrap="square" lIns="0" tIns="0" rIns="0" bIns="0" rtlCol="0" anchor="ctr"/>
           <a:lstStyle/>
           <a:p>
-            <a:pPr algn="ctr" indent="0" marL="0">
+            <a:pPr marL="0" indent="0" algn="ctr">
               <a:buNone/>
             </a:pPr>
             <a:r>
@@ -19041,7 +19855,7 @@
           <a:bodyPr wrap="square" lIns="0" tIns="0" rIns="0" bIns="0" rtlCol="0" anchor="ctr"/>
           <a:lstStyle/>
           <a:p>
-            <a:pPr indent="0" marL="0">
+            <a:pPr marL="0" indent="0">
               <a:buNone/>
             </a:pPr>
             <a:r>
@@ -19105,7 +19919,7 @@
           <a:bodyPr wrap="square" lIns="0" tIns="0" rIns="0" bIns="0" rtlCol="0" anchor="ctr"/>
           <a:lstStyle/>
           <a:p>
-            <a:pPr indent="0" marL="0">
+            <a:pPr marL="0" indent="0">
               <a:buNone/>
             </a:pPr>
             <a:r>
@@ -19142,6 +19956,13 @@
           </a:solidFill>
           <a:ln/>
         </p:spPr>
+        <p:txBody>
+          <a:bodyPr/>
+          <a:lstStyle/>
+          <a:p>
+            <a:endParaRPr lang="en-US"/>
+          </a:p>
+        </p:txBody>
       </p:sp>
       <p:sp>
         <p:nvSpPr>
@@ -19164,7 +19985,7 @@
           <a:bodyPr wrap="square" lIns="0" tIns="0" rIns="0" bIns="0" rtlCol="0" anchor="ctr"/>
           <a:lstStyle/>
           <a:p>
-            <a:pPr indent="0" marL="0">
+            <a:pPr marL="0" indent="0">
               <a:buNone/>
             </a:pPr>
             <a:r>
@@ -19203,7 +20024,7 @@
           <a:bodyPr wrap="square" lIns="0" tIns="0" rIns="0" bIns="0" rtlCol="0" anchor="ctr"/>
           <a:lstStyle/>
           <a:p>
-            <a:pPr algn="r" indent="0" marL="0">
+            <a:pPr marL="0" indent="0" algn="r">
               <a:buNone/>
             </a:pPr>
             <a:r>
@@ -19245,6 +20066,13 @@
             <a:prstDash val="solid"/>
           </a:ln>
         </p:spPr>
+        <p:txBody>
+          <a:bodyPr/>
+          <a:lstStyle/>
+          <a:p>
+            <a:endParaRPr lang="en-US"/>
+          </a:p>
+        </p:txBody>
       </p:sp>
       <p:sp>
         <p:nvSpPr>
@@ -19265,6 +20093,13 @@
           </a:solidFill>
           <a:ln/>
         </p:spPr>
+        <p:txBody>
+          <a:bodyPr/>
+          <a:lstStyle/>
+          <a:p>
+            <a:endParaRPr lang="en-US"/>
+          </a:p>
+        </p:txBody>
       </p:sp>
       <p:sp>
         <p:nvSpPr>
@@ -19287,7 +20122,7 @@
           <a:bodyPr wrap="square" lIns="0" tIns="0" rIns="0" bIns="0" rtlCol="0" anchor="ctr"/>
           <a:lstStyle/>
           <a:p>
-            <a:pPr indent="0" marL="0">
+            <a:pPr marL="0" indent="0">
               <a:buNone/>
             </a:pPr>
             <a:r>
@@ -19326,7 +20161,7 @@
           <a:bodyPr wrap="square" lIns="0" tIns="0" rIns="0" bIns="0" rtlCol="0" anchor="ctr"/>
           <a:lstStyle/>
           <a:p>
-            <a:pPr indent="0" marL="0">
+            <a:pPr marL="0" indent="0">
               <a:buNone/>
             </a:pPr>
             <a:r>
@@ -19365,7 +20200,7 @@
           <a:bodyPr wrap="square" lIns="0" tIns="0" rIns="0" bIns="0" rtlCol="0" anchor="ctr"/>
           <a:lstStyle/>
           <a:p>
-            <a:pPr indent="0" marL="0">
+            <a:pPr marL="0" indent="0">
               <a:buNone/>
             </a:pPr>
             <a:r>
@@ -19404,7 +20239,7 @@
           <a:bodyPr wrap="square" lIns="0" tIns="0" rIns="0" bIns="0" rtlCol="0" anchor="ctr"/>
           <a:lstStyle/>
           <a:p>
-            <a:pPr indent="0" marL="0">
+            <a:pPr marL="0" indent="0">
               <a:buNone/>
             </a:pPr>
             <a:r>
@@ -19443,7 +20278,7 @@
           <a:bodyPr wrap="square" lIns="0" tIns="0" rIns="0" bIns="0" rtlCol="0" anchor="ctr"/>
           <a:lstStyle/>
           <a:p>
-            <a:pPr indent="0" marL="0">
+            <a:pPr marL="0" indent="0">
               <a:buNone/>
             </a:pPr>
             <a:r>
@@ -19482,7 +20317,7 @@
           <a:bodyPr wrap="square" lIns="0" tIns="0" rIns="0" bIns="0" rtlCol="0" anchor="ctr"/>
           <a:lstStyle/>
           <a:p>
-            <a:pPr indent="0" marL="0">
+            <a:pPr marL="0" indent="0">
               <a:buNone/>
             </a:pPr>
             <a:r>
@@ -19524,6 +20359,13 @@
             <a:prstDash val="solid"/>
           </a:ln>
         </p:spPr>
+        <p:txBody>
+          <a:bodyPr/>
+          <a:lstStyle/>
+          <a:p>
+            <a:endParaRPr lang="en-US"/>
+          </a:p>
+        </p:txBody>
       </p:sp>
       <p:sp>
         <p:nvSpPr>
@@ -19544,6 +20386,13 @@
           </a:solidFill>
           <a:ln/>
         </p:spPr>
+        <p:txBody>
+          <a:bodyPr/>
+          <a:lstStyle/>
+          <a:p>
+            <a:endParaRPr lang="en-US"/>
+          </a:p>
+        </p:txBody>
       </p:sp>
       <p:sp>
         <p:nvSpPr>
@@ -19566,7 +20415,7 @@
           <a:bodyPr wrap="square" lIns="0" tIns="0" rIns="0" bIns="0" rtlCol="0" anchor="ctr"/>
           <a:lstStyle/>
           <a:p>
-            <a:pPr indent="0" marL="0">
+            <a:pPr marL="0" indent="0">
               <a:buNone/>
             </a:pPr>
             <a:r>
@@ -19605,7 +20454,7 @@
           <a:bodyPr wrap="square" lIns="0" tIns="0" rIns="0" bIns="0" rtlCol="0" anchor="ctr"/>
           <a:lstStyle/>
           <a:p>
-            <a:pPr indent="0" marL="0">
+            <a:pPr marL="0" indent="0">
               <a:buNone/>
             </a:pPr>
             <a:r>
@@ -19644,7 +20493,7 @@
           <a:bodyPr wrap="square" lIns="0" tIns="0" rIns="0" bIns="0" rtlCol="0" anchor="ctr"/>
           <a:lstStyle/>
           <a:p>
-            <a:pPr indent="0" marL="0">
+            <a:pPr marL="0" indent="0">
               <a:buNone/>
             </a:pPr>
             <a:r>
@@ -19683,7 +20532,7 @@
           <a:bodyPr wrap="square" lIns="0" tIns="0" rIns="0" bIns="0" rtlCol="0" anchor="ctr"/>
           <a:lstStyle/>
           <a:p>
-            <a:pPr indent="0" marL="0">
+            <a:pPr marL="0" indent="0">
               <a:buNone/>
             </a:pPr>
             <a:r>
@@ -19722,7 +20571,7 @@
           <a:bodyPr wrap="square" lIns="0" tIns="0" rIns="0" bIns="0" rtlCol="0" anchor="ctr"/>
           <a:lstStyle/>
           <a:p>
-            <a:pPr indent="0" marL="0">
+            <a:pPr marL="0" indent="0">
               <a:buNone/>
             </a:pPr>
             <a:r>
@@ -19761,7 +20610,7 @@
           <a:bodyPr wrap="square" lIns="0" tIns="0" rIns="0" bIns="0" rtlCol="0" anchor="ctr"/>
           <a:lstStyle/>
           <a:p>
-            <a:pPr indent="0" marL="0">
+            <a:pPr marL="0" indent="0">
               <a:buNone/>
             </a:pPr>
             <a:r>
@@ -19800,7 +20649,7 @@
           <a:bodyPr wrap="square" lIns="0" tIns="0" rIns="0" bIns="0" rtlCol="0" anchor="ctr"/>
           <a:lstStyle/>
           <a:p>
-            <a:pPr indent="0" marL="0">
+            <a:pPr marL="0" indent="0">
               <a:buNone/>
             </a:pPr>
             <a:r>
@@ -19839,7 +20688,7 @@
           <a:bodyPr wrap="square" lIns="0" tIns="0" rIns="0" bIns="0" rtlCol="0" anchor="ctr"/>
           <a:lstStyle/>
           <a:p>
-            <a:pPr indent="0" marL="0">
+            <a:pPr marL="0" indent="0">
               <a:buNone/>
             </a:pPr>
             <a:r>
@@ -19878,7 +20727,7 @@
           <a:bodyPr wrap="square" lIns="0" tIns="0" rIns="0" bIns="0" rtlCol="0" anchor="ctr"/>
           <a:lstStyle/>
           <a:p>
-            <a:pPr indent="0" marL="0">
+            <a:pPr marL="0" indent="0">
               <a:buNone/>
             </a:pPr>
             <a:r>
@@ -19912,6 +20761,7 @@
         <a:solidFill>
           <a:srgbClr val="1B2A4A"/>
         </a:solidFill>
+        <a:effectLst/>
       </p:bgPr>
     </p:bg>
     <p:spTree>
@@ -19949,11 +20799,11 @@
           <a:bodyPr wrap="square" lIns="0" tIns="0" rIns="0" bIns="0" rtlCol="0" anchor="ctr"/>
           <a:lstStyle/>
           <a:p>
-            <a:pPr indent="0" marL="0">
-              <a:buNone/>
-            </a:pPr>
-            <a:r>
-              <a:rPr lang="en-US" sz="1600" b="1" spc="400" kern="0" dirty="0">
+            <a:pPr marL="0" indent="0">
+              <a:buNone/>
+            </a:pPr>
+            <a:r>
+              <a:rPr lang="en-US" sz="1600" b="1" kern="0" spc="400" dirty="0">
                 <a:solidFill>
                   <a:srgbClr val="0E7C7B"/>
                 </a:solidFill>
@@ -19988,7 +20838,7 @@
           <a:bodyPr wrap="square" lIns="0" tIns="0" rIns="0" bIns="0" rtlCol="0" anchor="ctr"/>
           <a:lstStyle/>
           <a:p>
-            <a:pPr indent="0" marL="0">
+            <a:pPr marL="0" indent="0">
               <a:buNone/>
             </a:pPr>
             <a:r>
@@ -20027,7 +20877,7 @@
           <a:bodyPr wrap="square" lIns="0" tIns="0" rIns="0" bIns="0" rtlCol="0" anchor="ctr"/>
           <a:lstStyle/>
           <a:p>
-            <a:pPr indent="0" marL="0">
+            <a:pPr marL="0" indent="0">
               <a:buNone/>
             </a:pPr>
             <a:r>
@@ -20064,6 +20914,13 @@
           </a:solidFill>
           <a:ln/>
         </p:spPr>
+        <p:txBody>
+          <a:bodyPr/>
+          <a:lstStyle/>
+          <a:p>
+            <a:endParaRPr lang="en-US"/>
+          </a:p>
+        </p:txBody>
       </p:sp>
     </p:spTree>
   </p:cSld>
@@ -20111,7 +20968,7 @@
           <a:bodyPr wrap="square" lIns="0" tIns="0" rIns="0" bIns="0" rtlCol="0" anchor="ctr"/>
           <a:lstStyle/>
           <a:p>
-            <a:pPr indent="0" marL="0">
+            <a:pPr marL="0" indent="0">
               <a:buNone/>
             </a:pPr>
             <a:r>
@@ -20148,6 +21005,13 @@
           </a:solidFill>
           <a:ln/>
         </p:spPr>
+        <p:txBody>
+          <a:bodyPr/>
+          <a:lstStyle/>
+          <a:p>
+            <a:endParaRPr lang="en-US"/>
+          </a:p>
+        </p:txBody>
       </p:sp>
       <p:sp>
         <p:nvSpPr>
@@ -20170,7 +21034,7 @@
           <a:bodyPr wrap="square" lIns="0" tIns="0" rIns="0" bIns="0" rtlCol="0" anchor="ctr"/>
           <a:lstStyle/>
           <a:p>
-            <a:pPr indent="0" marL="0">
+            <a:pPr marL="0" indent="0">
               <a:buNone/>
             </a:pPr>
             <a:r>
@@ -20209,7 +21073,7 @@
           <a:bodyPr wrap="square" lIns="0" tIns="0" rIns="0" bIns="0" rtlCol="0" anchor="ctr"/>
           <a:lstStyle/>
           <a:p>
-            <a:pPr algn="r" indent="0" marL="0">
+            <a:pPr marL="0" indent="0" algn="r">
               <a:buNone/>
             </a:pPr>
             <a:r>
@@ -20246,6 +21110,13 @@
           </a:solidFill>
           <a:ln/>
         </p:spPr>
+        <p:txBody>
+          <a:bodyPr/>
+          <a:lstStyle/>
+          <a:p>
+            <a:endParaRPr lang="en-US"/>
+          </a:p>
+        </p:txBody>
       </p:sp>
       <p:sp>
         <p:nvSpPr>
@@ -20268,7 +21139,7 @@
           <a:bodyPr wrap="square" lIns="0" tIns="0" rIns="0" bIns="0" rtlCol="0" anchor="ctr"/>
           <a:lstStyle/>
           <a:p>
-            <a:pPr indent="0" marL="0">
+            <a:pPr marL="0" indent="0">
               <a:buNone/>
             </a:pPr>
             <a:r>
@@ -20310,6 +21181,13 @@
             <a:prstDash val="solid"/>
           </a:ln>
         </p:spPr>
+        <p:txBody>
+          <a:bodyPr/>
+          <a:lstStyle/>
+          <a:p>
+            <a:endParaRPr lang="en-US"/>
+          </a:p>
+        </p:txBody>
       </p:sp>
       <p:sp>
         <p:nvSpPr>
@@ -20330,6 +21208,13 @@
           </a:solidFill>
           <a:ln/>
         </p:spPr>
+        <p:txBody>
+          <a:bodyPr/>
+          <a:lstStyle/>
+          <a:p>
+            <a:endParaRPr lang="en-US"/>
+          </a:p>
+        </p:txBody>
       </p:sp>
       <p:sp>
         <p:nvSpPr>
@@ -20352,7 +21237,7 @@
           <a:bodyPr wrap="square" lIns="0" tIns="0" rIns="0" bIns="0" rtlCol="0" anchor="ctr"/>
           <a:lstStyle/>
           <a:p>
-            <a:pPr indent="0" marL="0">
+            <a:pPr marL="0" indent="0">
               <a:buNone/>
             </a:pPr>
             <a:r>
@@ -20391,7 +21276,7 @@
           <a:bodyPr wrap="square" lIns="0" tIns="0" rIns="0" bIns="0" rtlCol="0" anchor="ctr"/>
           <a:lstStyle/>
           <a:p>
-            <a:pPr indent="0" marL="0">
+            <a:pPr marL="0" indent="0">
               <a:buNone/>
             </a:pPr>
             <a:r>
@@ -20430,7 +21315,7 @@
           <a:bodyPr wrap="square" lIns="0" tIns="0" rIns="0" bIns="0" rtlCol="0" anchor="ctr"/>
           <a:lstStyle/>
           <a:p>
-            <a:pPr indent="0" marL="0">
+            <a:pPr marL="0" indent="0">
               <a:buNone/>
             </a:pPr>
             <a:r>
@@ -20469,7 +21354,7 @@
           <a:bodyPr wrap="square" lIns="0" tIns="0" rIns="0" bIns="0" rtlCol="0" anchor="ctr"/>
           <a:lstStyle/>
           <a:p>
-            <a:pPr indent="0" marL="0">
+            <a:pPr marL="0" indent="0">
               <a:buNone/>
             </a:pPr>
             <a:r>
@@ -20511,6 +21396,13 @@
             <a:prstDash val="solid"/>
           </a:ln>
         </p:spPr>
+        <p:txBody>
+          <a:bodyPr/>
+          <a:lstStyle/>
+          <a:p>
+            <a:endParaRPr lang="en-US"/>
+          </a:p>
+        </p:txBody>
       </p:sp>
       <p:sp>
         <p:nvSpPr>
@@ -20531,6 +21423,13 @@
           </a:solidFill>
           <a:ln/>
         </p:spPr>
+        <p:txBody>
+          <a:bodyPr/>
+          <a:lstStyle/>
+          <a:p>
+            <a:endParaRPr lang="en-US"/>
+          </a:p>
+        </p:txBody>
       </p:sp>
       <p:sp>
         <p:nvSpPr>
@@ -20553,7 +21452,7 @@
           <a:bodyPr wrap="square" lIns="0" tIns="0" rIns="0" bIns="0" rtlCol="0" anchor="ctr"/>
           <a:lstStyle/>
           <a:p>
-            <a:pPr indent="0" marL="0">
+            <a:pPr marL="0" indent="0">
               <a:buNone/>
             </a:pPr>
             <a:r>
@@ -20592,7 +21491,7 @@
           <a:bodyPr wrap="square" lIns="0" tIns="0" rIns="0" bIns="0" rtlCol="0" anchor="ctr"/>
           <a:lstStyle/>
           <a:p>
-            <a:pPr indent="0" marL="0">
+            <a:pPr marL="0" indent="0">
               <a:buNone/>
             </a:pPr>
             <a:r>
@@ -20631,7 +21530,7 @@
           <a:bodyPr wrap="square" lIns="0" tIns="0" rIns="0" bIns="0" rtlCol="0" anchor="ctr"/>
           <a:lstStyle/>
           <a:p>
-            <a:pPr indent="0" marL="0">
+            <a:pPr marL="0" indent="0">
               <a:buNone/>
             </a:pPr>
             <a:r>
@@ -20670,7 +21569,7 @@
           <a:bodyPr wrap="square" lIns="0" tIns="0" rIns="0" bIns="0" rtlCol="0" anchor="ctr"/>
           <a:lstStyle/>
           <a:p>
-            <a:pPr indent="0" marL="0">
+            <a:pPr marL="0" indent="0">
               <a:buNone/>
             </a:pPr>
             <a:r>
@@ -20712,6 +21611,13 @@
             <a:prstDash val="solid"/>
           </a:ln>
         </p:spPr>
+        <p:txBody>
+          <a:bodyPr/>
+          <a:lstStyle/>
+          <a:p>
+            <a:endParaRPr lang="en-US"/>
+          </a:p>
+        </p:txBody>
       </p:sp>
       <p:sp>
         <p:nvSpPr>
@@ -20732,6 +21638,13 @@
           </a:solidFill>
           <a:ln/>
         </p:spPr>
+        <p:txBody>
+          <a:bodyPr/>
+          <a:lstStyle/>
+          <a:p>
+            <a:endParaRPr lang="en-US"/>
+          </a:p>
+        </p:txBody>
       </p:sp>
       <p:sp>
         <p:nvSpPr>
@@ -20754,7 +21667,7 @@
           <a:bodyPr wrap="square" lIns="0" tIns="0" rIns="0" bIns="0" rtlCol="0" anchor="ctr"/>
           <a:lstStyle/>
           <a:p>
-            <a:pPr indent="0" marL="0">
+            <a:pPr marL="0" indent="0">
               <a:buNone/>
             </a:pPr>
             <a:r>
@@ -20793,7 +21706,7 @@
           <a:bodyPr wrap="square" lIns="0" tIns="0" rIns="0" bIns="0" rtlCol="0" anchor="ctr"/>
           <a:lstStyle/>
           <a:p>
-            <a:pPr indent="0" marL="0">
+            <a:pPr marL="0" indent="0">
               <a:buNone/>
             </a:pPr>
             <a:r>
@@ -20832,7 +21745,7 @@
           <a:bodyPr wrap="square" lIns="0" tIns="0" rIns="0" bIns="0" rtlCol="0" anchor="ctr"/>
           <a:lstStyle/>
           <a:p>
-            <a:pPr indent="0" marL="0">
+            <a:pPr marL="0" indent="0">
               <a:buNone/>
             </a:pPr>
             <a:r>
@@ -20871,7 +21784,7 @@
           <a:bodyPr wrap="square" lIns="0" tIns="0" rIns="0" bIns="0" rtlCol="0" anchor="ctr"/>
           <a:lstStyle/>
           <a:p>
-            <a:pPr indent="0" marL="0">
+            <a:pPr marL="0" indent="0">
               <a:buNone/>
             </a:pPr>
             <a:r>
@@ -20910,7 +21823,7 @@
           <a:bodyPr wrap="square" lIns="0" tIns="0" rIns="0" bIns="0" rtlCol="0" anchor="ctr"/>
           <a:lstStyle/>
           <a:p>
-            <a:pPr indent="0" marL="0">
+            <a:pPr marL="0" indent="0">
               <a:buNone/>
             </a:pPr>
             <a:r>
@@ -20974,7 +21887,7 @@
           <a:bodyPr wrap="square" lIns="0" tIns="0" rIns="0" bIns="0" rtlCol="0" anchor="ctr"/>
           <a:lstStyle/>
           <a:p>
-            <a:pPr indent="0" marL="0">
+            <a:pPr marL="0" indent="0">
               <a:buNone/>
             </a:pPr>
             <a:r>
@@ -21011,6 +21924,13 @@
           </a:solidFill>
           <a:ln/>
         </p:spPr>
+        <p:txBody>
+          <a:bodyPr/>
+          <a:lstStyle/>
+          <a:p>
+            <a:endParaRPr lang="en-US"/>
+          </a:p>
+        </p:txBody>
       </p:sp>
       <p:sp>
         <p:nvSpPr>
@@ -21033,7 +21953,7 @@
           <a:bodyPr wrap="square" lIns="0" tIns="0" rIns="0" bIns="0" rtlCol="0" anchor="ctr"/>
           <a:lstStyle/>
           <a:p>
-            <a:pPr indent="0" marL="0">
+            <a:pPr marL="0" indent="0">
               <a:buNone/>
             </a:pPr>
             <a:r>
@@ -21072,7 +21992,7 @@
           <a:bodyPr wrap="square" lIns="0" tIns="0" rIns="0" bIns="0" rtlCol="0" anchor="ctr"/>
           <a:lstStyle/>
           <a:p>
-            <a:pPr algn="r" indent="0" marL="0">
+            <a:pPr marL="0" indent="0" algn="r">
               <a:buNone/>
             </a:pPr>
             <a:r>
@@ -21111,7 +22031,7 @@
           <a:bodyPr wrap="square" lIns="0" tIns="0" rIns="0" bIns="0" rtlCol="0" anchor="ctr"/>
           <a:lstStyle/>
           <a:p>
-            <a:pPr indent="0" marL="0">
+            <a:pPr marL="0" indent="0">
               <a:buNone/>
             </a:pPr>
             <a:r>
@@ -21153,6 +22073,13 @@
             <a:prstDash val="solid"/>
           </a:ln>
         </p:spPr>
+        <p:txBody>
+          <a:bodyPr/>
+          <a:lstStyle/>
+          <a:p>
+            <a:endParaRPr lang="en-US"/>
+          </a:p>
+        </p:txBody>
       </p:sp>
       <p:sp>
         <p:nvSpPr>
@@ -21173,6 +22100,13 @@
           </a:solidFill>
           <a:ln/>
         </p:spPr>
+        <p:txBody>
+          <a:bodyPr/>
+          <a:lstStyle/>
+          <a:p>
+            <a:endParaRPr lang="en-US"/>
+          </a:p>
+        </p:txBody>
       </p:sp>
       <p:sp>
         <p:nvSpPr>
@@ -21195,7 +22129,7 @@
           <a:bodyPr wrap="square" lIns="0" tIns="0" rIns="0" bIns="0" rtlCol="0" anchor="ctr"/>
           <a:lstStyle/>
           <a:p>
-            <a:pPr indent="0" marL="0">
+            <a:pPr marL="0" indent="0">
               <a:buNone/>
             </a:pPr>
             <a:r>
@@ -21234,7 +22168,7 @@
           <a:bodyPr wrap="square" lIns="0" tIns="0" rIns="0" bIns="0" rtlCol="0" anchor="ctr"/>
           <a:lstStyle/>
           <a:p>
-            <a:pPr indent="0" marL="0">
+            <a:pPr marL="0" indent="0">
               <a:buNone/>
             </a:pPr>
             <a:r>
@@ -21276,6 +22210,13 @@
             <a:prstDash val="solid"/>
           </a:ln>
         </p:spPr>
+        <p:txBody>
+          <a:bodyPr/>
+          <a:lstStyle/>
+          <a:p>
+            <a:endParaRPr lang="en-US"/>
+          </a:p>
+        </p:txBody>
       </p:sp>
       <p:sp>
         <p:nvSpPr>
@@ -21296,6 +22237,13 @@
           </a:solidFill>
           <a:ln/>
         </p:spPr>
+        <p:txBody>
+          <a:bodyPr/>
+          <a:lstStyle/>
+          <a:p>
+            <a:endParaRPr lang="en-US"/>
+          </a:p>
+        </p:txBody>
       </p:sp>
       <p:sp>
         <p:nvSpPr>
@@ -21318,7 +22266,7 @@
           <a:bodyPr wrap="square" lIns="0" tIns="0" rIns="0" bIns="0" rtlCol="0" anchor="ctr"/>
           <a:lstStyle/>
           <a:p>
-            <a:pPr indent="0" marL="0">
+            <a:pPr marL="0" indent="0">
               <a:buNone/>
             </a:pPr>
             <a:r>
@@ -21357,7 +22305,7 @@
           <a:bodyPr wrap="square" lIns="0" tIns="0" rIns="0" bIns="0" rtlCol="0" anchor="ctr"/>
           <a:lstStyle/>
           <a:p>
-            <a:pPr indent="0" marL="0">
+            <a:pPr marL="0" indent="0">
               <a:buNone/>
             </a:pPr>
             <a:r>
@@ -21399,6 +22347,13 @@
             <a:prstDash val="solid"/>
           </a:ln>
         </p:spPr>
+        <p:txBody>
+          <a:bodyPr/>
+          <a:lstStyle/>
+          <a:p>
+            <a:endParaRPr lang="en-US"/>
+          </a:p>
+        </p:txBody>
       </p:sp>
       <p:sp>
         <p:nvSpPr>
@@ -21419,6 +22374,13 @@
           </a:solidFill>
           <a:ln/>
         </p:spPr>
+        <p:txBody>
+          <a:bodyPr/>
+          <a:lstStyle/>
+          <a:p>
+            <a:endParaRPr lang="en-US"/>
+          </a:p>
+        </p:txBody>
       </p:sp>
       <p:sp>
         <p:nvSpPr>
@@ -21441,7 +22403,7 @@
           <a:bodyPr wrap="square" lIns="0" tIns="0" rIns="0" bIns="0" rtlCol="0" anchor="ctr"/>
           <a:lstStyle/>
           <a:p>
-            <a:pPr indent="0" marL="0">
+            <a:pPr marL="0" indent="0">
               <a:buNone/>
             </a:pPr>
             <a:r>
@@ -21480,7 +22442,7 @@
           <a:bodyPr wrap="square" lIns="0" tIns="0" rIns="0" bIns="0" rtlCol="0" anchor="ctr"/>
           <a:lstStyle/>
           <a:p>
-            <a:pPr indent="0" marL="0">
+            <a:pPr marL="0" indent="0">
               <a:buNone/>
             </a:pPr>
             <a:r>
@@ -21522,6 +22484,13 @@
             <a:prstDash val="solid"/>
           </a:ln>
         </p:spPr>
+        <p:txBody>
+          <a:bodyPr/>
+          <a:lstStyle/>
+          <a:p>
+            <a:endParaRPr lang="en-US"/>
+          </a:p>
+        </p:txBody>
       </p:sp>
       <p:sp>
         <p:nvSpPr>
@@ -21544,7 +22513,7 @@
           <a:bodyPr wrap="square" lIns="0" tIns="0" rIns="0" bIns="0" rtlCol="0" anchor="ctr"/>
           <a:lstStyle/>
           <a:p>
-            <a:pPr indent="0" marL="0">
+            <a:pPr marL="0" indent="0">
               <a:buNone/>
             </a:pPr>
             <a:r>
@@ -21608,7 +22577,7 @@
           <a:bodyPr wrap="square" lIns="0" tIns="0" rIns="0" bIns="0" rtlCol="0" anchor="ctr"/>
           <a:lstStyle/>
           <a:p>
-            <a:pPr indent="0" marL="0">
+            <a:pPr marL="0" indent="0">
               <a:buNone/>
             </a:pPr>
             <a:r>
@@ -21645,6 +22614,13 @@
           </a:solidFill>
           <a:ln/>
         </p:spPr>
+        <p:txBody>
+          <a:bodyPr/>
+          <a:lstStyle/>
+          <a:p>
+            <a:endParaRPr lang="en-US"/>
+          </a:p>
+        </p:txBody>
       </p:sp>
       <p:sp>
         <p:nvSpPr>
@@ -21667,7 +22643,7 @@
           <a:bodyPr wrap="square" lIns="0" tIns="0" rIns="0" bIns="0" rtlCol="0" anchor="ctr"/>
           <a:lstStyle/>
           <a:p>
-            <a:pPr indent="0" marL="0">
+            <a:pPr marL="0" indent="0">
               <a:buNone/>
             </a:pPr>
             <a:r>
@@ -21706,7 +22682,7 @@
           <a:bodyPr wrap="square" lIns="0" tIns="0" rIns="0" bIns="0" rtlCol="0" anchor="ctr"/>
           <a:lstStyle/>
           <a:p>
-            <a:pPr algn="r" indent="0" marL="0">
+            <a:pPr marL="0" indent="0" algn="r">
               <a:buNone/>
             </a:pPr>
             <a:r>
@@ -21748,6 +22724,13 @@
             <a:prstDash val="solid"/>
           </a:ln>
         </p:spPr>
+        <p:txBody>
+          <a:bodyPr/>
+          <a:lstStyle/>
+          <a:p>
+            <a:endParaRPr lang="en-US"/>
+          </a:p>
+        </p:txBody>
       </p:sp>
       <p:sp>
         <p:nvSpPr>
@@ -21768,6 +22751,13 @@
           </a:solidFill>
           <a:ln/>
         </p:spPr>
+        <p:txBody>
+          <a:bodyPr/>
+          <a:lstStyle/>
+          <a:p>
+            <a:endParaRPr lang="en-US"/>
+          </a:p>
+        </p:txBody>
       </p:sp>
       <p:sp>
         <p:nvSpPr>
@@ -21790,7 +22780,7 @@
           <a:bodyPr wrap="square" lIns="0" tIns="0" rIns="0" bIns="0" rtlCol="0" anchor="ctr"/>
           <a:lstStyle/>
           <a:p>
-            <a:pPr indent="0" marL="0">
+            <a:pPr marL="0" indent="0">
               <a:buNone/>
             </a:pPr>
             <a:r>
@@ -21829,7 +22819,7 @@
           <a:bodyPr wrap="square" lIns="0" tIns="0" rIns="0" bIns="0" rtlCol="0" anchor="ctr"/>
           <a:lstStyle/>
           <a:p>
-            <a:pPr indent="0" marL="0">
+            <a:pPr marL="0" indent="0">
               <a:buNone/>
             </a:pPr>
             <a:r>
@@ -21846,7 +22836,7 @@
             <a:endParaRPr lang="en-US" sz="1200" dirty="0"/>
           </a:p>
           <a:p>
-            <a:pPr indent="0" marL="0">
+            <a:pPr marL="0" indent="0">
               <a:buNone/>
             </a:pPr>
             <a:r>
@@ -21885,7 +22875,7 @@
           <a:bodyPr wrap="square" lIns="0" tIns="0" rIns="0" bIns="0" rtlCol="0" anchor="ctr"/>
           <a:lstStyle/>
           <a:p>
-            <a:pPr indent="0" marL="0">
+            <a:pPr marL="0" indent="0">
               <a:buNone/>
             </a:pPr>
             <a:r>
@@ -21927,6 +22917,13 @@
             <a:prstDash val="solid"/>
           </a:ln>
         </p:spPr>
+        <p:txBody>
+          <a:bodyPr/>
+          <a:lstStyle/>
+          <a:p>
+            <a:endParaRPr lang="en-US"/>
+          </a:p>
+        </p:txBody>
       </p:sp>
       <p:sp>
         <p:nvSpPr>
@@ -21947,6 +22944,13 @@
           </a:solidFill>
           <a:ln/>
         </p:spPr>
+        <p:txBody>
+          <a:bodyPr/>
+          <a:lstStyle/>
+          <a:p>
+            <a:endParaRPr lang="en-US"/>
+          </a:p>
+        </p:txBody>
       </p:sp>
       <p:sp>
         <p:nvSpPr>
@@ -21969,7 +22973,7 @@
           <a:bodyPr wrap="square" lIns="0" tIns="0" rIns="0" bIns="0" rtlCol="0" anchor="ctr"/>
           <a:lstStyle/>
           <a:p>
-            <a:pPr indent="0" marL="0">
+            <a:pPr marL="0" indent="0">
               <a:buNone/>
             </a:pPr>
             <a:r>
@@ -22008,7 +23012,7 @@
           <a:bodyPr wrap="square" lIns="0" tIns="0" rIns="0" bIns="0" rtlCol="0" anchor="ctr"/>
           <a:lstStyle/>
           <a:p>
-            <a:pPr indent="0" marL="0">
+            <a:pPr marL="0" indent="0">
               <a:buNone/>
             </a:pPr>
             <a:r>
@@ -22025,7 +23029,7 @@
             <a:endParaRPr lang="en-US" sz="1200" dirty="0"/>
           </a:p>
           <a:p>
-            <a:pPr indent="0" marL="0">
+            <a:pPr marL="0" indent="0">
               <a:buNone/>
             </a:pPr>
             <a:r>
@@ -22064,7 +23068,7 @@
           <a:bodyPr wrap="square" lIns="0" tIns="0" rIns="0" bIns="0" rtlCol="0" anchor="ctr"/>
           <a:lstStyle/>
           <a:p>
-            <a:pPr indent="0" marL="0">
+            <a:pPr marL="0" indent="0">
               <a:buNone/>
             </a:pPr>
             <a:r>
@@ -22103,7 +23107,7 @@
           <a:bodyPr wrap="square" lIns="0" tIns="0" rIns="0" bIns="0" rtlCol="0" anchor="ctr"/>
           <a:lstStyle/>
           <a:p>
-            <a:pPr algn="ctr" indent="0" marL="0">
+            <a:pPr marL="0" indent="0" algn="ctr">
               <a:buNone/>
             </a:pPr>
             <a:r>
@@ -22142,7 +23146,7 @@
           <a:bodyPr wrap="square" lIns="0" tIns="0" rIns="0" bIns="0" rtlCol="0" anchor="ctr"/>
           <a:lstStyle/>
           <a:p>
-            <a:pPr indent="0" marL="0">
+            <a:pPr marL="0" indent="0">
               <a:buNone/>
             </a:pPr>
             <a:r>
@@ -22184,6 +23188,13 @@
             <a:prstDash val="solid"/>
           </a:ln>
         </p:spPr>
+        <p:txBody>
+          <a:bodyPr/>
+          <a:lstStyle/>
+          <a:p>
+            <a:endParaRPr lang="en-US"/>
+          </a:p>
+        </p:txBody>
       </p:sp>
       <p:sp>
         <p:nvSpPr>
@@ -22206,7 +23217,7 @@
           <a:bodyPr wrap="square" lIns="0" tIns="0" rIns="0" bIns="0" rtlCol="0" anchor="ctr"/>
           <a:lstStyle/>
           <a:p>
-            <a:pPr indent="0" marL="0">
+            <a:pPr marL="0" indent="0">
               <a:buNone/>
             </a:pPr>
             <a:r>
@@ -22245,7 +23256,7 @@
           <a:bodyPr wrap="square" lIns="0" tIns="0" rIns="0" bIns="0" rtlCol="0" anchor="ctr"/>
           <a:lstStyle/>
           <a:p>
-            <a:pPr indent="0" marL="0">
+            <a:pPr marL="0" indent="0">
               <a:buNone/>
             </a:pPr>
             <a:r>
@@ -22287,6 +23298,13 @@
             <a:prstDash val="solid"/>
           </a:ln>
         </p:spPr>
+        <p:txBody>
+          <a:bodyPr/>
+          <a:lstStyle/>
+          <a:p>
+            <a:endParaRPr lang="en-US"/>
+          </a:p>
+        </p:txBody>
       </p:sp>
       <p:sp>
         <p:nvSpPr>
@@ -22309,7 +23327,7 @@
           <a:bodyPr wrap="square" lIns="0" tIns="0" rIns="0" bIns="0" rtlCol="0" anchor="ctr"/>
           <a:lstStyle/>
           <a:p>
-            <a:pPr indent="0" marL="0">
+            <a:pPr marL="0" indent="0">
               <a:buNone/>
             </a:pPr>
             <a:r>
@@ -22348,7 +23366,7 @@
           <a:bodyPr wrap="square" lIns="0" tIns="0" rIns="0" bIns="0" rtlCol="0" anchor="ctr"/>
           <a:lstStyle/>
           <a:p>
-            <a:pPr indent="0" marL="0">
+            <a:pPr marL="0" indent="0">
               <a:buNone/>
             </a:pPr>
             <a:r>
@@ -22390,6 +23408,13 @@
             <a:prstDash val="solid"/>
           </a:ln>
         </p:spPr>
+        <p:txBody>
+          <a:bodyPr/>
+          <a:lstStyle/>
+          <a:p>
+            <a:endParaRPr lang="en-US"/>
+          </a:p>
+        </p:txBody>
       </p:sp>
       <p:sp>
         <p:nvSpPr>
@@ -22412,7 +23437,7 @@
           <a:bodyPr wrap="square" lIns="0" tIns="0" rIns="0" bIns="0" rtlCol="0" anchor="ctr"/>
           <a:lstStyle/>
           <a:p>
-            <a:pPr indent="0" marL="0">
+            <a:pPr marL="0" indent="0">
               <a:buNone/>
             </a:pPr>
             <a:r>
@@ -22451,7 +23476,7 @@
           <a:bodyPr wrap="square" lIns="0" tIns="0" rIns="0" bIns="0" rtlCol="0" anchor="ctr"/>
           <a:lstStyle/>
           <a:p>
-            <a:pPr indent="0" marL="0">
+            <a:pPr marL="0" indent="0">
               <a:buNone/>
             </a:pPr>
             <a:r>
@@ -22493,6 +23518,13 @@
             <a:prstDash val="solid"/>
           </a:ln>
         </p:spPr>
+        <p:txBody>
+          <a:bodyPr/>
+          <a:lstStyle/>
+          <a:p>
+            <a:endParaRPr lang="en-US"/>
+          </a:p>
+        </p:txBody>
       </p:sp>
       <p:sp>
         <p:nvSpPr>
@@ -22515,7 +23547,7 @@
           <a:bodyPr wrap="square" lIns="0" tIns="0" rIns="0" bIns="0" rtlCol="0" anchor="ctr"/>
           <a:lstStyle/>
           <a:p>
-            <a:pPr indent="0" marL="0">
+            <a:pPr marL="0" indent="0">
               <a:buNone/>
             </a:pPr>
             <a:r>
@@ -22554,7 +23586,7 @@
           <a:bodyPr wrap="square" lIns="0" tIns="0" rIns="0" bIns="0" rtlCol="0" anchor="ctr"/>
           <a:lstStyle/>
           <a:p>
-            <a:pPr indent="0" marL="0">
+            <a:pPr marL="0" indent="0">
               <a:buNone/>
             </a:pPr>
             <a:r>
@@ -22618,7 +23650,7 @@
           <a:bodyPr wrap="square" lIns="0" tIns="0" rIns="0" bIns="0" rtlCol="0" anchor="ctr"/>
           <a:lstStyle/>
           <a:p>
-            <a:pPr indent="0" marL="0">
+            <a:pPr marL="0" indent="0">
               <a:buNone/>
             </a:pPr>
             <a:r>
@@ -22655,6 +23687,13 @@
           </a:solidFill>
           <a:ln/>
         </p:spPr>
+        <p:txBody>
+          <a:bodyPr/>
+          <a:lstStyle/>
+          <a:p>
+            <a:endParaRPr lang="en-US"/>
+          </a:p>
+        </p:txBody>
       </p:sp>
       <p:sp>
         <p:nvSpPr>
@@ -22677,7 +23716,7 @@
           <a:bodyPr wrap="square" lIns="0" tIns="0" rIns="0" bIns="0" rtlCol="0" anchor="ctr"/>
           <a:lstStyle/>
           <a:p>
-            <a:pPr indent="0" marL="0">
+            <a:pPr marL="0" indent="0">
               <a:buNone/>
             </a:pPr>
             <a:r>
@@ -22716,7 +23755,7 @@
           <a:bodyPr wrap="square" lIns="0" tIns="0" rIns="0" bIns="0" rtlCol="0" anchor="ctr"/>
           <a:lstStyle/>
           <a:p>
-            <a:pPr algn="r" indent="0" marL="0">
+            <a:pPr marL="0" indent="0" algn="r">
               <a:buNone/>
             </a:pPr>
             <a:r>
@@ -22758,6 +23797,13 @@
             <a:prstDash val="solid"/>
           </a:ln>
         </p:spPr>
+        <p:txBody>
+          <a:bodyPr/>
+          <a:lstStyle/>
+          <a:p>
+            <a:endParaRPr lang="en-US"/>
+          </a:p>
+        </p:txBody>
       </p:sp>
       <p:sp>
         <p:nvSpPr>
@@ -22778,6 +23824,13 @@
           </a:solidFill>
           <a:ln/>
         </p:spPr>
+        <p:txBody>
+          <a:bodyPr/>
+          <a:lstStyle/>
+          <a:p>
+            <a:endParaRPr lang="en-US"/>
+          </a:p>
+        </p:txBody>
       </p:sp>
       <p:sp>
         <p:nvSpPr>
@@ -22800,7 +23853,7 @@
           <a:bodyPr wrap="square" lIns="0" tIns="0" rIns="0" bIns="0" rtlCol="0" anchor="ctr"/>
           <a:lstStyle/>
           <a:p>
-            <a:pPr indent="0" marL="0">
+            <a:pPr marL="0" indent="0">
               <a:buNone/>
             </a:pPr>
             <a:r>
@@ -22839,7 +23892,7 @@
           <a:bodyPr wrap="square" lIns="0" tIns="0" rIns="0" bIns="0" rtlCol="0" anchor="ctr"/>
           <a:lstStyle/>
           <a:p>
-            <a:pPr indent="0" marL="0">
+            <a:pPr marL="0" indent="0">
               <a:buNone/>
             </a:pPr>
             <a:r>
@@ -22881,6 +23934,13 @@
             <a:prstDash val="solid"/>
           </a:ln>
         </p:spPr>
+        <p:txBody>
+          <a:bodyPr/>
+          <a:lstStyle/>
+          <a:p>
+            <a:endParaRPr lang="en-US"/>
+          </a:p>
+        </p:txBody>
       </p:sp>
       <p:sp>
         <p:nvSpPr>
@@ -22901,6 +23961,13 @@
           </a:solidFill>
           <a:ln/>
         </p:spPr>
+        <p:txBody>
+          <a:bodyPr/>
+          <a:lstStyle/>
+          <a:p>
+            <a:endParaRPr lang="en-US"/>
+          </a:p>
+        </p:txBody>
       </p:sp>
       <p:sp>
         <p:nvSpPr>
@@ -22923,7 +23990,7 @@
           <a:bodyPr wrap="square" lIns="0" tIns="0" rIns="0" bIns="0" rtlCol="0" anchor="ctr"/>
           <a:lstStyle/>
           <a:p>
-            <a:pPr indent="0" marL="0">
+            <a:pPr marL="0" indent="0">
               <a:buNone/>
             </a:pPr>
             <a:r>
@@ -22962,7 +24029,7 @@
           <a:bodyPr wrap="square" lIns="0" tIns="0" rIns="0" bIns="0" rtlCol="0" anchor="ctr"/>
           <a:lstStyle/>
           <a:p>
-            <a:pPr indent="0" marL="0">
+            <a:pPr marL="0" indent="0">
               <a:buNone/>
             </a:pPr>
             <a:r>
@@ -23004,6 +24071,13 @@
             <a:prstDash val="solid"/>
           </a:ln>
         </p:spPr>
+        <p:txBody>
+          <a:bodyPr/>
+          <a:lstStyle/>
+          <a:p>
+            <a:endParaRPr lang="en-US"/>
+          </a:p>
+        </p:txBody>
       </p:sp>
       <p:sp>
         <p:nvSpPr>
@@ -23024,6 +24098,13 @@
           </a:solidFill>
           <a:ln/>
         </p:spPr>
+        <p:txBody>
+          <a:bodyPr/>
+          <a:lstStyle/>
+          <a:p>
+            <a:endParaRPr lang="en-US"/>
+          </a:p>
+        </p:txBody>
       </p:sp>
       <p:sp>
         <p:nvSpPr>
@@ -23046,7 +24127,7 @@
           <a:bodyPr wrap="square" lIns="0" tIns="0" rIns="0" bIns="0" rtlCol="0" anchor="ctr"/>
           <a:lstStyle/>
           <a:p>
-            <a:pPr indent="0" marL="0">
+            <a:pPr marL="0" indent="0">
               <a:buNone/>
             </a:pPr>
             <a:r>
@@ -23085,7 +24166,7 @@
           <a:bodyPr wrap="square" lIns="0" tIns="0" rIns="0" bIns="0" rtlCol="0" anchor="ctr"/>
           <a:lstStyle/>
           <a:p>
-            <a:pPr indent="0" marL="0">
+            <a:pPr marL="0" indent="0">
               <a:buNone/>
             </a:pPr>
             <a:r>
@@ -23127,6 +24208,13 @@
             <a:prstDash val="solid"/>
           </a:ln>
         </p:spPr>
+        <p:txBody>
+          <a:bodyPr/>
+          <a:lstStyle/>
+          <a:p>
+            <a:endParaRPr lang="en-US"/>
+          </a:p>
+        </p:txBody>
       </p:sp>
       <p:sp>
         <p:nvSpPr>
@@ -23147,6 +24235,13 @@
           </a:solidFill>
           <a:ln/>
         </p:spPr>
+        <p:txBody>
+          <a:bodyPr/>
+          <a:lstStyle/>
+          <a:p>
+            <a:endParaRPr lang="en-US"/>
+          </a:p>
+        </p:txBody>
       </p:sp>
       <p:sp>
         <p:nvSpPr>
@@ -23169,7 +24264,7 @@
           <a:bodyPr wrap="square" lIns="0" tIns="0" rIns="0" bIns="0" rtlCol="0" anchor="ctr"/>
           <a:lstStyle/>
           <a:p>
-            <a:pPr indent="0" marL="0">
+            <a:pPr marL="0" indent="0">
               <a:buNone/>
             </a:pPr>
             <a:r>
@@ -23208,7 +24303,7 @@
           <a:bodyPr wrap="square" lIns="0" tIns="0" rIns="0" bIns="0" rtlCol="0" anchor="ctr"/>
           <a:lstStyle/>
           <a:p>
-            <a:pPr indent="0" marL="0">
+            <a:pPr marL="0" indent="0">
               <a:buNone/>
             </a:pPr>
             <a:r>
@@ -23242,6 +24337,7 @@
         <a:solidFill>
           <a:srgbClr val="1B2A4A"/>
         </a:solidFill>
+        <a:effectLst/>
       </p:bgPr>
     </p:bg>
     <p:spTree>
@@ -23279,11 +24375,11 @@
           <a:bodyPr wrap="square" lIns="0" tIns="0" rIns="0" bIns="0" rtlCol="0" anchor="ctr"/>
           <a:lstStyle/>
           <a:p>
-            <a:pPr indent="0" marL="0">
-              <a:buNone/>
-            </a:pPr>
-            <a:r>
-              <a:rPr lang="en-US" sz="1600" b="1" spc="400" kern="0" dirty="0">
+            <a:pPr marL="0" indent="0">
+              <a:buNone/>
+            </a:pPr>
+            <a:r>
+              <a:rPr lang="en-US" sz="1600" b="1" kern="0" spc="400" dirty="0">
                 <a:solidFill>
                   <a:srgbClr val="0E7C7B"/>
                 </a:solidFill>
@@ -23318,7 +24414,7 @@
           <a:bodyPr wrap="square" lIns="0" tIns="0" rIns="0" bIns="0" rtlCol="0" anchor="ctr"/>
           <a:lstStyle/>
           <a:p>
-            <a:pPr indent="0" marL="0">
+            <a:pPr marL="0" indent="0">
               <a:buNone/>
             </a:pPr>
             <a:r>
@@ -23357,7 +24453,7 @@
           <a:bodyPr wrap="square" lIns="0" tIns="0" rIns="0" bIns="0" rtlCol="0" anchor="ctr"/>
           <a:lstStyle/>
           <a:p>
-            <a:pPr indent="0" marL="0">
+            <a:pPr marL="0" indent="0">
               <a:buNone/>
             </a:pPr>
             <a:r>
@@ -23394,6 +24490,13 @@
           </a:solidFill>
           <a:ln/>
         </p:spPr>
+        <p:txBody>
+          <a:bodyPr/>
+          <a:lstStyle/>
+          <a:p>
+            <a:endParaRPr lang="en-US"/>
+          </a:p>
+        </p:txBody>
       </p:sp>
     </p:spTree>
   </p:cSld>
@@ -23441,7 +24544,7 @@
           <a:bodyPr wrap="square" lIns="0" tIns="0" rIns="0" bIns="0" rtlCol="0" anchor="ctr"/>
           <a:lstStyle/>
           <a:p>
-            <a:pPr indent="0" marL="0">
+            <a:pPr marL="0" indent="0">
               <a:buNone/>
             </a:pPr>
             <a:r>
@@ -23478,6 +24581,13 @@
           </a:solidFill>
           <a:ln/>
         </p:spPr>
+        <p:txBody>
+          <a:bodyPr/>
+          <a:lstStyle/>
+          <a:p>
+            <a:endParaRPr lang="en-US"/>
+          </a:p>
+        </p:txBody>
       </p:sp>
       <p:sp>
         <p:nvSpPr>
@@ -23500,7 +24610,7 @@
           <a:bodyPr wrap="square" lIns="0" tIns="0" rIns="0" bIns="0" rtlCol="0" anchor="ctr"/>
           <a:lstStyle/>
           <a:p>
-            <a:pPr indent="0" marL="0">
+            <a:pPr marL="0" indent="0">
               <a:buNone/>
             </a:pPr>
             <a:r>
@@ -23539,7 +24649,7 @@
           <a:bodyPr wrap="square" lIns="0" tIns="0" rIns="0" bIns="0" rtlCol="0" anchor="ctr"/>
           <a:lstStyle/>
           <a:p>
-            <a:pPr algn="r" indent="0" marL="0">
+            <a:pPr marL="0" indent="0" algn="r">
               <a:buNone/>
             </a:pPr>
             <a:r>
@@ -23576,6 +24686,13 @@
           </a:solidFill>
           <a:ln/>
         </p:spPr>
+        <p:txBody>
+          <a:bodyPr/>
+          <a:lstStyle/>
+          <a:p>
+            <a:endParaRPr lang="en-US"/>
+          </a:p>
+        </p:txBody>
       </p:sp>
       <p:sp>
         <p:nvSpPr>
@@ -23598,7 +24715,7 @@
           <a:bodyPr wrap="square" lIns="0" tIns="0" rIns="0" bIns="0" rtlCol="0" anchor="ctr"/>
           <a:lstStyle/>
           <a:p>
-            <a:pPr indent="0" marL="0">
+            <a:pPr marL="0" indent="0">
               <a:buNone/>
             </a:pPr>
             <a:r>
@@ -23640,6 +24757,13 @@
             <a:prstDash val="solid"/>
           </a:ln>
         </p:spPr>
+        <p:txBody>
+          <a:bodyPr/>
+          <a:lstStyle/>
+          <a:p>
+            <a:endParaRPr lang="en-US"/>
+          </a:p>
+        </p:txBody>
       </p:sp>
       <p:sp>
         <p:nvSpPr>
@@ -23660,6 +24784,13 @@
           </a:solidFill>
           <a:ln/>
         </p:spPr>
+        <p:txBody>
+          <a:bodyPr/>
+          <a:lstStyle/>
+          <a:p>
+            <a:endParaRPr lang="en-US"/>
+          </a:p>
+        </p:txBody>
       </p:sp>
       <p:sp>
         <p:nvSpPr>
@@ -23682,7 +24813,7 @@
           <a:bodyPr wrap="square" lIns="0" tIns="0" rIns="0" bIns="0" rtlCol="0" anchor="ctr"/>
           <a:lstStyle/>
           <a:p>
-            <a:pPr indent="0" marL="0">
+            <a:pPr marL="0" indent="0">
               <a:buNone/>
             </a:pPr>
             <a:r>
@@ -23721,7 +24852,7 @@
           <a:bodyPr wrap="square" lIns="0" tIns="0" rIns="0" bIns="0" rtlCol="0" anchor="ctr"/>
           <a:lstStyle/>
           <a:p>
-            <a:pPr indent="0" marL="0">
+            <a:pPr marL="0" indent="0">
               <a:buNone/>
             </a:pPr>
             <a:r>
@@ -23738,7 +24869,7 @@
             <a:endParaRPr lang="en-US" sz="1300" dirty="0"/>
           </a:p>
           <a:p>
-            <a:pPr indent="0" marL="0">
+            <a:pPr marL="0" indent="0">
               <a:buNone/>
             </a:pPr>
             <a:r>
@@ -23755,7 +24886,7 @@
             <a:endParaRPr lang="en-US" sz="1300" dirty="0"/>
           </a:p>
           <a:p>
-            <a:pPr indent="0" marL="0">
+            <a:pPr marL="0" indent="0">
               <a:buNone/>
             </a:pPr>
             <a:r>
@@ -23772,7 +24903,7 @@
             <a:endParaRPr lang="en-US" sz="1300" dirty="0"/>
           </a:p>
           <a:p>
-            <a:pPr indent="0" marL="0">
+            <a:pPr marL="0" indent="0">
               <a:buNone/>
             </a:pPr>
             <a:r>
@@ -23789,7 +24920,7 @@
             <a:endParaRPr lang="en-US" sz="1300" dirty="0"/>
           </a:p>
           <a:p>
-            <a:pPr indent="0" marL="0">
+            <a:pPr marL="0" indent="0">
               <a:buNone/>
             </a:pPr>
             <a:r>
@@ -23806,7 +24937,7 @@
             <a:endParaRPr lang="en-US" sz="1300" dirty="0"/>
           </a:p>
           <a:p>
-            <a:pPr indent="0" marL="0">
+            <a:pPr marL="0" indent="0">
               <a:buNone/>
             </a:pPr>
             <a:r>
@@ -23848,6 +24979,13 @@
             <a:prstDash val="solid"/>
           </a:ln>
         </p:spPr>
+        <p:txBody>
+          <a:bodyPr/>
+          <a:lstStyle/>
+          <a:p>
+            <a:endParaRPr lang="en-US"/>
+          </a:p>
+        </p:txBody>
       </p:sp>
       <p:sp>
         <p:nvSpPr>
@@ -23868,6 +25006,13 @@
           </a:solidFill>
           <a:ln/>
         </p:spPr>
+        <p:txBody>
+          <a:bodyPr/>
+          <a:lstStyle/>
+          <a:p>
+            <a:endParaRPr lang="en-US"/>
+          </a:p>
+        </p:txBody>
       </p:sp>
       <p:sp>
         <p:nvSpPr>
@@ -23890,7 +25035,7 @@
           <a:bodyPr wrap="square" lIns="0" tIns="0" rIns="0" bIns="0" rtlCol="0" anchor="ctr"/>
           <a:lstStyle/>
           <a:p>
-            <a:pPr indent="0" marL="0">
+            <a:pPr marL="0" indent="0">
               <a:buNone/>
             </a:pPr>
             <a:r>
@@ -23932,6 +25077,13 @@
             <a:prstDash val="solid"/>
           </a:ln>
         </p:spPr>
+        <p:txBody>
+          <a:bodyPr/>
+          <a:lstStyle/>
+          <a:p>
+            <a:endParaRPr lang="en-US"/>
+          </a:p>
+        </p:txBody>
       </p:sp>
       <p:sp>
         <p:nvSpPr>
@@ -23954,7 +25106,7 @@
           <a:bodyPr wrap="square" lIns="0" tIns="0" rIns="0" bIns="0" rtlCol="0" anchor="ctr"/>
           <a:lstStyle/>
           <a:p>
-            <a:pPr algn="ctr" indent="0" marL="0">
+            <a:pPr marL="0" indent="0" algn="ctr">
               <a:buNone/>
             </a:pPr>
             <a:r>
@@ -23996,6 +25148,13 @@
             <a:prstDash val="solid"/>
           </a:ln>
         </p:spPr>
+        <p:txBody>
+          <a:bodyPr/>
+          <a:lstStyle/>
+          <a:p>
+            <a:endParaRPr lang="en-US"/>
+          </a:p>
+        </p:txBody>
       </p:sp>
       <p:sp>
         <p:nvSpPr>
@@ -24018,7 +25177,7 @@
           <a:bodyPr wrap="square" lIns="0" tIns="0" rIns="0" bIns="0" rtlCol="0" anchor="ctr"/>
           <a:lstStyle/>
           <a:p>
-            <a:pPr algn="ctr" indent="0" marL="0">
+            <a:pPr marL="0" indent="0" algn="ctr">
               <a:buNone/>
             </a:pPr>
             <a:r>
@@ -24060,6 +25219,13 @@
             <a:prstDash val="solid"/>
           </a:ln>
         </p:spPr>
+        <p:txBody>
+          <a:bodyPr/>
+          <a:lstStyle/>
+          <a:p>
+            <a:endParaRPr lang="en-US"/>
+          </a:p>
+        </p:txBody>
       </p:sp>
       <p:sp>
         <p:nvSpPr>
@@ -24082,7 +25248,7 @@
           <a:bodyPr wrap="square" lIns="0" tIns="0" rIns="0" bIns="0" rtlCol="0" anchor="ctr"/>
           <a:lstStyle/>
           <a:p>
-            <a:pPr algn="ctr" indent="0" marL="0">
+            <a:pPr marL="0" indent="0" algn="ctr">
               <a:buNone/>
             </a:pPr>
             <a:r>
@@ -24124,6 +25290,13 @@
             <a:prstDash val="solid"/>
           </a:ln>
         </p:spPr>
+        <p:txBody>
+          <a:bodyPr/>
+          <a:lstStyle/>
+          <a:p>
+            <a:endParaRPr lang="en-US"/>
+          </a:p>
+        </p:txBody>
       </p:sp>
       <p:sp>
         <p:nvSpPr>
@@ -24146,7 +25319,7 @@
           <a:bodyPr wrap="square" lIns="0" tIns="0" rIns="0" bIns="0" rtlCol="0" anchor="ctr"/>
           <a:lstStyle/>
           <a:p>
-            <a:pPr algn="ctr" indent="0" marL="0">
+            <a:pPr marL="0" indent="0" algn="ctr">
               <a:buNone/>
             </a:pPr>
             <a:r>
@@ -24188,6 +25361,13 @@
             <a:prstDash val="solid"/>
           </a:ln>
         </p:spPr>
+        <p:txBody>
+          <a:bodyPr/>
+          <a:lstStyle/>
+          <a:p>
+            <a:endParaRPr lang="en-US"/>
+          </a:p>
+        </p:txBody>
       </p:sp>
       <p:sp>
         <p:nvSpPr>
@@ -24210,7 +25390,7 @@
           <a:bodyPr wrap="square" lIns="0" tIns="0" rIns="0" bIns="0" rtlCol="0" anchor="ctr"/>
           <a:lstStyle/>
           <a:p>
-            <a:pPr algn="ctr" indent="0" marL="0">
+            <a:pPr marL="0" indent="0" algn="ctr">
               <a:buNone/>
             </a:pPr>
             <a:r>
@@ -24228,7 +25408,241 @@
           </a:p>
         </p:txBody>
       </p:sp>
+      <p:sp>
+        <p:nvSpPr>
+          <p:cNvPr id="100" name="Arrow 100"/>
+          <p:cNvSpPr>
+            <a:spLocks noGrp="1"/>
+          </p:cNvSpPr>
+          <p:nvPr/>
+        </p:nvSpPr>
+        <p:spPr>
+          <a:xfrm rot="5400000">
+            <a:off x="6692900" y="2609850"/>
+            <a:ext cx="139700" cy="25400"/>
+          </a:xfrm>
+          <a:prstGeom prst="line">
+            <a:avLst/>
+          </a:prstGeom>
+          <a:ln w="19050">
+            <a:solidFill>
+              <a:srgbClr val="0E7C7B"/>
+            </a:solidFill>
+            <a:tailEnd type="arrow" w="med" len="med"/>
+          </a:ln>
+        </p:spPr>
+        <p:txBody>
+          <a:bodyPr/>
+          <a:lstStyle/>
+          <a:p>
+            <a:endParaRPr lang="en-US" dirty="0"/>
+          </a:p>
+        </p:txBody>
+      </p:sp>
+      <p:sp>
+        <p:nvSpPr>
+          <p:cNvPr id="101" name="Arrow 101"/>
+          <p:cNvSpPr>
+            <a:spLocks noGrp="1"/>
+          </p:cNvSpPr>
+          <p:nvPr/>
+        </p:nvSpPr>
+        <p:spPr>
+          <a:xfrm rot="9479323">
+            <a:off x="5920136" y="3117850"/>
+            <a:ext cx="643829" cy="25400"/>
+          </a:xfrm>
+          <a:prstGeom prst="line">
+            <a:avLst/>
+          </a:prstGeom>
+          <a:ln w="19050">
+            <a:solidFill>
+              <a:srgbClr val="0E7C7B"/>
+            </a:solidFill>
+            <a:tailEnd type="arrow" w="med" len="med"/>
+          </a:ln>
+        </p:spPr>
+        <p:txBody>
+          <a:bodyPr/>
+          <a:lstStyle/>
+          <a:p>
+            <a:endParaRPr lang="en-US" dirty="0"/>
+          </a:p>
+        </p:txBody>
+      </p:sp>
+      <p:sp>
+        <p:nvSpPr>
+          <p:cNvPr id="102" name="Label 102"/>
+          <p:cNvSpPr txBox="1">
+            <a:spLocks noGrp="1"/>
+          </p:cNvSpPr>
+          <p:nvPr/>
+        </p:nvSpPr>
+        <p:spPr>
+          <a:xfrm>
+            <a:off x="6045200" y="3035300"/>
+            <a:ext cx="457200" cy="177800"/>
+          </a:xfrm>
+          <a:prstGeom prst="rect">
+            <a:avLst/>
+          </a:prstGeom>
+          <a:noFill/>
+        </p:spPr>
+        <p:txBody>
+          <a:bodyPr wrap="none" anchor="ctr"/>
+          <a:lstStyle/>
+          <a:p>
+            <a:pPr algn="ctr">
+              <a:buNone/>
+            </a:pPr>
+            <a:r>
+              <a:rPr lang="en-US" sz="900" b="1" dirty="0">
+                <a:solidFill>
+                  <a:srgbClr val="2D6A4F"/>
+                </a:solidFill>
+                <a:latin typeface="Calibri" pitchFamily="34" charset="0"/>
+              </a:rPr>
+              <a:t>T</a:t>
+            </a:r>
+          </a:p>
+        </p:txBody>
+      </p:sp>
+      <p:sp>
+        <p:nvSpPr>
+          <p:cNvPr id="103" name="Arrow 103"/>
+          <p:cNvSpPr>
+            <a:spLocks noGrp="1"/>
+          </p:cNvSpPr>
+          <p:nvPr/>
+        </p:nvSpPr>
+        <p:spPr>
+          <a:xfrm rot="1153186">
+            <a:off x="6964572" y="3117850"/>
+            <a:ext cx="733006" cy="25400"/>
+          </a:xfrm>
+          <a:prstGeom prst="line">
+            <a:avLst/>
+          </a:prstGeom>
+          <a:ln w="19050">
+            <a:solidFill>
+              <a:srgbClr val="0E7C7B"/>
+            </a:solidFill>
+            <a:tailEnd type="arrow" w="med" len="med"/>
+          </a:ln>
+        </p:spPr>
+        <p:txBody>
+          <a:bodyPr/>
+          <a:lstStyle/>
+          <a:p>
+            <a:endParaRPr lang="en-US" dirty="0"/>
+          </a:p>
+        </p:txBody>
+      </p:sp>
+      <p:sp>
+        <p:nvSpPr>
+          <p:cNvPr id="104" name="Label 104"/>
+          <p:cNvSpPr txBox="1">
+            <a:spLocks noGrp="1"/>
+          </p:cNvSpPr>
+          <p:nvPr/>
+        </p:nvSpPr>
+        <p:spPr>
+          <a:xfrm>
+            <a:off x="7061200" y="3035300"/>
+            <a:ext cx="381000" cy="177800"/>
+          </a:xfrm>
+          <a:prstGeom prst="rect">
+            <a:avLst/>
+          </a:prstGeom>
+          <a:noFill/>
+        </p:spPr>
+        <p:txBody>
+          <a:bodyPr wrap="none" anchor="ctr"/>
+          <a:lstStyle/>
+          <a:p>
+            <a:pPr algn="ctr">
+              <a:buNone/>
+            </a:pPr>
+            <a:r>
+              <a:rPr lang="en-US" sz="900" b="1" dirty="0">
+                <a:solidFill>
+                  <a:srgbClr val="C0392B"/>
+                </a:solidFill>
+                <a:latin typeface="Calibri" pitchFamily="34" charset="0"/>
+              </a:rPr>
+              <a:t>F</a:t>
+            </a:r>
+          </a:p>
+        </p:txBody>
+      </p:sp>
+      <p:sp>
+        <p:nvSpPr>
+          <p:cNvPr id="105" name="Arrow 105"/>
+          <p:cNvSpPr>
+            <a:spLocks noGrp="1"/>
+          </p:cNvSpPr>
+          <p:nvPr/>
+        </p:nvSpPr>
+        <p:spPr>
+          <a:xfrm rot="1391915">
+            <a:off x="5920139" y="3670300"/>
+            <a:ext cx="580322" cy="25400"/>
+          </a:xfrm>
+          <a:prstGeom prst="line">
+            <a:avLst/>
+          </a:prstGeom>
+          <a:ln w="19050">
+            <a:solidFill>
+              <a:srgbClr val="0E7C7B"/>
+            </a:solidFill>
+            <a:tailEnd type="arrow" w="med" len="med"/>
+          </a:ln>
+        </p:spPr>
+        <p:txBody>
+          <a:bodyPr/>
+          <a:lstStyle/>
+          <a:p>
+            <a:endParaRPr lang="en-US" dirty="0"/>
+          </a:p>
+        </p:txBody>
+      </p:sp>
+      <p:sp>
+        <p:nvSpPr>
+          <p:cNvPr id="106" name="Arrow 106"/>
+          <p:cNvSpPr>
+            <a:spLocks noGrp="1"/>
+          </p:cNvSpPr>
+          <p:nvPr/>
+        </p:nvSpPr>
+        <p:spPr>
+          <a:xfrm rot="9578304">
+            <a:off x="7040674" y="3670300"/>
+            <a:ext cx="657003" cy="25400"/>
+          </a:xfrm>
+          <a:prstGeom prst="line">
+            <a:avLst/>
+          </a:prstGeom>
+          <a:ln w="19050">
+            <a:solidFill>
+              <a:srgbClr val="0E7C7B"/>
+            </a:solidFill>
+            <a:tailEnd type="arrow" w="med" len="med"/>
+          </a:ln>
+        </p:spPr>
+        <p:txBody>
+          <a:bodyPr/>
+          <a:lstStyle/>
+          <a:p>
+            <a:endParaRPr lang="en-US" dirty="0"/>
+          </a:p>
+        </p:txBody>
+      </p:sp>
     </p:spTree>
+    <p:extLst>
+      <p:ext uri="{BB962C8B-B14F-4D97-AF65-F5344CB8AC3E}">
+        <p14:creationId xmlns:p14="http://schemas.microsoft.com/office/powerpoint/2010/main" val="1382288401"/>
+      </p:ext>
+    </p:extLst>
   </p:cSld>
   <p:clrMapOvr>
     <a:masterClrMapping/>
@@ -24529,4 +25943,341 @@
     </a:ext>
   </a:extLst>
 </a:theme>
+</file>
+
+<file path=ppt/theme/theme2.xml><?xml version="1.0" encoding="utf-8"?>
+<a:theme xmlns:a="http://schemas.openxmlformats.org/drawingml/2006/main" name="Office Theme">
+  <a:themeElements>
+    <a:clrScheme name="Office">
+      <a:dk1>
+        <a:sysClr val="windowText" lastClr="000000"/>
+      </a:dk1>
+      <a:lt1>
+        <a:sysClr val="window" lastClr="FFFFFF"/>
+      </a:lt1>
+      <a:dk2>
+        <a:srgbClr val="0E2841"/>
+      </a:dk2>
+      <a:lt2>
+        <a:srgbClr val="E8E8E8"/>
+      </a:lt2>
+      <a:accent1>
+        <a:srgbClr val="156082"/>
+      </a:accent1>
+      <a:accent2>
+        <a:srgbClr val="E97132"/>
+      </a:accent2>
+      <a:accent3>
+        <a:srgbClr val="196B24"/>
+      </a:accent3>
+      <a:accent4>
+        <a:srgbClr val="0F9ED5"/>
+      </a:accent4>
+      <a:accent5>
+        <a:srgbClr val="A02B93"/>
+      </a:accent5>
+      <a:accent6>
+        <a:srgbClr val="4EA72E"/>
+      </a:accent6>
+      <a:hlink>
+        <a:srgbClr val="467886"/>
+      </a:hlink>
+      <a:folHlink>
+        <a:srgbClr val="96607D"/>
+      </a:folHlink>
+    </a:clrScheme>
+    <a:fontScheme name="Office">
+      <a:majorFont>
+        <a:latin typeface="Aptos Display" panose="02110004020202020204"/>
+        <a:ea typeface=""/>
+        <a:cs typeface=""/>
+        <a:font script="Jpan" typeface="游ゴシック Light"/>
+        <a:font script="Hang" typeface="맑은 고딕"/>
+        <a:font script="Hans" typeface="等线 Light"/>
+        <a:font script="Hant" typeface="新細明體"/>
+        <a:font script="Arab" typeface="Times New Roman"/>
+        <a:font script="Hebr" typeface="Times New Roman"/>
+        <a:font script="Thai" typeface="Angsana New"/>
+        <a:font script="Ethi" typeface="Nyala"/>
+        <a:font script="Beng" typeface="Vrinda"/>
+        <a:font script="Gujr" typeface="Shruti"/>
+        <a:font script="Khmr" typeface="MoolBoran"/>
+        <a:font script="Knda" typeface="Tunga"/>
+        <a:font script="Guru" typeface="Raavi"/>
+        <a:font script="Cans" typeface="Euphemia"/>
+        <a:font script="Cher" typeface="Plantagenet Cherokee"/>
+        <a:font script="Yiii" typeface="Microsoft Yi Baiti"/>
+        <a:font script="Tibt" typeface="Microsoft Himalaya"/>
+        <a:font script="Thaa" typeface="MV Boli"/>
+        <a:font script="Deva" typeface="Mangal"/>
+        <a:font script="Telu" typeface="Gautami"/>
+        <a:font script="Taml" typeface="Latha"/>
+        <a:font script="Syrc" typeface="Estrangelo Edessa"/>
+        <a:font script="Orya" typeface="Kalinga"/>
+        <a:font script="Mlym" typeface="Kartika"/>
+        <a:font script="Laoo" typeface="DokChampa"/>
+        <a:font script="Sinh" typeface="Iskoola Pota"/>
+        <a:font script="Mong" typeface="Mongolian Baiti"/>
+        <a:font script="Viet" typeface="Times New Roman"/>
+        <a:font script="Uigh" typeface="Microsoft Uighur"/>
+        <a:font script="Geor" typeface="Sylfaen"/>
+        <a:font script="Armn" typeface="Arial"/>
+        <a:font script="Bugi" typeface="Leelawadee UI"/>
+        <a:font script="Bopo" typeface="Microsoft JhengHei"/>
+        <a:font script="Java" typeface="Javanese Text"/>
+        <a:font script="Lisu" typeface="Segoe UI"/>
+        <a:font script="Mymr" typeface="Myanmar Text"/>
+        <a:font script="Nkoo" typeface="Ebrima"/>
+        <a:font script="Olck" typeface="Nirmala UI"/>
+        <a:font script="Osma" typeface="Ebrima"/>
+        <a:font script="Phag" typeface="Phagspa"/>
+        <a:font script="Syrn" typeface="Estrangelo Edessa"/>
+        <a:font script="Syrj" typeface="Estrangelo Edessa"/>
+        <a:font script="Syre" typeface="Estrangelo Edessa"/>
+        <a:font script="Sora" typeface="Nirmala UI"/>
+        <a:font script="Tale" typeface="Microsoft Tai Le"/>
+        <a:font script="Talu" typeface="Microsoft New Tai Lue"/>
+        <a:font script="Tfng" typeface="Ebrima"/>
+      </a:majorFont>
+      <a:minorFont>
+        <a:latin typeface="Aptos" panose="02110004020202020204"/>
+        <a:ea typeface=""/>
+        <a:cs typeface=""/>
+        <a:font script="Jpan" typeface="游ゴシック"/>
+        <a:font script="Hang" typeface="맑은 고딕"/>
+        <a:font script="Hans" typeface="等线"/>
+        <a:font script="Hant" typeface="新細明體"/>
+        <a:font script="Arab" typeface="Arial"/>
+        <a:font script="Hebr" typeface="Arial"/>
+        <a:font script="Thai" typeface="Cordia New"/>
+        <a:font script="Ethi" typeface="Nyala"/>
+        <a:font script="Beng" typeface="Vrinda"/>
+        <a:font script="Gujr" typeface="Shruti"/>
+        <a:font script="Khmr" typeface="DaunPenh"/>
+        <a:font script="Knda" typeface="Tunga"/>
+        <a:font script="Guru" typeface="Raavi"/>
+        <a:font script="Cans" typeface="Euphemia"/>
+        <a:font script="Cher" typeface="Plantagenet Cherokee"/>
+        <a:font script="Yiii" typeface="Microsoft Yi Baiti"/>
+        <a:font script="Tibt" typeface="Microsoft Himalaya"/>
+        <a:font script="Thaa" typeface="MV Boli"/>
+        <a:font script="Deva" typeface="Mangal"/>
+        <a:font script="Telu" typeface="Gautami"/>
+        <a:font script="Taml" typeface="Latha"/>
+        <a:font script="Syrc" typeface="Estrangelo Edessa"/>
+        <a:font script="Orya" typeface="Kalinga"/>
+        <a:font script="Mlym" typeface="Kartika"/>
+        <a:font script="Laoo" typeface="DokChampa"/>
+        <a:font script="Sinh" typeface="Iskoola Pota"/>
+        <a:font script="Mong" typeface="Mongolian Baiti"/>
+        <a:font script="Viet" typeface="Arial"/>
+        <a:font script="Uigh" typeface="Microsoft Uighur"/>
+        <a:font script="Geor" typeface="Sylfaen"/>
+        <a:font script="Armn" typeface="Arial"/>
+        <a:font script="Bugi" typeface="Leelawadee UI"/>
+        <a:font script="Bopo" typeface="Microsoft JhengHei"/>
+        <a:font script="Java" typeface="Javanese Text"/>
+        <a:font script="Lisu" typeface="Segoe UI"/>
+        <a:font script="Mymr" typeface="Myanmar Text"/>
+        <a:font script="Nkoo" typeface="Ebrima"/>
+        <a:font script="Olck" typeface="Nirmala UI"/>
+        <a:font script="Osma" typeface="Ebrima"/>
+        <a:font script="Phag" typeface="Phagspa"/>
+        <a:font script="Syrn" typeface="Estrangelo Edessa"/>
+        <a:font script="Syrj" typeface="Estrangelo Edessa"/>
+        <a:font script="Syre" typeface="Estrangelo Edessa"/>
+        <a:font script="Sora" typeface="Nirmala UI"/>
+        <a:font script="Tale" typeface="Microsoft Tai Le"/>
+        <a:font script="Talu" typeface="Microsoft New Tai Lue"/>
+        <a:font script="Tfng" typeface="Ebrima"/>
+      </a:minorFont>
+    </a:fontScheme>
+    <a:fmtScheme name="Office">
+      <a:fillStyleLst>
+        <a:solidFill>
+          <a:schemeClr val="phClr"/>
+        </a:solidFill>
+        <a:gradFill rotWithShape="1">
+          <a:gsLst>
+            <a:gs pos="0">
+              <a:schemeClr val="phClr">
+                <a:lumMod val="110000"/>
+                <a:satMod val="105000"/>
+                <a:tint val="67000"/>
+              </a:schemeClr>
+            </a:gs>
+            <a:gs pos="50000">
+              <a:schemeClr val="phClr">
+                <a:lumMod val="105000"/>
+                <a:satMod val="103000"/>
+                <a:tint val="73000"/>
+              </a:schemeClr>
+            </a:gs>
+            <a:gs pos="100000">
+              <a:schemeClr val="phClr">
+                <a:lumMod val="105000"/>
+                <a:satMod val="109000"/>
+                <a:tint val="81000"/>
+              </a:schemeClr>
+            </a:gs>
+          </a:gsLst>
+          <a:lin ang="5400000" scaled="0"/>
+        </a:gradFill>
+        <a:gradFill rotWithShape="1">
+          <a:gsLst>
+            <a:gs pos="0">
+              <a:schemeClr val="phClr">
+                <a:satMod val="103000"/>
+                <a:lumMod val="102000"/>
+                <a:tint val="94000"/>
+              </a:schemeClr>
+            </a:gs>
+            <a:gs pos="50000">
+              <a:schemeClr val="phClr">
+                <a:satMod val="110000"/>
+                <a:lumMod val="100000"/>
+                <a:shade val="100000"/>
+              </a:schemeClr>
+            </a:gs>
+            <a:gs pos="100000">
+              <a:schemeClr val="phClr">
+                <a:lumMod val="99000"/>
+                <a:satMod val="120000"/>
+                <a:shade val="78000"/>
+              </a:schemeClr>
+            </a:gs>
+          </a:gsLst>
+          <a:lin ang="5400000" scaled="0"/>
+        </a:gradFill>
+      </a:fillStyleLst>
+      <a:lnStyleLst>
+        <a:ln w="12700" cap="flat" cmpd="sng" algn="ctr">
+          <a:solidFill>
+            <a:schemeClr val="phClr"/>
+          </a:solidFill>
+          <a:prstDash val="solid"/>
+          <a:miter lim="800000"/>
+        </a:ln>
+        <a:ln w="19050" cap="flat" cmpd="sng" algn="ctr">
+          <a:solidFill>
+            <a:schemeClr val="phClr"/>
+          </a:solidFill>
+          <a:prstDash val="solid"/>
+          <a:miter lim="800000"/>
+        </a:ln>
+        <a:ln w="25400" cap="flat" cmpd="sng" algn="ctr">
+          <a:solidFill>
+            <a:schemeClr val="phClr"/>
+          </a:solidFill>
+          <a:prstDash val="solid"/>
+          <a:miter lim="800000"/>
+        </a:ln>
+      </a:lnStyleLst>
+      <a:effectStyleLst>
+        <a:effectStyle>
+          <a:effectLst/>
+        </a:effectStyle>
+        <a:effectStyle>
+          <a:effectLst/>
+        </a:effectStyle>
+        <a:effectStyle>
+          <a:effectLst>
+            <a:outerShdw blurRad="57150" dist="19050" dir="5400000" algn="ctr" rotWithShape="0">
+              <a:srgbClr val="000000">
+                <a:alpha val="63000"/>
+              </a:srgbClr>
+            </a:outerShdw>
+          </a:effectLst>
+        </a:effectStyle>
+      </a:effectStyleLst>
+      <a:bgFillStyleLst>
+        <a:solidFill>
+          <a:schemeClr val="phClr"/>
+        </a:solidFill>
+        <a:solidFill>
+          <a:schemeClr val="phClr">
+            <a:tint val="95000"/>
+            <a:satMod val="170000"/>
+          </a:schemeClr>
+        </a:solidFill>
+        <a:gradFill rotWithShape="1">
+          <a:gsLst>
+            <a:gs pos="0">
+              <a:schemeClr val="phClr">
+                <a:tint val="93000"/>
+                <a:satMod val="150000"/>
+                <a:shade val="98000"/>
+                <a:lumMod val="102000"/>
+              </a:schemeClr>
+            </a:gs>
+            <a:gs pos="50000">
+              <a:schemeClr val="phClr">
+                <a:tint val="98000"/>
+                <a:satMod val="130000"/>
+                <a:shade val="90000"/>
+                <a:lumMod val="103000"/>
+              </a:schemeClr>
+            </a:gs>
+            <a:gs pos="100000">
+              <a:schemeClr val="phClr">
+                <a:shade val="63000"/>
+                <a:satMod val="120000"/>
+              </a:schemeClr>
+            </a:gs>
+          </a:gsLst>
+          <a:lin ang="5400000" scaled="0"/>
+        </a:gradFill>
+      </a:bgFillStyleLst>
+    </a:fmtScheme>
+  </a:themeElements>
+  <a:objectDefaults>
+    <a:lnDef>
+      <a:spPr/>
+      <a:bodyPr/>
+      <a:lstStyle/>
+      <a:style>
+        <a:lnRef idx="2">
+          <a:schemeClr val="accent1"/>
+        </a:lnRef>
+        <a:fillRef idx="0">
+          <a:schemeClr val="accent1"/>
+        </a:fillRef>
+        <a:effectRef idx="1">
+          <a:schemeClr val="accent1"/>
+        </a:effectRef>
+        <a:fontRef idx="minor">
+          <a:schemeClr val="tx1"/>
+        </a:fontRef>
+      </a:style>
+    </a:lnDef>
+  </a:objectDefaults>
+  <a:extraClrSchemeLst/>
+  <a:extLst>
+    <a:ext uri="{05A4C25C-085E-4340-85A3-A5531E510DB2}">
+      <thm15:themeFamily xmlns:thm15="http://schemas.microsoft.com/office/thememl/2012/main" name="Office Theme" id="{2E142A2C-CD16-42D6-873A-C26D2A0506FA}" vid="{1BDDFF52-6CD6-40A5-AB3C-68EB2F1E4D0A}"/>
+    </a:ext>
+  </a:extLst>
+</a:theme>
+</file>
+
+<file path=ppt/webextensions/taskpanes.xml><?xml version="1.0" encoding="utf-8"?>
+<wetp:taskpanes xmlns:wetp="http://schemas.microsoft.com/office/webextensions/taskpanes/2010/11">
+  <wetp:taskpane dockstate="right" visibility="0" width="350" row="0">
+    <wetp:webextensionref xmlns:r="http://schemas.openxmlformats.org/officeDocument/2006/relationships" r:id="rId1"/>
+  </wetp:taskpane>
+</wetp:taskpanes>
+</file>
+
+<file path=ppt/webextensions/webextension1.xml><?xml version="1.0" encoding="utf-8"?>
+<we:webextension xmlns:we="http://schemas.microsoft.com/office/webextensions/webextension/2010/11" id="{77B5F910-2CD2-4C42-81AE-8CD4859F505D}">
+  <we:reference id="wa200010001" version="1.0.0.1" store="en-US" storeType="OMEX"/>
+  <we:alternateReferences>
+    <we:reference id="WA200010001" version="1.0.0.1" store="" storeType="OMEX"/>
+  </we:alternateReferences>
+  <we:properties>
+    <we:property name="claude.fileId" value="&quot;4406c0cf-f776-44de-97bb-2d7c710a2463&quot;"/>
+  </we:properties>
+  <we:bindings/>
+  <we:snapshot xmlns:r="http://schemas.openxmlformats.org/officeDocument/2006/relationships"/>
+</we:webextension>
 </file>